--- a/cours/Module TIC/Département Français/Master 1 - Langue et Culture/Cours_TIC_09_Reseaux_Informatiques_FR.pptx
+++ b/cours/Module TIC/Département Français/Master 1 - Langue et Culture/Cours_TIC_09_Reseaux_Informatiques_FR.pptx
@@ -4,9 +4,6 @@
   <p:sldMasterIdLst>
     <p:sldMasterId id="2147483648" r:id="rId1"/>
   </p:sldMasterIdLst>
-  <p:notesMasterIdLst>
-    <p:notesMasterId r:id="rId33"/>
-  </p:notesMasterIdLst>
   <p:sldIdLst>
     <p:sldId id="256" r:id="rId7"/>
     <p:sldId id="257" r:id="rId8"/>
@@ -18,6 +15,11 @@
     <p:sldId id="263" r:id="rId14"/>
     <p:sldId id="264" r:id="rId15"/>
     <p:sldId id="265" r:id="rId16"/>
+    <p:sldId id="266" r:id="rId17"/>
+    <p:sldId id="267" r:id="rId18"/>
+    <p:sldId id="268" r:id="rId19"/>
+    <p:sldId id="269" r:id="rId20"/>
+    <p:sldId id="270" r:id="rId21"/>
   </p:sldIdLst>
   <p:sldSz cx="9144000" cy="6858000" type="screen4x3"/>
   <p:notesSz cx="6858000" cy="9144000"/>
@@ -116,372 +118,7 @@
       </a:defRPr>
     </a:lvl9pPr>
   </p:defaultTextStyle>
-  <p:extLst>
-    <p:ext uri="{EFAFB233-063F-42B5-8137-9DF3F51BA10A}">
-      <p15:sldGuideLst xmlns:p15="http://schemas.microsoft.com/office/powerpoint/2012/main">
-        <p15:guide id="1" orient="horz" pos="2160">
-          <p15:clr>
-            <a:srgbClr val="A4A3A4"/>
-          </p15:clr>
-        </p15:guide>
-        <p15:guide id="2" pos="2880">
-          <p15:clr>
-            <a:srgbClr val="A4A3A4"/>
-          </p15:clr>
-        </p15:guide>
-      </p15:sldGuideLst>
-    </p:ext>
-  </p:extLst>
 </p:presentation>
-</file>
-
-<file path=ppt/notesMasters/notesMaster1.xml><?xml version="1.0" encoding="utf-8"?>
-<p:notesMaster xmlns:a="http://schemas.openxmlformats.org/drawingml/2006/main" xmlns:r="http://schemas.openxmlformats.org/officeDocument/2006/relationships" xmlns:p="http://schemas.openxmlformats.org/presentationml/2006/main">
-  <p:cSld>
-    <p:bg>
-      <p:bgRef idx="1001">
-        <a:schemeClr val="bg1"/>
-      </p:bgRef>
-    </p:bg>
-    <p:spTree>
-      <p:nvGrpSpPr>
-        <p:cNvPr id="1" name=""/>
-        <p:cNvGrpSpPr/>
-        <p:nvPr/>
-      </p:nvGrpSpPr>
-      <p:grpSpPr>
-        <a:xfrm>
-          <a:off x="0" y="0"/>
-          <a:ext cx="0" cy="0"/>
-          <a:chOff x="0" y="0"/>
-          <a:chExt cx="0" cy="0"/>
-        </a:xfrm>
-      </p:grpSpPr>
-      <p:sp>
-        <p:nvSpPr>
-          <p:cNvPr id="2" name="Espace réservé de l'en-tête 1"/>
-          <p:cNvSpPr>
-            <a:spLocks noGrp="1"/>
-          </p:cNvSpPr>
-          <p:nvPr>
-            <p:ph type="hdr" sz="quarter"/>
-          </p:nvPr>
-        </p:nvSpPr>
-        <p:spPr>
-          <a:xfrm>
-            <a:off x="0" y="0"/>
-            <a:ext cx="2971800" cy="458788"/>
-          </a:xfrm>
-          <a:prstGeom prst="rect">
-            <a:avLst/>
-          </a:prstGeom>
-        </p:spPr>
-        <p:txBody>
-          <a:bodyPr vert="horz" lIns="91440" tIns="45720" rIns="91440" bIns="45720" rtlCol="0"/>
-          <a:lstStyle>
-            <a:lvl1pPr algn="l">
-              <a:defRPr sz="1200"/>
-            </a:lvl1pPr>
-          </a:lstStyle>
-          <a:p>
-            <a:endParaRPr lang="fr-FR"/>
-          </a:p>
-        </p:txBody>
-      </p:sp>
-      <p:sp>
-        <p:nvSpPr>
-          <p:cNvPr id="3" name="Espace réservé de la date 2"/>
-          <p:cNvSpPr>
-            <a:spLocks noGrp="1"/>
-          </p:cNvSpPr>
-          <p:nvPr>
-            <p:ph type="dt" idx="1"/>
-          </p:nvPr>
-        </p:nvSpPr>
-        <p:spPr>
-          <a:xfrm>
-            <a:off x="3884613" y="0"/>
-            <a:ext cx="2971800" cy="458788"/>
-          </a:xfrm>
-          <a:prstGeom prst="rect">
-            <a:avLst/>
-          </a:prstGeom>
-        </p:spPr>
-        <p:txBody>
-          <a:bodyPr vert="horz" lIns="91440" tIns="45720" rIns="91440" bIns="45720" rtlCol="0"/>
-          <a:lstStyle>
-            <a:lvl1pPr algn="r">
-              <a:defRPr sz="1200"/>
-            </a:lvl1pPr>
-          </a:lstStyle>
-          <a:p>
-            <a:fld id="{B8F0B2C1-4194-45A7-9834-731A4F36BABD}" type="datetimeFigureOut">
-              <a:rPr lang="fr-FR" smtClean="0"/>
-              <a:t>16/05/2026</a:t>
-            </a:fld>
-            <a:endParaRPr lang="fr-FR"/>
-          </a:p>
-        </p:txBody>
-      </p:sp>
-      <p:sp>
-        <p:nvSpPr>
-          <p:cNvPr id="4" name="Espace réservé de l'image des diapositives 3"/>
-          <p:cNvSpPr>
-            <a:spLocks noGrp="1" noRot="1" noChangeAspect="1"/>
-          </p:cNvSpPr>
-          <p:nvPr>
-            <p:ph type="sldImg" idx="2"/>
-          </p:nvPr>
-        </p:nvSpPr>
-        <p:spPr>
-          <a:xfrm>
-            <a:off x="1371600" y="1143000"/>
-            <a:ext cx="4114800" cy="3086100"/>
-          </a:xfrm>
-          <a:prstGeom prst="rect">
-            <a:avLst/>
-          </a:prstGeom>
-          <a:noFill/>
-          <a:ln w="12700">
-            <a:solidFill>
-              <a:prstClr val="black"/>
-            </a:solidFill>
-          </a:ln>
-        </p:spPr>
-        <p:txBody>
-          <a:bodyPr vert="horz" lIns="91440" tIns="45720" rIns="91440" bIns="45720" rtlCol="0" anchor="ctr"/>
-          <a:lstStyle/>
-          <a:p>
-            <a:endParaRPr lang="fr-FR"/>
-          </a:p>
-        </p:txBody>
-      </p:sp>
-      <p:sp>
-        <p:nvSpPr>
-          <p:cNvPr id="5" name="Espace réservé des notes 4"/>
-          <p:cNvSpPr>
-            <a:spLocks noGrp="1"/>
-          </p:cNvSpPr>
-          <p:nvPr>
-            <p:ph type="body" sz="quarter" idx="3"/>
-          </p:nvPr>
-        </p:nvSpPr>
-        <p:spPr>
-          <a:xfrm>
-            <a:off x="685800" y="4400550"/>
-            <a:ext cx="5486400" cy="3600450"/>
-          </a:xfrm>
-          <a:prstGeom prst="rect">
-            <a:avLst/>
-          </a:prstGeom>
-        </p:spPr>
-        <p:txBody>
-          <a:bodyPr vert="horz" lIns="91440" tIns="45720" rIns="91440" bIns="45720" rtlCol="0"/>
-          <a:lstStyle/>
-          <a:p>
-            <a:pPr lvl="0"/>
-            <a:r>
-              <a:rPr lang="fr-FR"/>
-              <a:t>Cliquez pour modifier les styles du texte du masque</a:t>
-            </a:r>
-          </a:p>
-          <a:p>
-            <a:pPr lvl="1"/>
-            <a:r>
-              <a:rPr lang="fr-FR"/>
-              <a:t>Deuxième niveau</a:t>
-            </a:r>
-          </a:p>
-          <a:p>
-            <a:pPr lvl="2"/>
-            <a:r>
-              <a:rPr lang="fr-FR"/>
-              <a:t>Troisième niveau</a:t>
-            </a:r>
-          </a:p>
-          <a:p>
-            <a:pPr lvl="3"/>
-            <a:r>
-              <a:rPr lang="fr-FR"/>
-              <a:t>Quatrième niveau</a:t>
-            </a:r>
-          </a:p>
-          <a:p>
-            <a:pPr lvl="4"/>
-            <a:r>
-              <a:rPr lang="fr-FR"/>
-              <a:t>Cinquième niveau</a:t>
-            </a:r>
-          </a:p>
-        </p:txBody>
-      </p:sp>
-      <p:sp>
-        <p:nvSpPr>
-          <p:cNvPr id="6" name="Espace réservé du pied de page 5"/>
-          <p:cNvSpPr>
-            <a:spLocks noGrp="1"/>
-          </p:cNvSpPr>
-          <p:nvPr>
-            <p:ph type="ftr" sz="quarter" idx="4"/>
-          </p:nvPr>
-        </p:nvSpPr>
-        <p:spPr>
-          <a:xfrm>
-            <a:off x="0" y="8685213"/>
-            <a:ext cx="2971800" cy="458787"/>
-          </a:xfrm>
-          <a:prstGeom prst="rect">
-            <a:avLst/>
-          </a:prstGeom>
-        </p:spPr>
-        <p:txBody>
-          <a:bodyPr vert="horz" lIns="91440" tIns="45720" rIns="91440" bIns="45720" rtlCol="0" anchor="b"/>
-          <a:lstStyle>
-            <a:lvl1pPr algn="l">
-              <a:defRPr sz="1200"/>
-            </a:lvl1pPr>
-          </a:lstStyle>
-          <a:p>
-            <a:endParaRPr lang="fr-FR"/>
-          </a:p>
-        </p:txBody>
-      </p:sp>
-      <p:sp>
-        <p:nvSpPr>
-          <p:cNvPr id="7" name="Espace réservé du numéro de diapositive 6"/>
-          <p:cNvSpPr>
-            <a:spLocks noGrp="1"/>
-          </p:cNvSpPr>
-          <p:nvPr>
-            <p:ph type="sldNum" sz="quarter" idx="5"/>
-          </p:nvPr>
-        </p:nvSpPr>
-        <p:spPr>
-          <a:xfrm>
-            <a:off x="3884613" y="8685213"/>
-            <a:ext cx="2971800" cy="458787"/>
-          </a:xfrm>
-          <a:prstGeom prst="rect">
-            <a:avLst/>
-          </a:prstGeom>
-        </p:spPr>
-        <p:txBody>
-          <a:bodyPr vert="horz" lIns="91440" tIns="45720" rIns="91440" bIns="45720" rtlCol="0" anchor="b"/>
-          <a:lstStyle>
-            <a:lvl1pPr algn="r">
-              <a:defRPr sz="1200"/>
-            </a:lvl1pPr>
-          </a:lstStyle>
-          <a:p>
-            <a:fld id="{EDB5666F-E79B-4A29-9A64-FA4855FAABBD}" type="slidenum">
-              <a:rPr lang="fr-FR" smtClean="0"/>
-              <a:t>‹N°›</a:t>
-            </a:fld>
-            <a:endParaRPr lang="fr-FR"/>
-          </a:p>
-        </p:txBody>
-      </p:sp>
-    </p:spTree>
-    <p:extLst>
-      <p:ext uri="{BB962C8B-B14F-4D97-AF65-F5344CB8AC3E}">
-        <p14:creationId xmlns:p14="http://schemas.microsoft.com/office/powerpoint/2010/main" val="4057233482"/>
-      </p:ext>
-    </p:extLst>
-  </p:cSld>
-  <p:clrMap bg1="lt1" tx1="dk1" bg2="lt2" tx2="dk2" accent1="accent1" accent2="accent2" accent3="accent3" accent4="accent4" accent5="accent5" accent6="accent6" hlink="hlink" folHlink="folHlink"/>
-  <p:notesStyle>
-    <a:lvl1pPr marL="0" algn="l" defTabSz="914400" rtl="0" eaLnBrk="1" latinLnBrk="0" hangingPunct="1">
-      <a:defRPr sz="1200" kern="1200">
-        <a:solidFill>
-          <a:schemeClr val="tx1"/>
-        </a:solidFill>
-        <a:latin typeface="+mn-lt"/>
-        <a:ea typeface="+mn-ea"/>
-        <a:cs typeface="+mn-cs"/>
-      </a:defRPr>
-    </a:lvl1pPr>
-    <a:lvl2pPr marL="457200" algn="l" defTabSz="914400" rtl="0" eaLnBrk="1" latinLnBrk="0" hangingPunct="1">
-      <a:defRPr sz="1200" kern="1200">
-        <a:solidFill>
-          <a:schemeClr val="tx1"/>
-        </a:solidFill>
-        <a:latin typeface="+mn-lt"/>
-        <a:ea typeface="+mn-ea"/>
-        <a:cs typeface="+mn-cs"/>
-      </a:defRPr>
-    </a:lvl2pPr>
-    <a:lvl3pPr marL="914400" algn="l" defTabSz="914400" rtl="0" eaLnBrk="1" latinLnBrk="0" hangingPunct="1">
-      <a:defRPr sz="1200" kern="1200">
-        <a:solidFill>
-          <a:schemeClr val="tx1"/>
-        </a:solidFill>
-        <a:latin typeface="+mn-lt"/>
-        <a:ea typeface="+mn-ea"/>
-        <a:cs typeface="+mn-cs"/>
-      </a:defRPr>
-    </a:lvl3pPr>
-    <a:lvl4pPr marL="1371600" algn="l" defTabSz="914400" rtl="0" eaLnBrk="1" latinLnBrk="0" hangingPunct="1">
-      <a:defRPr sz="1200" kern="1200">
-        <a:solidFill>
-          <a:schemeClr val="tx1"/>
-        </a:solidFill>
-        <a:latin typeface="+mn-lt"/>
-        <a:ea typeface="+mn-ea"/>
-        <a:cs typeface="+mn-cs"/>
-      </a:defRPr>
-    </a:lvl4pPr>
-    <a:lvl5pPr marL="1828800" algn="l" defTabSz="914400" rtl="0" eaLnBrk="1" latinLnBrk="0" hangingPunct="1">
-      <a:defRPr sz="1200" kern="1200">
-        <a:solidFill>
-          <a:schemeClr val="tx1"/>
-        </a:solidFill>
-        <a:latin typeface="+mn-lt"/>
-        <a:ea typeface="+mn-ea"/>
-        <a:cs typeface="+mn-cs"/>
-      </a:defRPr>
-    </a:lvl5pPr>
-    <a:lvl6pPr marL="2286000" algn="l" defTabSz="914400" rtl="0" eaLnBrk="1" latinLnBrk="0" hangingPunct="1">
-      <a:defRPr sz="1200" kern="1200">
-        <a:solidFill>
-          <a:schemeClr val="tx1"/>
-        </a:solidFill>
-        <a:latin typeface="+mn-lt"/>
-        <a:ea typeface="+mn-ea"/>
-        <a:cs typeface="+mn-cs"/>
-      </a:defRPr>
-    </a:lvl6pPr>
-    <a:lvl7pPr marL="2743200" algn="l" defTabSz="914400" rtl="0" eaLnBrk="1" latinLnBrk="0" hangingPunct="1">
-      <a:defRPr sz="1200" kern="1200">
-        <a:solidFill>
-          <a:schemeClr val="tx1"/>
-        </a:solidFill>
-        <a:latin typeface="+mn-lt"/>
-        <a:ea typeface="+mn-ea"/>
-        <a:cs typeface="+mn-cs"/>
-      </a:defRPr>
-    </a:lvl7pPr>
-    <a:lvl8pPr marL="3200400" algn="l" defTabSz="914400" rtl="0" eaLnBrk="1" latinLnBrk="0" hangingPunct="1">
-      <a:defRPr sz="1200" kern="1200">
-        <a:solidFill>
-          <a:schemeClr val="tx1"/>
-        </a:solidFill>
-        <a:latin typeface="+mn-lt"/>
-        <a:ea typeface="+mn-ea"/>
-        <a:cs typeface="+mn-cs"/>
-      </a:defRPr>
-    </a:lvl8pPr>
-    <a:lvl9pPr marL="3657600" algn="l" defTabSz="914400" rtl="0" eaLnBrk="1" latinLnBrk="0" hangingPunct="1">
-      <a:defRPr sz="1200" kern="1200">
-        <a:solidFill>
-          <a:schemeClr val="tx1"/>
-        </a:solidFill>
-        <a:latin typeface="+mn-lt"/>
-        <a:ea typeface="+mn-ea"/>
-        <a:cs typeface="+mn-cs"/>
-      </a:defRPr>
-    </a:lvl9pPr>
-  </p:notesStyle>
-</p:notesMaster>
 </file>
 
 <file path=ppt/slideLayouts/slideLayout1.xml><?xml version="1.0" encoding="utf-8"?>
@@ -522,9 +159,10 @@
           <a:lstStyle/>
           <a:p>
             <a:r>
-              <a:rPr lang="en-US"/>
+              <a:rPr lang="en-US" smtClean="0"/>
               <a:t>Click to edit Master title style</a:t>
             </a:r>
+            <a:endParaRPr lang="en-US"/>
           </a:p>
         </p:txBody>
       </p:sp>
@@ -640,9 +278,10 @@
           </a:lstStyle>
           <a:p>
             <a:r>
-              <a:rPr lang="en-US"/>
+              <a:rPr lang="en-US" smtClean="0"/>
               <a:t>Click to edit Master subtitle style</a:t>
             </a:r>
+            <a:endParaRPr lang="en-US"/>
           </a:p>
         </p:txBody>
       </p:sp>
@@ -663,7 +302,7 @@
           <a:p>
             <a:fld id="{5BCAD085-E8A6-8845-BD4E-CB4CCA059FC4}" type="datetimeFigureOut">
               <a:rPr lang="en-US" smtClean="0"/>
-              <a:t>5/16/2026</a:t>
+              <a:t>1/27/13</a:t>
             </a:fld>
             <a:endParaRPr lang="en-US"/>
           </a:p>
@@ -705,7 +344,7 @@
           <a:p>
             <a:fld id="{C1FF6DA9-008F-8B48-92A6-B652298478BF}" type="slidenum">
               <a:rPr lang="en-US" smtClean="0"/>
-              <a:t>‹N°›</a:t>
+              <a:t>‹#›</a:t>
             </a:fld>
             <a:endParaRPr lang="en-US"/>
           </a:p>
@@ -757,9 +396,10 @@
           <a:lstStyle/>
           <a:p>
             <a:r>
-              <a:rPr lang="en-US"/>
+              <a:rPr lang="en-US" smtClean="0"/>
               <a:t>Click to edit Master title style</a:t>
             </a:r>
+            <a:endParaRPr lang="en-US"/>
           </a:p>
         </p:txBody>
       </p:sp>
@@ -780,37 +420,38 @@
           <a:p>
             <a:pPr lvl="0"/>
             <a:r>
-              <a:rPr lang="en-US"/>
+              <a:rPr lang="en-US" smtClean="0"/>
               <a:t>Click to edit Master text styles</a:t>
             </a:r>
           </a:p>
           <a:p>
             <a:pPr lvl="1"/>
             <a:r>
-              <a:rPr lang="en-US"/>
+              <a:rPr lang="en-US" smtClean="0"/>
               <a:t>Second level</a:t>
             </a:r>
           </a:p>
           <a:p>
             <a:pPr lvl="2"/>
             <a:r>
-              <a:rPr lang="en-US"/>
+              <a:rPr lang="en-US" smtClean="0"/>
               <a:t>Third level</a:t>
             </a:r>
           </a:p>
           <a:p>
             <a:pPr lvl="3"/>
             <a:r>
-              <a:rPr lang="en-US"/>
+              <a:rPr lang="en-US" smtClean="0"/>
               <a:t>Fourth level</a:t>
             </a:r>
           </a:p>
           <a:p>
             <a:pPr lvl="4"/>
             <a:r>
-              <a:rPr lang="en-US"/>
+              <a:rPr lang="en-US" smtClean="0"/>
               <a:t>Fifth level</a:t>
             </a:r>
+            <a:endParaRPr lang="en-US"/>
           </a:p>
         </p:txBody>
       </p:sp>
@@ -831,7 +472,7 @@
           <a:p>
             <a:fld id="{5BCAD085-E8A6-8845-BD4E-CB4CCA059FC4}" type="datetimeFigureOut">
               <a:rPr lang="en-US" smtClean="0"/>
-              <a:t>5/16/2026</a:t>
+              <a:t>1/27/13</a:t>
             </a:fld>
             <a:endParaRPr lang="en-US"/>
           </a:p>
@@ -873,7 +514,7 @@
           <a:p>
             <a:fld id="{C1FF6DA9-008F-8B48-92A6-B652298478BF}" type="slidenum">
               <a:rPr lang="en-US" smtClean="0"/>
-              <a:t>‹N°›</a:t>
+              <a:t>‹#›</a:t>
             </a:fld>
             <a:endParaRPr lang="en-US"/>
           </a:p>
@@ -930,9 +571,10 @@
           <a:lstStyle/>
           <a:p>
             <a:r>
-              <a:rPr lang="en-US"/>
+              <a:rPr lang="en-US" smtClean="0"/>
               <a:t>Click to edit Master title style</a:t>
             </a:r>
+            <a:endParaRPr lang="en-US"/>
           </a:p>
         </p:txBody>
       </p:sp>
@@ -958,37 +600,38 @@
           <a:p>
             <a:pPr lvl="0"/>
             <a:r>
-              <a:rPr lang="en-US"/>
+              <a:rPr lang="en-US" smtClean="0"/>
               <a:t>Click to edit Master text styles</a:t>
             </a:r>
           </a:p>
           <a:p>
             <a:pPr lvl="1"/>
             <a:r>
-              <a:rPr lang="en-US"/>
+              <a:rPr lang="en-US" smtClean="0"/>
               <a:t>Second level</a:t>
             </a:r>
           </a:p>
           <a:p>
             <a:pPr lvl="2"/>
             <a:r>
-              <a:rPr lang="en-US"/>
+              <a:rPr lang="en-US" smtClean="0"/>
               <a:t>Third level</a:t>
             </a:r>
           </a:p>
           <a:p>
             <a:pPr lvl="3"/>
             <a:r>
-              <a:rPr lang="en-US"/>
+              <a:rPr lang="en-US" smtClean="0"/>
               <a:t>Fourth level</a:t>
             </a:r>
           </a:p>
           <a:p>
             <a:pPr lvl="4"/>
             <a:r>
-              <a:rPr lang="en-US"/>
+              <a:rPr lang="en-US" smtClean="0"/>
               <a:t>Fifth level</a:t>
             </a:r>
+            <a:endParaRPr lang="en-US"/>
           </a:p>
         </p:txBody>
       </p:sp>
@@ -1009,7 +652,7 @@
           <a:p>
             <a:fld id="{5BCAD085-E8A6-8845-BD4E-CB4CCA059FC4}" type="datetimeFigureOut">
               <a:rPr lang="en-US" smtClean="0"/>
-              <a:t>5/16/2026</a:t>
+              <a:t>1/27/13</a:t>
             </a:fld>
             <a:endParaRPr lang="en-US"/>
           </a:p>
@@ -1051,7 +694,7 @@
           <a:p>
             <a:fld id="{C1FF6DA9-008F-8B48-92A6-B652298478BF}" type="slidenum">
               <a:rPr lang="en-US" smtClean="0"/>
-              <a:t>‹N°›</a:t>
+              <a:t>‹#›</a:t>
             </a:fld>
             <a:endParaRPr lang="en-US"/>
           </a:p>
@@ -1103,9 +746,10 @@
           <a:lstStyle/>
           <a:p>
             <a:r>
-              <a:rPr lang="en-US"/>
+              <a:rPr lang="en-US" smtClean="0"/>
               <a:t>Click to edit Master title style</a:t>
             </a:r>
+            <a:endParaRPr lang="en-US"/>
           </a:p>
         </p:txBody>
       </p:sp>
@@ -1126,37 +770,38 @@
           <a:p>
             <a:pPr lvl="0"/>
             <a:r>
-              <a:rPr lang="en-US"/>
+              <a:rPr lang="en-US" smtClean="0"/>
               <a:t>Click to edit Master text styles</a:t>
             </a:r>
           </a:p>
           <a:p>
             <a:pPr lvl="1"/>
             <a:r>
-              <a:rPr lang="en-US"/>
+              <a:rPr lang="en-US" smtClean="0"/>
               <a:t>Second level</a:t>
             </a:r>
           </a:p>
           <a:p>
             <a:pPr lvl="2"/>
             <a:r>
-              <a:rPr lang="en-US"/>
+              <a:rPr lang="en-US" smtClean="0"/>
               <a:t>Third level</a:t>
             </a:r>
           </a:p>
           <a:p>
             <a:pPr lvl="3"/>
             <a:r>
-              <a:rPr lang="en-US"/>
+              <a:rPr lang="en-US" smtClean="0"/>
               <a:t>Fourth level</a:t>
             </a:r>
           </a:p>
           <a:p>
             <a:pPr lvl="4"/>
             <a:r>
-              <a:rPr lang="en-US"/>
+              <a:rPr lang="en-US" smtClean="0"/>
               <a:t>Fifth level</a:t>
             </a:r>
+            <a:endParaRPr lang="en-US"/>
           </a:p>
         </p:txBody>
       </p:sp>
@@ -1177,7 +822,7 @@
           <a:p>
             <a:fld id="{5BCAD085-E8A6-8845-BD4E-CB4CCA059FC4}" type="datetimeFigureOut">
               <a:rPr lang="en-US" smtClean="0"/>
-              <a:t>5/16/2026</a:t>
+              <a:t>1/27/13</a:t>
             </a:fld>
             <a:endParaRPr lang="en-US"/>
           </a:p>
@@ -1219,7 +864,7 @@
           <a:p>
             <a:fld id="{C1FF6DA9-008F-8B48-92A6-B652298478BF}" type="slidenum">
               <a:rPr lang="en-US" smtClean="0"/>
-              <a:t>‹N°›</a:t>
+              <a:t>‹#›</a:t>
             </a:fld>
             <a:endParaRPr lang="en-US"/>
           </a:p>
@@ -1280,9 +925,10 @@
           </a:lstStyle>
           <a:p>
             <a:r>
-              <a:rPr lang="en-US"/>
+              <a:rPr lang="en-US" smtClean="0"/>
               <a:t>Click to edit Master title style</a:t>
             </a:r>
+            <a:endParaRPr lang="en-US"/>
           </a:p>
         </p:txBody>
       </p:sp>
@@ -1399,7 +1045,7 @@
           <a:p>
             <a:pPr lvl="0"/>
             <a:r>
-              <a:rPr lang="en-US"/>
+              <a:rPr lang="en-US" smtClean="0"/>
               <a:t>Click to edit Master text styles</a:t>
             </a:r>
           </a:p>
@@ -1422,7 +1068,7 @@
           <a:p>
             <a:fld id="{5BCAD085-E8A6-8845-BD4E-CB4CCA059FC4}" type="datetimeFigureOut">
               <a:rPr lang="en-US" smtClean="0"/>
-              <a:t>5/16/2026</a:t>
+              <a:t>1/27/13</a:t>
             </a:fld>
             <a:endParaRPr lang="en-US"/>
           </a:p>
@@ -1464,7 +1110,7 @@
           <a:p>
             <a:fld id="{C1FF6DA9-008F-8B48-92A6-B652298478BF}" type="slidenum">
               <a:rPr lang="en-US" smtClean="0"/>
-              <a:t>‹N°›</a:t>
+              <a:t>‹#›</a:t>
             </a:fld>
             <a:endParaRPr lang="en-US"/>
           </a:p>
@@ -1516,9 +1162,10 @@
           <a:lstStyle/>
           <a:p>
             <a:r>
-              <a:rPr lang="en-US"/>
+              <a:rPr lang="en-US" smtClean="0"/>
               <a:t>Click to edit Master title style</a:t>
             </a:r>
+            <a:endParaRPr lang="en-US"/>
           </a:p>
         </p:txBody>
       </p:sp>
@@ -1572,37 +1219,38 @@
           <a:p>
             <a:pPr lvl="0"/>
             <a:r>
-              <a:rPr lang="en-US"/>
+              <a:rPr lang="en-US" smtClean="0"/>
               <a:t>Click to edit Master text styles</a:t>
             </a:r>
           </a:p>
           <a:p>
             <a:pPr lvl="1"/>
             <a:r>
-              <a:rPr lang="en-US"/>
+              <a:rPr lang="en-US" smtClean="0"/>
               <a:t>Second level</a:t>
             </a:r>
           </a:p>
           <a:p>
             <a:pPr lvl="2"/>
             <a:r>
-              <a:rPr lang="en-US"/>
+              <a:rPr lang="en-US" smtClean="0"/>
               <a:t>Third level</a:t>
             </a:r>
           </a:p>
           <a:p>
             <a:pPr lvl="3"/>
             <a:r>
-              <a:rPr lang="en-US"/>
+              <a:rPr lang="en-US" smtClean="0"/>
               <a:t>Fourth level</a:t>
             </a:r>
           </a:p>
           <a:p>
             <a:pPr lvl="4"/>
             <a:r>
-              <a:rPr lang="en-US"/>
+              <a:rPr lang="en-US" smtClean="0"/>
               <a:t>Fifth level</a:t>
             </a:r>
+            <a:endParaRPr lang="en-US"/>
           </a:p>
         </p:txBody>
       </p:sp>
@@ -1656,37 +1304,38 @@
           <a:p>
             <a:pPr lvl="0"/>
             <a:r>
-              <a:rPr lang="en-US"/>
+              <a:rPr lang="en-US" smtClean="0"/>
               <a:t>Click to edit Master text styles</a:t>
             </a:r>
           </a:p>
           <a:p>
             <a:pPr lvl="1"/>
             <a:r>
-              <a:rPr lang="en-US"/>
+              <a:rPr lang="en-US" smtClean="0"/>
               <a:t>Second level</a:t>
             </a:r>
           </a:p>
           <a:p>
             <a:pPr lvl="2"/>
             <a:r>
-              <a:rPr lang="en-US"/>
+              <a:rPr lang="en-US" smtClean="0"/>
               <a:t>Third level</a:t>
             </a:r>
           </a:p>
           <a:p>
             <a:pPr lvl="3"/>
             <a:r>
-              <a:rPr lang="en-US"/>
+              <a:rPr lang="en-US" smtClean="0"/>
               <a:t>Fourth level</a:t>
             </a:r>
           </a:p>
           <a:p>
             <a:pPr lvl="4"/>
             <a:r>
-              <a:rPr lang="en-US"/>
+              <a:rPr lang="en-US" smtClean="0"/>
               <a:t>Fifth level</a:t>
             </a:r>
+            <a:endParaRPr lang="en-US"/>
           </a:p>
         </p:txBody>
       </p:sp>
@@ -1707,7 +1356,7 @@
           <a:p>
             <a:fld id="{5BCAD085-E8A6-8845-BD4E-CB4CCA059FC4}" type="datetimeFigureOut">
               <a:rPr lang="en-US" smtClean="0"/>
-              <a:t>5/16/2026</a:t>
+              <a:t>1/27/13</a:t>
             </a:fld>
             <a:endParaRPr lang="en-US"/>
           </a:p>
@@ -1749,7 +1398,7 @@
           <a:p>
             <a:fld id="{C1FF6DA9-008F-8B48-92A6-B652298478BF}" type="slidenum">
               <a:rPr lang="en-US" smtClean="0"/>
-              <a:t>‹N°›</a:t>
+              <a:t>‹#›</a:t>
             </a:fld>
             <a:endParaRPr lang="en-US"/>
           </a:p>
@@ -1805,9 +1454,10 @@
           </a:lstStyle>
           <a:p>
             <a:r>
-              <a:rPr lang="en-US"/>
+              <a:rPr lang="en-US" smtClean="0"/>
               <a:t>Click to edit Master title style</a:t>
             </a:r>
+            <a:endParaRPr lang="en-US"/>
           </a:p>
         </p:txBody>
       </p:sp>
@@ -1870,7 +1520,7 @@
           <a:p>
             <a:pPr lvl="0"/>
             <a:r>
-              <a:rPr lang="en-US"/>
+              <a:rPr lang="en-US" smtClean="0"/>
               <a:t>Click to edit Master text styles</a:t>
             </a:r>
           </a:p>
@@ -1926,37 +1576,38 @@
           <a:p>
             <a:pPr lvl="0"/>
             <a:r>
-              <a:rPr lang="en-US"/>
+              <a:rPr lang="en-US" smtClean="0"/>
               <a:t>Click to edit Master text styles</a:t>
             </a:r>
           </a:p>
           <a:p>
             <a:pPr lvl="1"/>
             <a:r>
-              <a:rPr lang="en-US"/>
+              <a:rPr lang="en-US" smtClean="0"/>
               <a:t>Second level</a:t>
             </a:r>
           </a:p>
           <a:p>
             <a:pPr lvl="2"/>
             <a:r>
-              <a:rPr lang="en-US"/>
+              <a:rPr lang="en-US" smtClean="0"/>
               <a:t>Third level</a:t>
             </a:r>
           </a:p>
           <a:p>
             <a:pPr lvl="3"/>
             <a:r>
-              <a:rPr lang="en-US"/>
+              <a:rPr lang="en-US" smtClean="0"/>
               <a:t>Fourth level</a:t>
             </a:r>
           </a:p>
           <a:p>
             <a:pPr lvl="4"/>
             <a:r>
-              <a:rPr lang="en-US"/>
+              <a:rPr lang="en-US" smtClean="0"/>
               <a:t>Fifth level</a:t>
             </a:r>
+            <a:endParaRPr lang="en-US"/>
           </a:p>
         </p:txBody>
       </p:sp>
@@ -2019,7 +1670,7 @@
           <a:p>
             <a:pPr lvl="0"/>
             <a:r>
-              <a:rPr lang="en-US"/>
+              <a:rPr lang="en-US" smtClean="0"/>
               <a:t>Click to edit Master text styles</a:t>
             </a:r>
           </a:p>
@@ -2075,37 +1726,38 @@
           <a:p>
             <a:pPr lvl="0"/>
             <a:r>
-              <a:rPr lang="en-US"/>
+              <a:rPr lang="en-US" smtClean="0"/>
               <a:t>Click to edit Master text styles</a:t>
             </a:r>
           </a:p>
           <a:p>
             <a:pPr lvl="1"/>
             <a:r>
-              <a:rPr lang="en-US"/>
+              <a:rPr lang="en-US" smtClean="0"/>
               <a:t>Second level</a:t>
             </a:r>
           </a:p>
           <a:p>
             <a:pPr lvl="2"/>
             <a:r>
-              <a:rPr lang="en-US"/>
+              <a:rPr lang="en-US" smtClean="0"/>
               <a:t>Third level</a:t>
             </a:r>
           </a:p>
           <a:p>
             <a:pPr lvl="3"/>
             <a:r>
-              <a:rPr lang="en-US"/>
+              <a:rPr lang="en-US" smtClean="0"/>
               <a:t>Fourth level</a:t>
             </a:r>
           </a:p>
           <a:p>
             <a:pPr lvl="4"/>
             <a:r>
-              <a:rPr lang="en-US"/>
+              <a:rPr lang="en-US" smtClean="0"/>
               <a:t>Fifth level</a:t>
             </a:r>
+            <a:endParaRPr lang="en-US"/>
           </a:p>
         </p:txBody>
       </p:sp>
@@ -2126,7 +1778,7 @@
           <a:p>
             <a:fld id="{5BCAD085-E8A6-8845-BD4E-CB4CCA059FC4}" type="datetimeFigureOut">
               <a:rPr lang="en-US" smtClean="0"/>
-              <a:t>5/16/2026</a:t>
+              <a:t>1/27/13</a:t>
             </a:fld>
             <a:endParaRPr lang="en-US"/>
           </a:p>
@@ -2168,7 +1820,7 @@
           <a:p>
             <a:fld id="{C1FF6DA9-008F-8B48-92A6-B652298478BF}" type="slidenum">
               <a:rPr lang="en-US" smtClean="0"/>
-              <a:t>‹N°›</a:t>
+              <a:t>‹#›</a:t>
             </a:fld>
             <a:endParaRPr lang="en-US"/>
           </a:p>
@@ -2220,9 +1872,10 @@
           <a:lstStyle/>
           <a:p>
             <a:r>
-              <a:rPr lang="en-US"/>
+              <a:rPr lang="en-US" smtClean="0"/>
               <a:t>Click to edit Master title style</a:t>
             </a:r>
+            <a:endParaRPr lang="en-US"/>
           </a:p>
         </p:txBody>
       </p:sp>
@@ -2243,7 +1896,7 @@
           <a:p>
             <a:fld id="{5BCAD085-E8A6-8845-BD4E-CB4CCA059FC4}" type="datetimeFigureOut">
               <a:rPr lang="en-US" smtClean="0"/>
-              <a:t>5/16/2026</a:t>
+              <a:t>1/27/13</a:t>
             </a:fld>
             <a:endParaRPr lang="en-US"/>
           </a:p>
@@ -2285,7 +1938,7 @@
           <a:p>
             <a:fld id="{C1FF6DA9-008F-8B48-92A6-B652298478BF}" type="slidenum">
               <a:rPr lang="en-US" smtClean="0"/>
-              <a:t>‹N°›</a:t>
+              <a:t>‹#›</a:t>
             </a:fld>
             <a:endParaRPr lang="en-US"/>
           </a:p>
@@ -2338,7 +1991,7 @@
           <a:p>
             <a:fld id="{5BCAD085-E8A6-8845-BD4E-CB4CCA059FC4}" type="datetimeFigureOut">
               <a:rPr lang="en-US" smtClean="0"/>
-              <a:t>5/16/2026</a:t>
+              <a:t>1/27/13</a:t>
             </a:fld>
             <a:endParaRPr lang="en-US"/>
           </a:p>
@@ -2380,7 +2033,7 @@
           <a:p>
             <a:fld id="{C1FF6DA9-008F-8B48-92A6-B652298478BF}" type="slidenum">
               <a:rPr lang="en-US" smtClean="0"/>
-              <a:t>‹N°›</a:t>
+              <a:t>‹#›</a:t>
             </a:fld>
             <a:endParaRPr lang="en-US"/>
           </a:p>
@@ -2441,9 +2094,10 @@
           </a:lstStyle>
           <a:p>
             <a:r>
-              <a:rPr lang="en-US"/>
+              <a:rPr lang="en-US" smtClean="0"/>
               <a:t>Click to edit Master title style</a:t>
             </a:r>
+            <a:endParaRPr lang="en-US"/>
           </a:p>
         </p:txBody>
       </p:sp>
@@ -2497,37 +2151,38 @@
           <a:p>
             <a:pPr lvl="0"/>
             <a:r>
-              <a:rPr lang="en-US"/>
+              <a:rPr lang="en-US" smtClean="0"/>
               <a:t>Click to edit Master text styles</a:t>
             </a:r>
           </a:p>
           <a:p>
             <a:pPr lvl="1"/>
             <a:r>
-              <a:rPr lang="en-US"/>
+              <a:rPr lang="en-US" smtClean="0"/>
               <a:t>Second level</a:t>
             </a:r>
           </a:p>
           <a:p>
             <a:pPr lvl="2"/>
             <a:r>
-              <a:rPr lang="en-US"/>
+              <a:rPr lang="en-US" smtClean="0"/>
               <a:t>Third level</a:t>
             </a:r>
           </a:p>
           <a:p>
             <a:pPr lvl="3"/>
             <a:r>
-              <a:rPr lang="en-US"/>
+              <a:rPr lang="en-US" smtClean="0"/>
               <a:t>Fourth level</a:t>
             </a:r>
           </a:p>
           <a:p>
             <a:pPr lvl="4"/>
             <a:r>
-              <a:rPr lang="en-US"/>
+              <a:rPr lang="en-US" smtClean="0"/>
               <a:t>Fifth level</a:t>
             </a:r>
+            <a:endParaRPr lang="en-US"/>
           </a:p>
         </p:txBody>
       </p:sp>
@@ -2590,7 +2245,7 @@
           <a:p>
             <a:pPr lvl="0"/>
             <a:r>
-              <a:rPr lang="en-US"/>
+              <a:rPr lang="en-US" smtClean="0"/>
               <a:t>Click to edit Master text styles</a:t>
             </a:r>
           </a:p>
@@ -2613,7 +2268,7 @@
           <a:p>
             <a:fld id="{5BCAD085-E8A6-8845-BD4E-CB4CCA059FC4}" type="datetimeFigureOut">
               <a:rPr lang="en-US" smtClean="0"/>
-              <a:t>5/16/2026</a:t>
+              <a:t>1/27/13</a:t>
             </a:fld>
             <a:endParaRPr lang="en-US"/>
           </a:p>
@@ -2655,7 +2310,7 @@
           <a:p>
             <a:fld id="{C1FF6DA9-008F-8B48-92A6-B652298478BF}" type="slidenum">
               <a:rPr lang="en-US" smtClean="0"/>
-              <a:t>‹N°›</a:t>
+              <a:t>‹#›</a:t>
             </a:fld>
             <a:endParaRPr lang="en-US"/>
           </a:p>
@@ -2716,9 +2371,10 @@
           </a:lstStyle>
           <a:p>
             <a:r>
-              <a:rPr lang="en-US"/>
+              <a:rPr lang="en-US" smtClean="0"/>
               <a:t>Click to edit Master title style</a:t>
             </a:r>
+            <a:endParaRPr lang="en-US"/>
           </a:p>
         </p:txBody>
       </p:sp>
@@ -2842,7 +2498,7 @@
           <a:p>
             <a:pPr lvl="0"/>
             <a:r>
-              <a:rPr lang="en-US"/>
+              <a:rPr lang="en-US" smtClean="0"/>
               <a:t>Click to edit Master text styles</a:t>
             </a:r>
           </a:p>
@@ -2865,7 +2521,7 @@
           <a:p>
             <a:fld id="{5BCAD085-E8A6-8845-BD4E-CB4CCA059FC4}" type="datetimeFigureOut">
               <a:rPr lang="en-US" smtClean="0"/>
-              <a:t>5/16/2026</a:t>
+              <a:t>1/27/13</a:t>
             </a:fld>
             <a:endParaRPr lang="en-US"/>
           </a:p>
@@ -2907,7 +2563,7 @@
           <a:p>
             <a:fld id="{C1FF6DA9-008F-8B48-92A6-B652298478BF}" type="slidenum">
               <a:rPr lang="en-US" smtClean="0"/>
-              <a:t>‹N°›</a:t>
+              <a:t>‹#›</a:t>
             </a:fld>
             <a:endParaRPr lang="en-US"/>
           </a:p>
@@ -2974,9 +2630,10 @@
           <a:lstStyle/>
           <a:p>
             <a:r>
-              <a:rPr lang="en-US"/>
+              <a:rPr lang="en-US" smtClean="0"/>
               <a:t>Click to edit Master title style</a:t>
             </a:r>
+            <a:endParaRPr lang="en-US"/>
           </a:p>
         </p:txBody>
       </p:sp>
@@ -3007,37 +2664,38 @@
           <a:p>
             <a:pPr lvl="0"/>
             <a:r>
-              <a:rPr lang="en-US"/>
+              <a:rPr lang="en-US" smtClean="0"/>
               <a:t>Click to edit Master text styles</a:t>
             </a:r>
           </a:p>
           <a:p>
             <a:pPr lvl="1"/>
             <a:r>
-              <a:rPr lang="en-US"/>
+              <a:rPr lang="en-US" smtClean="0"/>
               <a:t>Second level</a:t>
             </a:r>
           </a:p>
           <a:p>
             <a:pPr lvl="2"/>
             <a:r>
-              <a:rPr lang="en-US"/>
+              <a:rPr lang="en-US" smtClean="0"/>
               <a:t>Third level</a:t>
             </a:r>
           </a:p>
           <a:p>
             <a:pPr lvl="3"/>
             <a:r>
-              <a:rPr lang="en-US"/>
+              <a:rPr lang="en-US" smtClean="0"/>
               <a:t>Fourth level</a:t>
             </a:r>
           </a:p>
           <a:p>
             <a:pPr lvl="4"/>
             <a:r>
-              <a:rPr lang="en-US"/>
+              <a:rPr lang="en-US" smtClean="0"/>
               <a:t>Fifth level</a:t>
             </a:r>
+            <a:endParaRPr lang="en-US"/>
           </a:p>
         </p:txBody>
       </p:sp>
@@ -3076,7 +2734,7 @@
           <a:p>
             <a:fld id="{5BCAD085-E8A6-8845-BD4E-CB4CCA059FC4}" type="datetimeFigureOut">
               <a:rPr lang="en-US" smtClean="0"/>
-              <a:t>5/16/2026</a:t>
+              <a:t>1/27/13</a:t>
             </a:fld>
             <a:endParaRPr lang="en-US"/>
           </a:p>
@@ -3154,7 +2812,7 @@
           <a:p>
             <a:fld id="{C1FF6DA9-008F-8B48-92A6-B652298478BF}" type="slidenum">
               <a:rPr lang="en-US" smtClean="0"/>
-              <a:t>‹N°›</a:t>
+              <a:t>‹#›</a:t>
             </a:fld>
             <a:endParaRPr lang="en-US"/>
           </a:p>
@@ -3437,6 +3095,14 @@
 <file path=ppt/slides/slide1.xml><?xml version="1.0" encoding="utf-8"?>
 <p:sld xmlns:a="http://schemas.openxmlformats.org/drawingml/2006/main" xmlns:p="http://schemas.openxmlformats.org/presentationml/2006/main" xmlns:r="http://schemas.openxmlformats.org/officeDocument/2006/relationships">
   <p:cSld>
+    <p:bg>
+      <p:bgPr>
+        <a:solidFill>
+          <a:srgbClr val="1A5C33"/>
+        </a:solidFill>
+        <a:effectLst/>
+      </p:bgPr>
+    </p:bg>
     <p:spTree>
       <p:nvGrpSpPr>
         <p:cNvPr id="1" name=""/>
@@ -3446,56 +3112,14 @@
       <p:grpSpPr/>
       <p:sp>
         <p:nvSpPr>
-          <p:cNvPr id="2" name="Title 1"/>
-          <p:cNvSpPr>
-            <a:spLocks noGrp="1"/>
-          </p:cNvSpPr>
-          <p:nvPr>
-            <p:ph type="ctrTitle"/>
-          </p:nvPr>
-        </p:nvSpPr>
-        <p:spPr/>
-        <p:txBody>
-          <a:bodyPr/>
-          <a:lstStyle/>
-          <a:p>
-            <a:r>
-              <a:t>Réseaux informatiques</a:t>
-            </a:r>
-          </a:p>
-        </p:txBody>
-      </p:sp>
-      <p:sp>
-        <p:nvSpPr>
-          <p:cNvPr id="3" name="Subtitle 2"/>
-          <p:cNvSpPr>
-            <a:spLocks noGrp="1"/>
-          </p:cNvSpPr>
-          <p:nvPr>
-            <p:ph type="subTitle" idx="1"/>
-          </p:nvPr>
-        </p:nvSpPr>
-        <p:spPr/>
-        <p:txBody>
-          <a:bodyPr/>
-          <a:lstStyle/>
-          <a:p>
-            <a:r>
-              <a:t>Cours TIC 09 | 1h30 (90 min) | BELACEL Madani</a:t>
-            </a:r>
-          </a:p>
-        </p:txBody>
-      </p:sp>
-      <p:sp>
-        <p:nvSpPr>
-          <p:cNvPr id="4" name="TextBox 3"/>
+          <p:cNvPr id="2" name="TextBox 1"/>
           <p:cNvSpPr txBox="1"/>
           <p:nvPr/>
         </p:nvSpPr>
         <p:spPr>
           <a:xfrm>
-            <a:off x="365760" y="6446520"/>
-            <a:ext cx="8412480" cy="320040"/>
+            <a:off x="731520" y="1371600"/>
+            <a:ext cx="7680960" cy="1371600"/>
           </a:xfrm>
           <a:prstGeom prst="rect">
             <a:avLst/>
@@ -3503,20 +3127,90 @@
           <a:noFill/>
         </p:spPr>
         <p:txBody>
-          <a:bodyPr wrap="none">
+          <a:bodyPr wrap="square">
             <a:spAutoFit/>
           </a:bodyPr>
           <a:lstStyle/>
           <a:p>
             <a:pPr algn="ctr">
-              <a:defRPr sz="900">
-                <a:solidFill>
-                  <a:srgbClr val="404040"/>
-                </a:solidFill>
-              </a:defRPr>
-            </a:pPr>
-            <a:r>
-              <a:t>Cours TIC 09  •  Diapositive 1/10</a:t>
+              <a:defRPr sz="3200" b="1">
+                <a:solidFill>
+                  <a:srgbClr val="FFFFFF"/>
+                </a:solidFill>
+              </a:defRPr>
+            </a:pPr>
+            <a:r>
+              <a:t>Cours TIC 09 — Réseaux informatiques</a:t>
+            </a:r>
+          </a:p>
+        </p:txBody>
+      </p:sp>
+      <p:sp>
+        <p:nvSpPr>
+          <p:cNvPr id="3" name="TextBox 2"/>
+          <p:cNvSpPr txBox="1"/>
+          <p:nvPr/>
+        </p:nvSpPr>
+        <p:spPr>
+          <a:xfrm>
+            <a:off x="731520" y="2926080"/>
+            <a:ext cx="7680960" cy="548640"/>
+          </a:xfrm>
+          <a:prstGeom prst="rect">
+            <a:avLst/>
+          </a:prstGeom>
+          <a:noFill/>
+        </p:spPr>
+        <p:txBody>
+          <a:bodyPr wrap="square">
+            <a:spAutoFit/>
+          </a:bodyPr>
+          <a:lstStyle/>
+          <a:p>
+            <a:pPr algn="ctr">
+              <a:defRPr sz="2000" b="0">
+                <a:solidFill>
+                  <a:srgbClr val="C5D9C7"/>
+                </a:solidFill>
+              </a:defRPr>
+            </a:pPr>
+            <a:r>
+              <a:t>Module TIC — Dr. BELACEL Madani</a:t>
+            </a:r>
+          </a:p>
+        </p:txBody>
+      </p:sp>
+      <p:sp>
+        <p:nvSpPr>
+          <p:cNvPr id="4" name="TextBox 3"/>
+          <p:cNvSpPr txBox="1"/>
+          <p:nvPr/>
+        </p:nvSpPr>
+        <p:spPr>
+          <a:xfrm>
+            <a:off x="731520" y="3657600"/>
+            <a:ext cx="7680960" cy="457200"/>
+          </a:xfrm>
+          <a:prstGeom prst="rect">
+            <a:avLst/>
+          </a:prstGeom>
+          <a:noFill/>
+        </p:spPr>
+        <p:txBody>
+          <a:bodyPr wrap="square">
+            <a:spAutoFit/>
+          </a:bodyPr>
+          <a:lstStyle/>
+          <a:p>
+            <a:pPr algn="ctr">
+              <a:defRPr sz="1600" b="0">
+                <a:solidFill>
+                  <a:srgbClr val="A0CFA0"/>
+                </a:solidFill>
+              </a:defRPr>
+            </a:pPr>
+            <a:r>
+              <a:t>Université de Mostaganem — MCB</a:t>
             </a:r>
           </a:p>
         </p:txBody>
@@ -3526,15 +3220,20 @@
   <p:clrMapOvr>
     <a:masterClrMapping/>
   </p:clrMapOvr>
-  <p:transition spd="med">
-    <p:fade/>
-  </p:transition>
 </p:sld>
 </file>
 
 <file path=ppt/slides/slide10.xml><?xml version="1.0" encoding="utf-8"?>
 <p:sld xmlns:a="http://schemas.openxmlformats.org/drawingml/2006/main" xmlns:p="http://schemas.openxmlformats.org/presentationml/2006/main" xmlns:r="http://schemas.openxmlformats.org/officeDocument/2006/relationships">
   <p:cSld>
+    <p:bg>
+      <p:bgPr>
+        <a:solidFill>
+          <a:srgbClr val="FFFFFF"/>
+        </a:solidFill>
+        <a:effectLst/>
+      </p:bgPr>
+    </p:bg>
     <p:spTree>
       <p:nvGrpSpPr>
         <p:cNvPr id="1" name=""/>
@@ -3544,83 +3243,57 @@
       <p:grpSpPr/>
       <p:sp>
         <p:nvSpPr>
-          <p:cNvPr id="2" name="Title 1"/>
-          <p:cNvSpPr>
-            <a:spLocks noGrp="1"/>
-          </p:cNvSpPr>
-          <p:nvPr>
-            <p:ph type="title"/>
-          </p:nvPr>
-        </p:nvSpPr>
-        <p:spPr/>
-        <p:txBody>
-          <a:bodyPr/>
-          <a:lstStyle/>
-          <a:p>
-            <a:r>
-              <a:t>Conclusion</a:t>
-            </a:r>
-          </a:p>
-        </p:txBody>
-      </p:sp>
-      <p:sp>
-        <p:nvSpPr>
-          <p:cNvPr id="3" name="Content Placeholder 2"/>
-          <p:cNvSpPr>
-            <a:spLocks noGrp="1"/>
-          </p:cNvSpPr>
-          <p:nvPr>
-            <p:ph idx="1"/>
-          </p:nvPr>
-        </p:nvSpPr>
-        <p:spPr/>
-        <p:txBody>
-          <a:bodyPr/>
-          <a:lstStyle/>
-          <a:p>
-            <a:pPr>
-              <a:defRPr sz="2000"/>
-            </a:pPr>
-            <a:r>
-              <a:t>✅ Les réseaux relient postes et services — Prochain : Services Internet</a:t>
-            </a:r>
-          </a:p>
-          <a:p>
-            <a:pPr>
-              <a:defRPr sz="2000"/>
-            </a:pPr>
-            <a:r>
-              <a:t>✅ TD 09 — 1h30</a:t>
-            </a:r>
-          </a:p>
-          <a:p>
-            <a:pPr>
-              <a:defRPr sz="2000"/>
-            </a:pPr>
-            <a:r>
-              <a:t>✅ Séance suivante</a:t>
-            </a:r>
-          </a:p>
-          <a:p>
-            <a:pPr>
-              <a:defRPr sz="2000"/>
-            </a:pPr>
-            <a:r>
-              <a:t>✅ Questions ?</a:t>
-            </a:r>
-          </a:p>
-        </p:txBody>
-      </p:sp>
-      <p:sp>
-        <p:nvSpPr>
-          <p:cNvPr id="4" name="TextBox 3"/>
+          <p:cNvPr id="2" name="Rectangle 1"/>
+          <p:cNvSpPr/>
+          <p:nvPr/>
+        </p:nvSpPr>
+        <p:spPr>
+          <a:xfrm>
+            <a:off x="0" y="0"/>
+            <a:ext cx="109728" cy="6858000"/>
+          </a:xfrm>
+          <a:prstGeom prst="rect">
+            <a:avLst/>
+          </a:prstGeom>
+          <a:solidFill>
+            <a:srgbClr val="2C6E49"/>
+          </a:solidFill>
+          <a:ln>
+            <a:noFill/>
+          </a:ln>
+        </p:spPr>
+        <p:style>
+          <a:lnRef idx="1">
+            <a:schemeClr val="accent1"/>
+          </a:lnRef>
+          <a:fillRef idx="3">
+            <a:schemeClr val="accent1"/>
+          </a:fillRef>
+          <a:effectRef idx="2">
+            <a:schemeClr val="accent1"/>
+          </a:effectRef>
+          <a:fontRef idx="minor">
+            <a:schemeClr val="lt1"/>
+          </a:fontRef>
+        </p:style>
+        <p:txBody>
+          <a:bodyPr rtlCol="0" anchor="ctr"/>
+          <a:lstStyle/>
+          <a:p>
+            <a:pPr algn="ctr"/>
+          </a:p>
+        </p:txBody>
+      </p:sp>
+      <p:sp>
+        <p:nvSpPr>
+          <p:cNvPr id="3" name="TextBox 2"/>
           <p:cNvSpPr txBox="1"/>
           <p:nvPr/>
         </p:nvSpPr>
         <p:spPr>
           <a:xfrm>
-            <a:off x="365760" y="6446520"/>
-            <a:ext cx="8412480" cy="320040"/>
+            <a:off x="457200" y="365760"/>
+            <a:ext cx="8229600" cy="640080"/>
           </a:xfrm>
           <a:prstGeom prst="rect">
             <a:avLst/>
@@ -3628,20 +3301,193 @@
           <a:noFill/>
         </p:spPr>
         <p:txBody>
-          <a:bodyPr wrap="none">
+          <a:bodyPr wrap="square">
             <a:spAutoFit/>
           </a:bodyPr>
           <a:lstStyle/>
           <a:p>
-            <a:pPr algn="ctr">
-              <a:defRPr sz="900">
-                <a:solidFill>
-                  <a:srgbClr val="404040"/>
-                </a:solidFill>
-              </a:defRPr>
-            </a:pPr>
-            <a:r>
-              <a:t>Cours TIC 09  •  Diapositive 10/10</a:t>
+            <a:pPr algn="l">
+              <a:defRPr sz="2200" b="1">
+                <a:solidFill>
+                  <a:srgbClr val="1A5C33"/>
+                </a:solidFill>
+              </a:defRPr>
+            </a:pPr>
+            <a:r>
+              <a:t>Plan du cours</a:t>
+            </a:r>
+          </a:p>
+        </p:txBody>
+      </p:sp>
+      <p:sp>
+        <p:nvSpPr>
+          <p:cNvPr id="4" name="TextBox 3"/>
+          <p:cNvSpPr txBox="1"/>
+          <p:nvPr/>
+        </p:nvSpPr>
+        <p:spPr>
+          <a:xfrm>
+            <a:off x="457200" y="1371600"/>
+            <a:ext cx="7772400" cy="4572000"/>
+          </a:xfrm>
+          <a:prstGeom prst="rect">
+            <a:avLst/>
+          </a:prstGeom>
+          <a:noFill/>
+        </p:spPr>
+        <p:txBody>
+          <a:bodyPr wrap="square">
+            <a:spAutoFit/>
+          </a:bodyPr>
+          <a:lstStyle/>
+          <a:p>
+            <a:pPr>
+              <a:spcAft>
+                <a:spcPts val="600"/>
+              </a:spcAft>
+              <a:defRPr sz="1400">
+                <a:solidFill>
+                  <a:srgbClr val="222222"/>
+                </a:solidFill>
+              </a:defRPr>
+            </a:pPr>
+            <a:r>
+              <a:t>• Introduction — Des réseaux techniques aux réseaux sociaux</a:t>
+            </a:r>
+          </a:p>
+          <a:p>
+            <a:pPr>
+              <a:spcAft>
+                <a:spcPts val="600"/>
+              </a:spcAft>
+              <a:defRPr sz="1400">
+                <a:solidFill>
+                  <a:srgbClr val="222222"/>
+                </a:solidFill>
+              </a:defRPr>
+            </a:pPr>
+            <a:r>
+              <a:t>• Types de réseaux informatiques (PAN, LAN, MAN, WAN)</a:t>
+            </a:r>
+          </a:p>
+          <a:p>
+            <a:pPr>
+              <a:spcAft>
+                <a:spcPts val="600"/>
+              </a:spcAft>
+              <a:defRPr sz="1400">
+                <a:solidFill>
+                  <a:srgbClr val="222222"/>
+                </a:solidFill>
+              </a:defRPr>
+            </a:pPr>
+            <a:r>
+              <a:t>• Topologies physiques et logiques</a:t>
+            </a:r>
+          </a:p>
+          <a:p>
+            <a:pPr>
+              <a:spcAft>
+                <a:spcPts val="600"/>
+              </a:spcAft>
+              <a:defRPr sz="1400">
+                <a:solidFill>
+                  <a:srgbClr val="222222"/>
+                </a:solidFill>
+              </a:defRPr>
+            </a:pPr>
+            <a:r>
+              <a:t>• Équipements réseau</a:t>
+            </a:r>
+          </a:p>
+          <a:p>
+            <a:pPr>
+              <a:spcAft>
+                <a:spcPts val="600"/>
+              </a:spcAft>
+              <a:defRPr sz="1400">
+                <a:solidFill>
+                  <a:srgbClr val="222222"/>
+                </a:solidFill>
+              </a:defRPr>
+            </a:pPr>
+            <a:r>
+              <a:t>• Social Network Analysis (SNA) — fondements</a:t>
+            </a:r>
+          </a:p>
+          <a:p>
+            <a:pPr>
+              <a:spcAft>
+                <a:spcPts val="600"/>
+              </a:spcAft>
+              <a:defRPr sz="1400">
+                <a:solidFill>
+                  <a:srgbClr val="222222"/>
+                </a:solidFill>
+              </a:defRPr>
+            </a:pPr>
+            <a:r>
+              <a:t>• Réseaux sociaux et communautés linguistiques</a:t>
+            </a:r>
+          </a:p>
+          <a:p>
+            <a:pPr>
+              <a:spcAft>
+                <a:spcPts val="600"/>
+              </a:spcAft>
+              <a:defRPr sz="1400">
+                <a:solidFill>
+                  <a:srgbClr val="222222"/>
+                </a:solidFill>
+              </a:defRPr>
+            </a:pPr>
+            <a:r>
+              <a:t>• Mesures et visualisation de réseaux (Gephi)</a:t>
+            </a:r>
+          </a:p>
+          <a:p>
+            <a:pPr>
+              <a:spcAft>
+                <a:spcPts val="600"/>
+              </a:spcAft>
+              <a:defRPr sz="1400">
+                <a:solidFill>
+                  <a:srgbClr val="222222"/>
+                </a:solidFill>
+              </a:defRPr>
+            </a:pPr>
+            <a:r>
+              <a:t>• Actor-Network Theory (ANT)</a:t>
+            </a:r>
+          </a:p>
+          <a:p>
+            <a:pPr>
+              <a:spcAft>
+                <a:spcPts val="600"/>
+              </a:spcAft>
+              <a:defRPr sz="1400">
+                <a:solidFill>
+                  <a:srgbClr val="222222"/>
+                </a:solidFill>
+              </a:defRPr>
+            </a:pPr>
+            <a:r>
+              <a:t>• Réseau universitaire et identité numérique</a:t>
+            </a:r>
+          </a:p>
+          <a:p>
+            <a:pPr>
+              <a:spcAft>
+                <a:spcPts val="600"/>
+              </a:spcAft>
+              <a:defRPr sz="1400">
+                <a:solidFill>
+                  <a:srgbClr val="222222"/>
+                </a:solidFill>
+              </a:defRPr>
+            </a:pPr>
+            <a:r>
+              <a:t>• Éthique et perspectives</a:t>
             </a:r>
           </a:p>
         </p:txBody>
@@ -3651,15 +3497,20 @@
   <p:clrMapOvr>
     <a:masterClrMapping/>
   </p:clrMapOvr>
-  <p:transition spd="med">
-    <p:fade/>
-  </p:transition>
 </p:sld>
 </file>
 
-<file path=ppt/slides/slide2.xml><?xml version="1.0" encoding="utf-8"?>
+<file path=ppt/slides/slide11.xml><?xml version="1.0" encoding="utf-8"?>
 <p:sld xmlns:a="http://schemas.openxmlformats.org/drawingml/2006/main" xmlns:p="http://schemas.openxmlformats.org/presentationml/2006/main" xmlns:r="http://schemas.openxmlformats.org/officeDocument/2006/relationships">
   <p:cSld>
+    <p:bg>
+      <p:bgPr>
+        <a:solidFill>
+          <a:srgbClr val="FFFFFF"/>
+        </a:solidFill>
+        <a:effectLst/>
+      </p:bgPr>
+    </p:bg>
     <p:spTree>
       <p:nvGrpSpPr>
         <p:cNvPr id="1" name=""/>
@@ -3669,83 +3520,57 @@
       <p:grpSpPr/>
       <p:sp>
         <p:nvSpPr>
-          <p:cNvPr id="2" name="Title 1"/>
-          <p:cNvSpPr>
-            <a:spLocks noGrp="1"/>
-          </p:cNvSpPr>
-          <p:nvPr>
-            <p:ph type="title"/>
-          </p:nvPr>
-        </p:nvSpPr>
-        <p:spPr/>
-        <p:txBody>
-          <a:bodyPr/>
-          <a:lstStyle/>
-          <a:p>
-            <a:r>
-              <a:t>Objectifs pédagogiques</a:t>
-            </a:r>
-          </a:p>
-        </p:txBody>
-      </p:sp>
-      <p:sp>
-        <p:nvSpPr>
-          <p:cNvPr id="3" name="Content Placeholder 2"/>
-          <p:cNvSpPr>
-            <a:spLocks noGrp="1"/>
-          </p:cNvSpPr>
-          <p:nvPr>
-            <p:ph idx="1"/>
-          </p:nvPr>
-        </p:nvSpPr>
-        <p:spPr/>
-        <p:txBody>
-          <a:bodyPr/>
-          <a:lstStyle/>
-          <a:p>
-            <a:pPr>
-              <a:defRPr sz="2000"/>
-            </a:pPr>
-            <a:r>
-              <a:t>🎯 Maîtriser les notions du chapitre</a:t>
-            </a:r>
-          </a:p>
-          <a:p>
-            <a:pPr>
-              <a:defRPr sz="2000"/>
-            </a:pPr>
-            <a:r>
-              <a:t>🎯 Atelier poste informatique</a:t>
-            </a:r>
-          </a:p>
-          <a:p>
-            <a:pPr>
-              <a:defRPr sz="2000"/>
-            </a:pPr>
-            <a:r>
-              <a:t>🎯 Préparation TD et évaluation</a:t>
-            </a:r>
-          </a:p>
-          <a:p>
-            <a:pPr>
-              <a:defRPr sz="2000"/>
-            </a:pPr>
-            <a:r>
-              <a:t>🎯 Contexte Licence Langues</a:t>
-            </a:r>
-          </a:p>
-        </p:txBody>
-      </p:sp>
-      <p:sp>
-        <p:nvSpPr>
-          <p:cNvPr id="4" name="TextBox 3"/>
+          <p:cNvPr id="2" name="Rectangle 1"/>
+          <p:cNvSpPr/>
+          <p:nvPr/>
+        </p:nvSpPr>
+        <p:spPr>
+          <a:xfrm>
+            <a:off x="0" y="0"/>
+            <a:ext cx="109728" cy="6858000"/>
+          </a:xfrm>
+          <a:prstGeom prst="rect">
+            <a:avLst/>
+          </a:prstGeom>
+          <a:solidFill>
+            <a:srgbClr val="2C6E49"/>
+          </a:solidFill>
+          <a:ln>
+            <a:noFill/>
+          </a:ln>
+        </p:spPr>
+        <p:style>
+          <a:lnRef idx="1">
+            <a:schemeClr val="accent1"/>
+          </a:lnRef>
+          <a:fillRef idx="3">
+            <a:schemeClr val="accent1"/>
+          </a:fillRef>
+          <a:effectRef idx="2">
+            <a:schemeClr val="accent1"/>
+          </a:effectRef>
+          <a:fontRef idx="minor">
+            <a:schemeClr val="lt1"/>
+          </a:fontRef>
+        </p:style>
+        <p:txBody>
+          <a:bodyPr rtlCol="0" anchor="ctr"/>
+          <a:lstStyle/>
+          <a:p>
+            <a:pPr algn="ctr"/>
+          </a:p>
+        </p:txBody>
+      </p:sp>
+      <p:sp>
+        <p:nvSpPr>
+          <p:cNvPr id="3" name="TextBox 2"/>
           <p:cNvSpPr txBox="1"/>
           <p:nvPr/>
         </p:nvSpPr>
         <p:spPr>
           <a:xfrm>
-            <a:off x="365760" y="6446520"/>
-            <a:ext cx="8412480" cy="320040"/>
+            <a:off x="457200" y="365760"/>
+            <a:ext cx="8229600" cy="640080"/>
           </a:xfrm>
           <a:prstGeom prst="rect">
             <a:avLst/>
@@ -3753,20 +3578,103 @@
           <a:noFill/>
         </p:spPr>
         <p:txBody>
-          <a:bodyPr wrap="none">
+          <a:bodyPr wrap="square">
             <a:spAutoFit/>
           </a:bodyPr>
           <a:lstStyle/>
           <a:p>
-            <a:pPr algn="ctr">
-              <a:defRPr sz="900">
-                <a:solidFill>
-                  <a:srgbClr val="404040"/>
-                </a:solidFill>
-              </a:defRPr>
-            </a:pPr>
-            <a:r>
-              <a:t>Cours TIC 09  •  Diapositive 2/10</a:t>
+            <a:pPr algn="l">
+              <a:defRPr sz="2200" b="1">
+                <a:solidFill>
+                  <a:srgbClr val="1A5C33"/>
+                </a:solidFill>
+              </a:defRPr>
+            </a:pPr>
+            <a:r>
+              <a:t>Introduction — Des réseaux techniques aux réseaux sociaux(10 min)</a:t>
+            </a:r>
+          </a:p>
+        </p:txBody>
+      </p:sp>
+      <p:sp>
+        <p:nvSpPr>
+          <p:cNvPr id="4" name="TextBox 3"/>
+          <p:cNvSpPr txBox="1"/>
+          <p:nvPr/>
+        </p:nvSpPr>
+        <p:spPr>
+          <a:xfrm>
+            <a:off x="457200" y="1371600"/>
+            <a:ext cx="7772400" cy="4572000"/>
+          </a:xfrm>
+          <a:prstGeom prst="rect">
+            <a:avLst/>
+          </a:prstGeom>
+          <a:noFill/>
+        </p:spPr>
+        <p:txBody>
+          <a:bodyPr wrap="square">
+            <a:spAutoFit/>
+          </a:bodyPr>
+          <a:lstStyle/>
+          <a:p>
+            <a:pPr>
+              <a:spcAft>
+                <a:spcPts val="600"/>
+              </a:spcAft>
+              <a:defRPr sz="1400">
+                <a:solidFill>
+                  <a:srgbClr val="222222"/>
+                </a:solidFill>
+              </a:defRPr>
+            </a:pPr>
+            <a:r>
+              <a:t>• Le termeréseaudésigne à la fois des infrastructures techniques (réseaux informatiques) et des structures relationnelles (réseaux sociaux). En Master Langue et Culture, nous explorons ces deux dimensions :</a:t>
+            </a:r>
+          </a:p>
+          <a:p>
+            <a:pPr>
+              <a:spcAft>
+                <a:spcPts val="600"/>
+              </a:spcAft>
+              <a:defRPr sz="1400">
+                <a:solidFill>
+                  <a:srgbClr val="222222"/>
+                </a:solidFill>
+              </a:defRPr>
+            </a:pPr>
+            <a:r>
+              <a:t>• Réseau technique: comment les données circulent (LAN, Wi-Fi, TCP/IP)</a:t>
+            </a:r>
+          </a:p>
+          <a:p>
+            <a:pPr>
+              <a:spcAft>
+                <a:spcPts val="600"/>
+              </a:spcAft>
+              <a:defRPr sz="1400">
+                <a:solidFill>
+                  <a:srgbClr val="222222"/>
+                </a:solidFill>
+              </a:defRPr>
+            </a:pPr>
+            <a:r>
+              <a:t>• Réseau social: comment les humains (et leurs langues) sont connectés</a:t>
+            </a:r>
+          </a:p>
+          <a:p>
+            <a:pPr>
+              <a:spcAft>
+                <a:spcPts val="600"/>
+              </a:spcAft>
+              <a:defRPr sz="1400">
+                <a:solidFill>
+                  <a:srgbClr val="222222"/>
+                </a:solidFill>
+              </a:defRPr>
+            </a:pPr>
+            <a:r>
+              <a:t>• Prolongement Master: l'analyse des réseaux (Social Network Analysis, SNA) est une méthode puissante pour étudier les communautés linguistiques, les interactions en ligne, et la diffusion des innovations linguistiques. Elle s'inscrit dans lesDigital Humanitiescomputationnelles.</a:t>
             </a:r>
           </a:p>
         </p:txBody>
@@ -3776,15 +3684,20 @@
   <p:clrMapOvr>
     <a:masterClrMapping/>
   </p:clrMapOvr>
-  <p:transition spd="med">
-    <p:fade/>
-  </p:transition>
 </p:sld>
 </file>
 
-<file path=ppt/slides/slide3.xml><?xml version="1.0" encoding="utf-8"?>
+<file path=ppt/slides/slide12.xml><?xml version="1.0" encoding="utf-8"?>
 <p:sld xmlns:a="http://schemas.openxmlformats.org/drawingml/2006/main" xmlns:p="http://schemas.openxmlformats.org/presentationml/2006/main" xmlns:r="http://schemas.openxmlformats.org/officeDocument/2006/relationships">
   <p:cSld>
+    <p:bg>
+      <p:bgPr>
+        <a:solidFill>
+          <a:srgbClr val="FFFFFF"/>
+        </a:solidFill>
+        <a:effectLst/>
+      </p:bgPr>
+    </p:bg>
     <p:spTree>
       <p:nvGrpSpPr>
         <p:cNvPr id="1" name=""/>
@@ -3794,83 +3707,57 @@
       <p:grpSpPr/>
       <p:sp>
         <p:nvSpPr>
-          <p:cNvPr id="2" name="Title 1"/>
-          <p:cNvSpPr>
-            <a:spLocks noGrp="1"/>
-          </p:cNvSpPr>
-          <p:nvPr>
-            <p:ph type="title"/>
-          </p:nvPr>
-        </p:nvSpPr>
-        <p:spPr/>
-        <p:txBody>
-          <a:bodyPr/>
-          <a:lstStyle/>
-          <a:p>
-            <a:r>
-              <a:t>Plan du cours (1h30)</a:t>
-            </a:r>
-          </a:p>
-        </p:txBody>
-      </p:sp>
-      <p:sp>
-        <p:nvSpPr>
-          <p:cNvPr id="3" name="Content Placeholder 2"/>
-          <p:cNvSpPr>
-            <a:spLocks noGrp="1"/>
-          </p:cNvSpPr>
-          <p:nvPr>
-            <p:ph idx="1"/>
-          </p:nvPr>
-        </p:nvSpPr>
-        <p:spPr/>
-        <p:txBody>
-          <a:bodyPr/>
-          <a:lstStyle/>
-          <a:p>
-            <a:pPr>
-              <a:defRPr sz="2000"/>
-            </a:pPr>
-            <a:r>
-              <a:t>📋 8 parties — 90 min</a:t>
-            </a:r>
-          </a:p>
-          <a:p>
-            <a:pPr>
-              <a:defRPr sz="2000"/>
-            </a:pPr>
-            <a:r>
-              <a:t>📋 Introduction aux réseaux</a:t>
-            </a:r>
-          </a:p>
-          <a:p>
-            <a:pPr>
-              <a:defRPr sz="2000"/>
-            </a:pPr>
-            <a:r>
-              <a:t>📋 Types de réseaux (LAN, MAN, WAN)</a:t>
-            </a:r>
-          </a:p>
-          <a:p>
-            <a:pPr>
-              <a:defRPr sz="2000"/>
-            </a:pPr>
-            <a:r>
-              <a:t>📋 Topologies : bus, anneau, étoile</a:t>
-            </a:r>
-          </a:p>
-        </p:txBody>
-      </p:sp>
-      <p:sp>
-        <p:nvSpPr>
-          <p:cNvPr id="4" name="TextBox 3"/>
+          <p:cNvPr id="2" name="Rectangle 1"/>
+          <p:cNvSpPr/>
+          <p:nvPr/>
+        </p:nvSpPr>
+        <p:spPr>
+          <a:xfrm>
+            <a:off x="0" y="0"/>
+            <a:ext cx="109728" cy="6858000"/>
+          </a:xfrm>
+          <a:prstGeom prst="rect">
+            <a:avLst/>
+          </a:prstGeom>
+          <a:solidFill>
+            <a:srgbClr val="2C6E49"/>
+          </a:solidFill>
+          <a:ln>
+            <a:noFill/>
+          </a:ln>
+        </p:spPr>
+        <p:style>
+          <a:lnRef idx="1">
+            <a:schemeClr val="accent1"/>
+          </a:lnRef>
+          <a:fillRef idx="3">
+            <a:schemeClr val="accent1"/>
+          </a:fillRef>
+          <a:effectRef idx="2">
+            <a:schemeClr val="accent1"/>
+          </a:effectRef>
+          <a:fontRef idx="minor">
+            <a:schemeClr val="lt1"/>
+          </a:fontRef>
+        </p:style>
+        <p:txBody>
+          <a:bodyPr rtlCol="0" anchor="ctr"/>
+          <a:lstStyle/>
+          <a:p>
+            <a:pPr algn="ctr"/>
+          </a:p>
+        </p:txBody>
+      </p:sp>
+      <p:sp>
+        <p:nvSpPr>
+          <p:cNvPr id="3" name="TextBox 2"/>
           <p:cNvSpPr txBox="1"/>
           <p:nvPr/>
         </p:nvSpPr>
         <p:spPr>
           <a:xfrm>
-            <a:off x="365760" y="6446520"/>
-            <a:ext cx="8412480" cy="320040"/>
+            <a:off x="457200" y="365760"/>
+            <a:ext cx="8229600" cy="640080"/>
           </a:xfrm>
           <a:prstGeom prst="rect">
             <a:avLst/>
@@ -3878,20 +3765,88 @@
           <a:noFill/>
         </p:spPr>
         <p:txBody>
-          <a:bodyPr wrap="none">
+          <a:bodyPr wrap="square">
             <a:spAutoFit/>
           </a:bodyPr>
           <a:lstStyle/>
           <a:p>
-            <a:pPr algn="ctr">
-              <a:defRPr sz="900">
-                <a:solidFill>
-                  <a:srgbClr val="404040"/>
-                </a:solidFill>
-              </a:defRPr>
-            </a:pPr>
-            <a:r>
-              <a:t>Cours TIC 09  •  Diapositive 3/10</a:t>
+            <a:pPr algn="l">
+              <a:defRPr sz="2200" b="1">
+                <a:solidFill>
+                  <a:srgbClr val="1A5C33"/>
+                </a:solidFill>
+              </a:defRPr>
+            </a:pPr>
+            <a:r>
+              <a:t>Topologies physiques et logiques(10 min)</a:t>
+            </a:r>
+          </a:p>
+        </p:txBody>
+      </p:sp>
+      <p:sp>
+        <p:nvSpPr>
+          <p:cNvPr id="4" name="TextBox 3"/>
+          <p:cNvSpPr txBox="1"/>
+          <p:nvPr/>
+        </p:nvSpPr>
+        <p:spPr>
+          <a:xfrm>
+            <a:off x="457200" y="1371600"/>
+            <a:ext cx="7772400" cy="4572000"/>
+          </a:xfrm>
+          <a:prstGeom prst="rect">
+            <a:avLst/>
+          </a:prstGeom>
+          <a:noFill/>
+        </p:spPr>
+        <p:txBody>
+          <a:bodyPr wrap="square">
+            <a:spAutoFit/>
+          </a:bodyPr>
+          <a:lstStyle/>
+          <a:p>
+            <a:pPr>
+              <a:spcAft>
+                <a:spcPts val="600"/>
+              </a:spcAft>
+              <a:defRPr sz="1400">
+                <a:solidFill>
+                  <a:srgbClr val="222222"/>
+                </a:solidFill>
+              </a:defRPr>
+            </a:pPr>
+            <a:r>
+              <a:t>• Topologies physiques :</a:t>
+            </a:r>
+          </a:p>
+          <a:p>
+            <a:pPr>
+              <a:spcAft>
+                <a:spcPts val="600"/>
+              </a:spcAft>
+              <a:defRPr sz="1400">
+                <a:solidFill>
+                  <a:srgbClr val="222222"/>
+                </a:solidFill>
+              </a:defRPr>
+            </a:pPr>
+            <a:r>
+              <a:t>• Topologie étoile: la plus courante en milieu universitaire. Chaque poste est relié à un switch central. Avantage : panne d'un seul câble n'isole qu'une machine.</a:t>
+            </a:r>
+          </a:p>
+          <a:p>
+            <a:pPr>
+              <a:spcAft>
+                <a:spcPts val="600"/>
+              </a:spcAft>
+              <a:defRPr sz="1400">
+                <a:solidFill>
+                  <a:srgbClr val="222222"/>
+                </a:solidFill>
+              </a:defRPr>
+            </a:pPr>
+            <a:r>
+              <a:t>• Topologie logique: comment les données circulent (indépendamment de la disposition physique). Exemple : bus logique sur une topologie physique en étoile (Ethernet = CSMA/CD).</a:t>
             </a:r>
           </a:p>
         </p:txBody>
@@ -3901,15 +3856,20 @@
   <p:clrMapOvr>
     <a:masterClrMapping/>
   </p:clrMapOvr>
-  <p:transition spd="med">
-    <p:fade/>
-  </p:transition>
 </p:sld>
 </file>
 
-<file path=ppt/slides/slide4.xml><?xml version="1.0" encoding="utf-8"?>
+<file path=ppt/slides/slide13.xml><?xml version="1.0" encoding="utf-8"?>
 <p:sld xmlns:a="http://schemas.openxmlformats.org/drawingml/2006/main" xmlns:p="http://schemas.openxmlformats.org/presentationml/2006/main" xmlns:r="http://schemas.openxmlformats.org/officeDocument/2006/relationships">
   <p:cSld>
+    <p:bg>
+      <p:bgPr>
+        <a:solidFill>
+          <a:srgbClr val="E8F0E9"/>
+        </a:solidFill>
+        <a:effectLst/>
+      </p:bgPr>
+    </p:bg>
     <p:spTree>
       <p:nvGrpSpPr>
         <p:cNvPr id="1" name=""/>
@@ -3919,83 +3879,14 @@
       <p:grpSpPr/>
       <p:sp>
         <p:nvSpPr>
-          <p:cNvPr id="2" name="Title 1"/>
-          <p:cNvSpPr>
-            <a:spLocks noGrp="1"/>
-          </p:cNvSpPr>
-          <p:nvPr>
-            <p:ph type="title"/>
-          </p:nvPr>
-        </p:nvSpPr>
-        <p:spPr/>
-        <p:txBody>
-          <a:bodyPr/>
-          <a:lstStyle/>
-          <a:p>
-            <a:r>
-              <a:t>Introduction aux réseaux</a:t>
-            </a:r>
-          </a:p>
-        </p:txBody>
-      </p:sp>
-      <p:sp>
-        <p:nvSpPr>
-          <p:cNvPr id="3" name="Content Placeholder 2"/>
-          <p:cNvSpPr>
-            <a:spLocks noGrp="1"/>
-          </p:cNvSpPr>
-          <p:nvPr>
-            <p:ph idx="1"/>
-          </p:nvPr>
-        </p:nvSpPr>
-        <p:spPr/>
-        <p:txBody>
-          <a:bodyPr/>
-          <a:lstStyle/>
-          <a:p>
-            <a:pPr>
-              <a:defRPr sz="2000"/>
-            </a:pPr>
-            <a:r>
-              <a:t>💡 Points clés polycopié</a:t>
-            </a:r>
-          </a:p>
-          <a:p>
-            <a:pPr>
-              <a:defRPr sz="2000"/>
-            </a:pPr>
-            <a:r>
-              <a:t>💡 Exemples universitaires</a:t>
-            </a:r>
-          </a:p>
-          <a:p>
-            <a:pPr>
-              <a:defRPr sz="2000"/>
-            </a:pPr>
-            <a:r>
-              <a:t>💡 Démonstration guidée</a:t>
-            </a:r>
-          </a:p>
-          <a:p>
-            <a:pPr>
-              <a:defRPr sz="2000"/>
-            </a:pPr>
-            <a:r>
-              <a:t>💡 Questions</a:t>
-            </a:r>
-          </a:p>
-        </p:txBody>
-      </p:sp>
-      <p:sp>
-        <p:nvSpPr>
-          <p:cNvPr id="4" name="TextBox 3"/>
+          <p:cNvPr id="2" name="TextBox 1"/>
           <p:cNvSpPr txBox="1"/>
           <p:nvPr/>
         </p:nvSpPr>
         <p:spPr>
           <a:xfrm>
-            <a:off x="365760" y="6446520"/>
-            <a:ext cx="8412480" cy="320040"/>
+            <a:off x="548640" y="365760"/>
+            <a:ext cx="7772400" cy="640080"/>
           </a:xfrm>
           <a:prstGeom prst="rect">
             <a:avLst/>
@@ -4003,20 +3894,126 @@
           <a:noFill/>
         </p:spPr>
         <p:txBody>
-          <a:bodyPr wrap="none">
+          <a:bodyPr wrap="square">
             <a:spAutoFit/>
           </a:bodyPr>
           <a:lstStyle/>
           <a:p>
             <a:pPr algn="ctr">
-              <a:defRPr sz="900">
-                <a:solidFill>
-                  <a:srgbClr val="404040"/>
-                </a:solidFill>
-              </a:defRPr>
-            </a:pPr>
-            <a:r>
-              <a:t>Cours TIC 09  •  Diapositive 4/10</a:t>
+              <a:defRPr sz="2600" b="1">
+                <a:solidFill>
+                  <a:srgbClr val="1A5C33"/>
+                </a:solidFill>
+              </a:defRPr>
+            </a:pPr>
+            <a:r>
+              <a:t>📝 Points clés à retenir</a:t>
+            </a:r>
+          </a:p>
+        </p:txBody>
+      </p:sp>
+      <p:sp>
+        <p:nvSpPr>
+          <p:cNvPr id="3" name="TextBox 2"/>
+          <p:cNvSpPr txBox="1"/>
+          <p:nvPr/>
+        </p:nvSpPr>
+        <p:spPr>
+          <a:xfrm>
+            <a:off x="548640" y="1828800"/>
+            <a:ext cx="7772400" cy="4572000"/>
+          </a:xfrm>
+          <a:prstGeom prst="rect">
+            <a:avLst/>
+          </a:prstGeom>
+          <a:noFill/>
+        </p:spPr>
+        <p:txBody>
+          <a:bodyPr wrap="square">
+            <a:spAutoFit/>
+          </a:bodyPr>
+          <a:lstStyle/>
+          <a:p>
+            <a:pPr>
+              <a:spcAft>
+                <a:spcPts val="600"/>
+              </a:spcAft>
+              <a:defRPr sz="1600">
+                <a:solidFill>
+                  <a:srgbClr val="222222"/>
+                </a:solidFill>
+              </a:defRPr>
+            </a:pPr>
+            <a:r>
+              <a:t>• Référentiel :titres et structure alignés sur Canvas Univ-Mosta (elearning.univ-usto.dz) ; bonnes pratiques benchmark 10 universités algériennes (voirBENCHMARK_10_UNIVERSITES_ELEARNING.md).</a:t>
+            </a:r>
+          </a:p>
+          <a:p>
+            <a:pPr>
+              <a:spcAft>
+                <a:spcPts val="600"/>
+              </a:spcAft>
+              <a:defRPr sz="1600">
+                <a:solidFill>
+                  <a:srgbClr val="222222"/>
+                </a:solidFill>
+              </a:defRPr>
+            </a:pPr>
+            <a:r>
+              <a:t>• En termes de savoir :- Comprendre les concepts de réseau social et de capital social (Bourdieu, Granovetter)</a:t>
+            </a:r>
+            <a:br/>
+            <a:r>
+              <a:t>- Appliquer la théorie des réseaux à l'analyse des communautés linguistiques</a:t>
+            </a:r>
+            <a:br/>
+            <a:r>
+              <a:t>- Situer l'analyse des réseaux dans le champ de l'ethnographie numérique</a:t>
+            </a:r>
+          </a:p>
+          <a:p>
+            <a:pPr>
+              <a:spcAft>
+                <a:spcPts val="600"/>
+              </a:spcAft>
+              <a:defRPr sz="1600">
+                <a:solidFill>
+                  <a:srgbClr val="222222"/>
+                </a:solidFill>
+              </a:defRPr>
+            </a:pPr>
+            <a:r>
+              <a:t>• Cartographie d'un réseau : communauté WhatsApp d'étude ou réseau Twitter/X</a:t>
+            </a:r>
+          </a:p>
+          <a:p>
+            <a:pPr>
+              <a:spcAft>
+                <a:spcPts val="600"/>
+              </a:spcAft>
+              <a:defRPr sz="1600">
+                <a:solidFill>
+                  <a:srgbClr val="222222"/>
+                </a:solidFill>
+              </a:defRPr>
+            </a:pPr>
+            <a:r>
+              <a:t>• Rapport d'analyse de réseau (5 pages incluant visualisation)</a:t>
+            </a:r>
+          </a:p>
+          <a:p>
+            <a:pPr>
+              <a:spcAft>
+                <a:spcPts val="600"/>
+              </a:spcAft>
+              <a:defRPr sz="1600">
+                <a:solidFill>
+                  <a:srgbClr val="222222"/>
+                </a:solidFill>
+              </a:defRPr>
+            </a:pPr>
+            <a:r>
+              <a:t>• Granovetter, M. (1973). « The Strength of Weak Ties ».American Journal of Sociology, 78(6), 1360–1380.</a:t>
             </a:r>
           </a:p>
         </p:txBody>
@@ -4026,15 +4023,20 @@
   <p:clrMapOvr>
     <a:masterClrMapping/>
   </p:clrMapOvr>
-  <p:transition spd="med">
-    <p:fade/>
-  </p:transition>
 </p:sld>
 </file>
 
-<file path=ppt/slides/slide5.xml><?xml version="1.0" encoding="utf-8"?>
+<file path=ppt/slides/slide14.xml><?xml version="1.0" encoding="utf-8"?>
 <p:sld xmlns:a="http://schemas.openxmlformats.org/drawingml/2006/main" xmlns:p="http://schemas.openxmlformats.org/presentationml/2006/main" xmlns:r="http://schemas.openxmlformats.org/officeDocument/2006/relationships">
   <p:cSld>
+    <p:bg>
+      <p:bgPr>
+        <a:solidFill>
+          <a:srgbClr val="FFFFFF"/>
+        </a:solidFill>
+        <a:effectLst/>
+      </p:bgPr>
+    </p:bg>
     <p:spTree>
       <p:nvGrpSpPr>
         <p:cNvPr id="1" name=""/>
@@ -4044,83 +4046,14 @@
       <p:grpSpPr/>
       <p:sp>
         <p:nvSpPr>
-          <p:cNvPr id="2" name="Title 1"/>
-          <p:cNvSpPr>
-            <a:spLocks noGrp="1"/>
-          </p:cNvSpPr>
-          <p:nvPr>
-            <p:ph type="title"/>
-          </p:nvPr>
-        </p:nvSpPr>
-        <p:spPr/>
-        <p:txBody>
-          <a:bodyPr/>
-          <a:lstStyle/>
-          <a:p>
-            <a:r>
-              <a:t>Types de réseaux (LAN, MAN, WAN)</a:t>
-            </a:r>
-          </a:p>
-        </p:txBody>
-      </p:sp>
-      <p:sp>
-        <p:nvSpPr>
-          <p:cNvPr id="3" name="Content Placeholder 2"/>
-          <p:cNvSpPr>
-            <a:spLocks noGrp="1"/>
-          </p:cNvSpPr>
-          <p:nvPr>
-            <p:ph idx="1"/>
-          </p:nvPr>
-        </p:nvSpPr>
-        <p:spPr/>
-        <p:txBody>
-          <a:bodyPr/>
-          <a:lstStyle/>
-          <a:p>
-            <a:pPr>
-              <a:defRPr sz="2000"/>
-            </a:pPr>
-            <a:r>
-              <a:t>📖 Points clés polycopié</a:t>
-            </a:r>
-          </a:p>
-          <a:p>
-            <a:pPr>
-              <a:defRPr sz="2000"/>
-            </a:pPr>
-            <a:r>
-              <a:t>📖 Exemples universitaires</a:t>
-            </a:r>
-          </a:p>
-          <a:p>
-            <a:pPr>
-              <a:defRPr sz="2000"/>
-            </a:pPr>
-            <a:r>
-              <a:t>📖 Démonstration guidée</a:t>
-            </a:r>
-          </a:p>
-          <a:p>
-            <a:pPr>
-              <a:defRPr sz="2000"/>
-            </a:pPr>
-            <a:r>
-              <a:t>📖 Questions</a:t>
-            </a:r>
-          </a:p>
-        </p:txBody>
-      </p:sp>
-      <p:sp>
-        <p:nvSpPr>
-          <p:cNvPr id="4" name="TextBox 3"/>
+          <p:cNvPr id="2" name="TextBox 1"/>
           <p:cNvSpPr txBox="1"/>
           <p:nvPr/>
         </p:nvSpPr>
         <p:spPr>
           <a:xfrm>
-            <a:off x="365760" y="6446520"/>
-            <a:ext cx="8412480" cy="320040"/>
+            <a:off x="548640" y="365760"/>
+            <a:ext cx="7772400" cy="640080"/>
           </a:xfrm>
           <a:prstGeom prst="rect">
             <a:avLst/>
@@ -4128,20 +4061,118 @@
           <a:noFill/>
         </p:spPr>
         <p:txBody>
-          <a:bodyPr wrap="none">
+          <a:bodyPr wrap="square">
             <a:spAutoFit/>
           </a:bodyPr>
           <a:lstStyle/>
           <a:p>
             <a:pPr algn="ctr">
-              <a:defRPr sz="900">
-                <a:solidFill>
-                  <a:srgbClr val="404040"/>
-                </a:solidFill>
-              </a:defRPr>
-            </a:pPr>
-            <a:r>
-              <a:t>Cours TIC 09  •  Diapositive 5/10</a:t>
+              <a:defRPr sz="2600" b="1">
+                <a:solidFill>
+                  <a:srgbClr val="1A5C33"/>
+                </a:solidFill>
+              </a:defRPr>
+            </a:pPr>
+            <a:r>
+              <a:t>✏️ Exercices d'application</a:t>
+            </a:r>
+          </a:p>
+        </p:txBody>
+      </p:sp>
+      <p:sp>
+        <p:nvSpPr>
+          <p:cNvPr id="3" name="TextBox 2"/>
+          <p:cNvSpPr txBox="1"/>
+          <p:nvPr/>
+        </p:nvSpPr>
+        <p:spPr>
+          <a:xfrm>
+            <a:off x="548640" y="1828800"/>
+            <a:ext cx="7772400" cy="4572000"/>
+          </a:xfrm>
+          <a:prstGeom prst="rect">
+            <a:avLst/>
+          </a:prstGeom>
+          <a:noFill/>
+        </p:spPr>
+        <p:txBody>
+          <a:bodyPr wrap="square">
+            <a:spAutoFit/>
+          </a:bodyPr>
+          <a:lstStyle/>
+          <a:p>
+            <a:pPr>
+              <a:spcAft>
+                <a:spcPts val="600"/>
+              </a:spcAft>
+              <a:defRPr sz="1500">
+                <a:solidFill>
+                  <a:srgbClr val="222222"/>
+                </a:solidFill>
+              </a:defRPr>
+            </a:pPr>
+            <a:r>
+              <a:t>• Définir les concepts principaux du cours</a:t>
+            </a:r>
+          </a:p>
+          <a:p>
+            <a:pPr>
+              <a:spcAft>
+                <a:spcPts val="600"/>
+              </a:spcAft>
+              <a:defRPr sz="1500">
+                <a:solidFill>
+                  <a:srgbClr val="222222"/>
+                </a:solidFill>
+              </a:defRPr>
+            </a:pPr>
+            <a:r>
+              <a:t>• Identifier les applications pratiques</a:t>
+            </a:r>
+          </a:p>
+          <a:p>
+            <a:pPr>
+              <a:spcAft>
+                <a:spcPts val="600"/>
+              </a:spcAft>
+              <a:defRPr sz="1500">
+                <a:solidFill>
+                  <a:srgbClr val="222222"/>
+                </a:solidFill>
+              </a:defRPr>
+            </a:pPr>
+            <a:r>
+              <a:t>• Résoudre les exercices du TD</a:t>
+            </a:r>
+          </a:p>
+          <a:p>
+            <a:pPr>
+              <a:spcAft>
+                <a:spcPts val="600"/>
+              </a:spcAft>
+              <a:defRPr sz="1500">
+                <a:solidFill>
+                  <a:srgbClr val="222222"/>
+                </a:solidFill>
+              </a:defRPr>
+            </a:pPr>
+            <a:r>
+              <a:t>• Synthétiser les points clés en un paragraphe</a:t>
+            </a:r>
+          </a:p>
+          <a:p>
+            <a:pPr>
+              <a:spcAft>
+                <a:spcPts val="600"/>
+              </a:spcAft>
+              <a:defRPr sz="1500">
+                <a:solidFill>
+                  <a:srgbClr val="222222"/>
+                </a:solidFill>
+              </a:defRPr>
+            </a:pPr>
+            <a:r>
+              <a:t>• Préparer une courte présentation orale</a:t>
             </a:r>
           </a:p>
         </p:txBody>
@@ -4151,15 +4182,20 @@
   <p:clrMapOvr>
     <a:masterClrMapping/>
   </p:clrMapOvr>
-  <p:transition spd="med">
-    <p:fade/>
-  </p:transition>
 </p:sld>
 </file>
 
-<file path=ppt/slides/slide6.xml><?xml version="1.0" encoding="utf-8"?>
+<file path=ppt/slides/slide15.xml><?xml version="1.0" encoding="utf-8"?>
 <p:sld xmlns:a="http://schemas.openxmlformats.org/drawingml/2006/main" xmlns:p="http://schemas.openxmlformats.org/presentationml/2006/main" xmlns:r="http://schemas.openxmlformats.org/officeDocument/2006/relationships">
   <p:cSld>
+    <p:bg>
+      <p:bgPr>
+        <a:solidFill>
+          <a:srgbClr val="1A5C33"/>
+        </a:solidFill>
+        <a:effectLst/>
+      </p:bgPr>
+    </p:bg>
     <p:spTree>
       <p:nvGrpSpPr>
         <p:cNvPr id="1" name=""/>
@@ -4169,83 +4205,14 @@
       <p:grpSpPr/>
       <p:sp>
         <p:nvSpPr>
-          <p:cNvPr id="2" name="Title 1"/>
-          <p:cNvSpPr>
-            <a:spLocks noGrp="1"/>
-          </p:cNvSpPr>
-          <p:nvPr>
-            <p:ph type="title"/>
-          </p:nvPr>
-        </p:nvSpPr>
-        <p:spPr/>
-        <p:txBody>
-          <a:bodyPr/>
-          <a:lstStyle/>
-          <a:p>
-            <a:r>
-              <a:t>Topologies : bus, anneau, étoile</a:t>
-            </a:r>
-          </a:p>
-        </p:txBody>
-      </p:sp>
-      <p:sp>
-        <p:nvSpPr>
-          <p:cNvPr id="3" name="Content Placeholder 2"/>
-          <p:cNvSpPr>
-            <a:spLocks noGrp="1"/>
-          </p:cNvSpPr>
-          <p:nvPr>
-            <p:ph idx="1"/>
-          </p:nvPr>
-        </p:nvSpPr>
-        <p:spPr/>
-        <p:txBody>
-          <a:bodyPr/>
-          <a:lstStyle/>
-          <a:p>
-            <a:pPr>
-              <a:defRPr sz="2000"/>
-            </a:pPr>
-            <a:r>
-              <a:t>🌐 Points clés polycopié</a:t>
-            </a:r>
-          </a:p>
-          <a:p>
-            <a:pPr>
-              <a:defRPr sz="2000"/>
-            </a:pPr>
-            <a:r>
-              <a:t>🌐 Exemples universitaires</a:t>
-            </a:r>
-          </a:p>
-          <a:p>
-            <a:pPr>
-              <a:defRPr sz="2000"/>
-            </a:pPr>
-            <a:r>
-              <a:t>🌐 Démonstration guidée</a:t>
-            </a:r>
-          </a:p>
-          <a:p>
-            <a:pPr>
-              <a:defRPr sz="2000"/>
-            </a:pPr>
-            <a:r>
-              <a:t>🌐 Questions</a:t>
-            </a:r>
-          </a:p>
-        </p:txBody>
-      </p:sp>
-      <p:sp>
-        <p:nvSpPr>
-          <p:cNvPr id="4" name="TextBox 3"/>
+          <p:cNvPr id="2" name="TextBox 1"/>
           <p:cNvSpPr txBox="1"/>
           <p:nvPr/>
         </p:nvSpPr>
         <p:spPr>
           <a:xfrm>
-            <a:off x="365760" y="6446520"/>
-            <a:ext cx="8412480" cy="320040"/>
+            <a:off x="731520" y="1371600"/>
+            <a:ext cx="7680960" cy="914400"/>
           </a:xfrm>
           <a:prstGeom prst="rect">
             <a:avLst/>
@@ -4253,20 +4220,67 @@
           <a:noFill/>
         </p:spPr>
         <p:txBody>
-          <a:bodyPr wrap="none">
+          <a:bodyPr wrap="square">
             <a:spAutoFit/>
           </a:bodyPr>
           <a:lstStyle/>
           <a:p>
             <a:pPr algn="ctr">
-              <a:defRPr sz="900">
-                <a:solidFill>
-                  <a:srgbClr val="404040"/>
-                </a:solidFill>
-              </a:defRPr>
-            </a:pPr>
-            <a:r>
-              <a:t>Cours TIC 09  •  Diapositive 6/10</a:t>
+              <a:defRPr sz="2800" b="1">
+                <a:solidFill>
+                  <a:srgbClr val="FFFFFF"/>
+                </a:solidFill>
+              </a:defRPr>
+            </a:pPr>
+            <a:r>
+              <a:t>🎓 Conclusion</a:t>
+            </a:r>
+          </a:p>
+        </p:txBody>
+      </p:sp>
+      <p:sp>
+        <p:nvSpPr>
+          <p:cNvPr id="3" name="TextBox 2"/>
+          <p:cNvSpPr txBox="1"/>
+          <p:nvPr/>
+        </p:nvSpPr>
+        <p:spPr>
+          <a:xfrm>
+            <a:off x="731520" y="2743200"/>
+            <a:ext cx="7680960" cy="1828800"/>
+          </a:xfrm>
+          <a:prstGeom prst="rect">
+            <a:avLst/>
+          </a:prstGeom>
+          <a:noFill/>
+        </p:spPr>
+        <p:txBody>
+          <a:bodyPr wrap="square">
+            <a:spAutoFit/>
+          </a:bodyPr>
+          <a:lstStyle/>
+          <a:p>
+            <a:pPr algn="ctr">
+              <a:defRPr sz="1800" b="0">
+                <a:solidFill>
+                  <a:srgbClr val="C5D9C7"/>
+                </a:solidFill>
+              </a:defRPr>
+            </a:pPr>
+            <a:r>
+              <a:t>Dr. BELACEL Madani</a:t>
+            </a:r>
+            <a:br/>
+            <a:r>
+              <a:t>Maître de Conférences B</a:t>
+            </a:r>
+            <a:br/>
+            <a:r>
+              <a:t>Université de Mostaganem</a:t>
+            </a:r>
+            <a:br/>
+            <a:r>
+              <a:t>madani.belacel@univ-mosta.dz</a:t>
             </a:r>
           </a:p>
         </p:txBody>
@@ -4276,15 +4290,20 @@
   <p:clrMapOvr>
     <a:masterClrMapping/>
   </p:clrMapOvr>
-  <p:transition spd="med">
-    <p:fade/>
-  </p:transition>
 </p:sld>
 </file>
 
-<file path=ppt/slides/slide7.xml><?xml version="1.0" encoding="utf-8"?>
+<file path=ppt/slides/slide2.xml><?xml version="1.0" encoding="utf-8"?>
 <p:sld xmlns:a="http://schemas.openxmlformats.org/drawingml/2006/main" xmlns:p="http://schemas.openxmlformats.org/presentationml/2006/main" xmlns:r="http://schemas.openxmlformats.org/officeDocument/2006/relationships">
   <p:cSld>
+    <p:bg>
+      <p:bgPr>
+        <a:solidFill>
+          <a:srgbClr val="FFFFFF"/>
+        </a:solidFill>
+        <a:effectLst/>
+      </p:bgPr>
+    </p:bg>
     <p:spTree>
       <p:nvGrpSpPr>
         <p:cNvPr id="1" name=""/>
@@ -4294,83 +4313,14 @@
       <p:grpSpPr/>
       <p:sp>
         <p:nvSpPr>
-          <p:cNvPr id="2" name="Title 1"/>
-          <p:cNvSpPr>
-            <a:spLocks noGrp="1"/>
-          </p:cNvSpPr>
-          <p:nvPr>
-            <p:ph type="title"/>
-          </p:nvPr>
-        </p:nvSpPr>
-        <p:spPr/>
-        <p:txBody>
-          <a:bodyPr/>
-          <a:lstStyle/>
-          <a:p>
-            <a:r>
-              <a:t>Topologies : maillé et arborescente</a:t>
-            </a:r>
-          </a:p>
-        </p:txBody>
-      </p:sp>
-      <p:sp>
-        <p:nvSpPr>
-          <p:cNvPr id="3" name="Content Placeholder 2"/>
-          <p:cNvSpPr>
-            <a:spLocks noGrp="1"/>
-          </p:cNvSpPr>
-          <p:nvPr>
-            <p:ph idx="1"/>
-          </p:nvPr>
-        </p:nvSpPr>
-        <p:spPr/>
-        <p:txBody>
-          <a:bodyPr/>
-          <a:lstStyle/>
-          <a:p>
-            <a:pPr>
-              <a:defRPr sz="2000"/>
-            </a:pPr>
-            <a:r>
-              <a:t>🔗 Points clés polycopié</a:t>
-            </a:r>
-          </a:p>
-          <a:p>
-            <a:pPr>
-              <a:defRPr sz="2000"/>
-            </a:pPr>
-            <a:r>
-              <a:t>🔗 Exemples universitaires</a:t>
-            </a:r>
-          </a:p>
-          <a:p>
-            <a:pPr>
-              <a:defRPr sz="2000"/>
-            </a:pPr>
-            <a:r>
-              <a:t>🔗 Démonstration guidée</a:t>
-            </a:r>
-          </a:p>
-          <a:p>
-            <a:pPr>
-              <a:defRPr sz="2000"/>
-            </a:pPr>
-            <a:r>
-              <a:t>🔗 Questions</a:t>
-            </a:r>
-          </a:p>
-        </p:txBody>
-      </p:sp>
-      <p:sp>
-        <p:nvSpPr>
-          <p:cNvPr id="4" name="TextBox 3"/>
+          <p:cNvPr id="2" name="TextBox 1"/>
           <p:cNvSpPr txBox="1"/>
           <p:nvPr/>
         </p:nvSpPr>
         <p:spPr>
           <a:xfrm>
-            <a:off x="365760" y="6446520"/>
-            <a:ext cx="8412480" cy="320040"/>
+            <a:off x="548640" y="365760"/>
+            <a:ext cx="7772400" cy="640080"/>
           </a:xfrm>
           <a:prstGeom prst="rect">
             <a:avLst/>
@@ -4378,20 +4328,123 @@
           <a:noFill/>
         </p:spPr>
         <p:txBody>
-          <a:bodyPr wrap="none">
+          <a:bodyPr wrap="square">
             <a:spAutoFit/>
           </a:bodyPr>
           <a:lstStyle/>
           <a:p>
-            <a:pPr algn="ctr">
-              <a:defRPr sz="900">
-                <a:solidFill>
-                  <a:srgbClr val="404040"/>
-                </a:solidFill>
-              </a:defRPr>
-            </a:pPr>
-            <a:r>
-              <a:t>Cours TIC 09  •  Diapositive 7/10</a:t>
+            <a:pPr algn="l">
+              <a:defRPr sz="2600" b="1">
+                <a:solidFill>
+                  <a:srgbClr val="1A5C33"/>
+                </a:solidFill>
+              </a:defRPr>
+            </a:pPr>
+            <a:r>
+              <a:t>🎯 Objectifs pédagogiques</a:t>
+            </a:r>
+          </a:p>
+        </p:txBody>
+      </p:sp>
+      <p:sp>
+        <p:nvSpPr>
+          <p:cNvPr id="3" name="TextBox 2"/>
+          <p:cNvSpPr txBox="1"/>
+          <p:nvPr/>
+        </p:nvSpPr>
+        <p:spPr>
+          <a:xfrm>
+            <a:off x="548640" y="1828800"/>
+            <a:ext cx="7772400" cy="4572000"/>
+          </a:xfrm>
+          <a:prstGeom prst="rect">
+            <a:avLst/>
+          </a:prstGeom>
+          <a:noFill/>
+        </p:spPr>
+        <p:txBody>
+          <a:bodyPr wrap="square">
+            <a:spAutoFit/>
+          </a:bodyPr>
+          <a:lstStyle/>
+          <a:p>
+            <a:pPr>
+              <a:spcAft>
+                <a:spcPts val="600"/>
+              </a:spcAft>
+              <a:defRPr sz="1500">
+                <a:solidFill>
+                  <a:srgbClr val="222222"/>
+                </a:solidFill>
+              </a:defRPr>
+            </a:pPr>
+            <a:r>
+              <a:t>• En termes de savoir :- Comprendre les concepts de réseau social et de capital social (Bourdieu, Granovetter)</a:t>
+            </a:r>
+            <a:br/>
+            <a:r>
+              <a:t>- Appliquer la théorie des réseaux à l'analyse des communautés linguistiques</a:t>
+            </a:r>
+            <a:br/>
+            <a:r>
+              <a:t>- Situer l'analyse des réseaux dans le champ de l'ethnographie numérique</a:t>
+            </a:r>
+          </a:p>
+          <a:p>
+            <a:pPr>
+              <a:spcAft>
+                <a:spcPts val="600"/>
+              </a:spcAft>
+              <a:defRPr sz="1500">
+                <a:solidFill>
+                  <a:srgbClr val="222222"/>
+                </a:solidFill>
+              </a:defRPr>
+            </a:pPr>
+            <a:r>
+              <a:t>• En termes de savoir-faire :- Utiliser un outil de visualisation de réseaux (Gephi, NodeXL) sur un petit corpus</a:t>
+            </a:r>
+            <a:br/>
+            <a:r>
+              <a:t>- Interpréter des mesures de centralité, densité, modularité</a:t>
+            </a:r>
+            <a:br/>
+            <a:r>
+              <a:t>- Cartographier un réseau de relations (Twitter, courriels, co-publications)</a:t>
+            </a:r>
+          </a:p>
+          <a:p>
+            <a:pPr>
+              <a:spcAft>
+                <a:spcPts val="600"/>
+              </a:spcAft>
+              <a:defRPr sz="1500">
+                <a:solidFill>
+                  <a:srgbClr val="222222"/>
+                </a:solidFill>
+              </a:defRPr>
+            </a:pPr>
+            <a:r>
+              <a:t>• En termes de savoir-être :- Réflexivité sur la position du chercheur dans le réseau observé</a:t>
+            </a:r>
+            <a:br/>
+            <a:r>
+              <a:t>- Éthique de la collecte de données relationnelles</a:t>
+            </a:r>
+          </a:p>
+          <a:p>
+            <a:pPr>
+              <a:spcAft>
+                <a:spcPts val="600"/>
+              </a:spcAft>
+              <a:defRPr sz="1500">
+                <a:solidFill>
+                  <a:srgbClr val="222222"/>
+                </a:solidFill>
+              </a:defRPr>
+            </a:pPr>
+            <a:r>
+              <a:t>• Mode d'évaluation :TD 25 % + Analyse de réseau (mini-mémoire graphique) 50 % + QCM 25 %</a:t>
             </a:r>
           </a:p>
         </p:txBody>
@@ -4401,15 +4454,20 @@
   <p:clrMapOvr>
     <a:masterClrMapping/>
   </p:clrMapOvr>
-  <p:transition spd="med">
-    <p:fade/>
-  </p:transition>
 </p:sld>
 </file>
 
-<file path=ppt/slides/slide8.xml><?xml version="1.0" encoding="utf-8"?>
+<file path=ppt/slides/slide3.xml><?xml version="1.0" encoding="utf-8"?>
 <p:sld xmlns:a="http://schemas.openxmlformats.org/drawingml/2006/main" xmlns:p="http://schemas.openxmlformats.org/presentationml/2006/main" xmlns:r="http://schemas.openxmlformats.org/officeDocument/2006/relationships">
   <p:cSld>
+    <p:bg>
+      <p:bgPr>
+        <a:solidFill>
+          <a:srgbClr val="FFFFFF"/>
+        </a:solidFill>
+        <a:effectLst/>
+      </p:bgPr>
+    </p:bg>
     <p:spTree>
       <p:nvGrpSpPr>
         <p:cNvPr id="1" name=""/>
@@ -4419,83 +4477,14 @@
       <p:grpSpPr/>
       <p:sp>
         <p:nvSpPr>
-          <p:cNvPr id="2" name="Title 1"/>
-          <p:cNvSpPr>
-            <a:spLocks noGrp="1"/>
-          </p:cNvSpPr>
-          <p:nvPr>
-            <p:ph type="title"/>
-          </p:nvPr>
-        </p:nvSpPr>
-        <p:spPr/>
-        <p:txBody>
-          <a:bodyPr/>
-          <a:lstStyle/>
-          <a:p>
-            <a:r>
-              <a:t>Composants d'un réseau</a:t>
-            </a:r>
-          </a:p>
-        </p:txBody>
-      </p:sp>
-      <p:sp>
-        <p:nvSpPr>
-          <p:cNvPr id="3" name="Content Placeholder 2"/>
-          <p:cNvSpPr>
-            <a:spLocks noGrp="1"/>
-          </p:cNvSpPr>
-          <p:nvPr>
-            <p:ph idx="1"/>
-          </p:nvPr>
-        </p:nvSpPr>
-        <p:spPr/>
-        <p:txBody>
-          <a:bodyPr/>
-          <a:lstStyle/>
-          <a:p>
-            <a:pPr>
-              <a:defRPr sz="2000"/>
-            </a:pPr>
-            <a:r>
-              <a:t>📡 Points clés polycopié</a:t>
-            </a:r>
-          </a:p>
-          <a:p>
-            <a:pPr>
-              <a:defRPr sz="2000"/>
-            </a:pPr>
-            <a:r>
-              <a:t>📡 Exemples universitaires</a:t>
-            </a:r>
-          </a:p>
-          <a:p>
-            <a:pPr>
-              <a:defRPr sz="2000"/>
-            </a:pPr>
-            <a:r>
-              <a:t>📡 Démonstration guidée</a:t>
-            </a:r>
-          </a:p>
-          <a:p>
-            <a:pPr>
-              <a:defRPr sz="2000"/>
-            </a:pPr>
-            <a:r>
-              <a:t>📡 Questions</a:t>
-            </a:r>
-          </a:p>
-        </p:txBody>
-      </p:sp>
-      <p:sp>
-        <p:nvSpPr>
-          <p:cNvPr id="4" name="TextBox 3"/>
+          <p:cNvPr id="2" name="TextBox 1"/>
           <p:cNvSpPr txBox="1"/>
           <p:nvPr/>
         </p:nvSpPr>
         <p:spPr>
           <a:xfrm>
-            <a:off x="365760" y="6446520"/>
-            <a:ext cx="8412480" cy="320040"/>
+            <a:off x="548640" y="365760"/>
+            <a:ext cx="7772400" cy="640080"/>
           </a:xfrm>
           <a:prstGeom prst="rect">
             <a:avLst/>
@@ -4503,20 +4492,193 @@
           <a:noFill/>
         </p:spPr>
         <p:txBody>
-          <a:bodyPr wrap="none">
+          <a:bodyPr wrap="square">
             <a:spAutoFit/>
           </a:bodyPr>
           <a:lstStyle/>
           <a:p>
-            <a:pPr algn="ctr">
-              <a:defRPr sz="900">
-                <a:solidFill>
-                  <a:srgbClr val="404040"/>
-                </a:solidFill>
-              </a:defRPr>
-            </a:pPr>
-            <a:r>
-              <a:t>Cours TIC 09  •  Diapositive 8/10</a:t>
+            <a:pPr algn="l">
+              <a:defRPr sz="2600" b="1">
+                <a:solidFill>
+                  <a:srgbClr val="1A5C33"/>
+                </a:solidFill>
+              </a:defRPr>
+            </a:pPr>
+            <a:r>
+              <a:t>📋 Plan du cours</a:t>
+            </a:r>
+          </a:p>
+        </p:txBody>
+      </p:sp>
+      <p:sp>
+        <p:nvSpPr>
+          <p:cNvPr id="3" name="TextBox 2"/>
+          <p:cNvSpPr txBox="1"/>
+          <p:nvPr/>
+        </p:nvSpPr>
+        <p:spPr>
+          <a:xfrm>
+            <a:off x="548640" y="1828800"/>
+            <a:ext cx="7772400" cy="4572000"/>
+          </a:xfrm>
+          <a:prstGeom prst="rect">
+            <a:avLst/>
+          </a:prstGeom>
+          <a:noFill/>
+        </p:spPr>
+        <p:txBody>
+          <a:bodyPr wrap="square">
+            <a:spAutoFit/>
+          </a:bodyPr>
+          <a:lstStyle/>
+          <a:p>
+            <a:pPr>
+              <a:spcAft>
+                <a:spcPts val="600"/>
+              </a:spcAft>
+              <a:defRPr sz="1600">
+                <a:solidFill>
+                  <a:srgbClr val="222222"/>
+                </a:solidFill>
+              </a:defRPr>
+            </a:pPr>
+            <a:r>
+              <a:t>• Fiche cours — Plateforme e-learning (Moodle)</a:t>
+            </a:r>
+          </a:p>
+          <a:p>
+            <a:pPr>
+              <a:spcAft>
+                <a:spcPts val="600"/>
+              </a:spcAft>
+              <a:defRPr sz="1600">
+                <a:solidFill>
+                  <a:srgbClr val="222222"/>
+                </a:solidFill>
+              </a:defRPr>
+            </a:pPr>
+            <a:r>
+              <a:t>• Objectifs de l'enseignement</a:t>
+            </a:r>
+          </a:p>
+          <a:p>
+            <a:pPr>
+              <a:spcAft>
+                <a:spcPts val="600"/>
+              </a:spcAft>
+              <a:defRPr sz="1600">
+                <a:solidFill>
+                  <a:srgbClr val="222222"/>
+                </a:solidFill>
+              </a:defRPr>
+            </a:pPr>
+            <a:r>
+              <a:t>• Activités d'apprentissage</a:t>
+            </a:r>
+          </a:p>
+          <a:p>
+            <a:pPr>
+              <a:spcAft>
+                <a:spcPts val="600"/>
+              </a:spcAft>
+              <a:defRPr sz="1600">
+                <a:solidFill>
+                  <a:srgbClr val="222222"/>
+                </a:solidFill>
+              </a:defRPr>
+            </a:pPr>
+            <a:r>
+              <a:t>• Activités d'évaluation</a:t>
+            </a:r>
+          </a:p>
+          <a:p>
+            <a:pPr>
+              <a:spcAft>
+                <a:spcPts val="600"/>
+              </a:spcAft>
+              <a:defRPr sz="1600">
+                <a:solidFill>
+                  <a:srgbClr val="222222"/>
+                </a:solidFill>
+              </a:defRPr>
+            </a:pPr>
+            <a:r>
+              <a:t>• Bibliographie et ressources externes</a:t>
+            </a:r>
+          </a:p>
+          <a:p>
+            <a:pPr>
+              <a:spcAft>
+                <a:spcPts val="600"/>
+              </a:spcAft>
+              <a:defRPr sz="1600">
+                <a:solidFill>
+                  <a:srgbClr val="222222"/>
+                </a:solidFill>
+              </a:defRPr>
+            </a:pPr>
+            <a:r>
+              <a:t>• Contexte réglementaire algérien</a:t>
+            </a:r>
+          </a:p>
+          <a:p>
+            <a:pPr>
+              <a:spcAft>
+                <a:spcPts val="600"/>
+              </a:spcAft>
+              <a:defRPr sz="1600">
+                <a:solidFill>
+                  <a:srgbClr val="222222"/>
+                </a:solidFill>
+              </a:defRPr>
+            </a:pPr>
+            <a:r>
+              <a:t>• Plan du cours</a:t>
+            </a:r>
+          </a:p>
+          <a:p>
+            <a:pPr>
+              <a:spcAft>
+                <a:spcPts val="600"/>
+              </a:spcAft>
+              <a:defRPr sz="1600">
+                <a:solidFill>
+                  <a:srgbClr val="222222"/>
+                </a:solidFill>
+              </a:defRPr>
+            </a:pPr>
+            <a:r>
+              <a:t>• Introduction — Des réseaux techniques aux réseaux sociaux(10 min)</a:t>
+            </a:r>
+          </a:p>
+          <a:p>
+            <a:pPr>
+              <a:spcAft>
+                <a:spcPts val="600"/>
+              </a:spcAft>
+              <a:defRPr sz="1600">
+                <a:solidFill>
+                  <a:srgbClr val="222222"/>
+                </a:solidFill>
+              </a:defRPr>
+            </a:pPr>
+            <a:r>
+              <a:t>• Topologies physiques et logiques(10 min)</a:t>
+            </a:r>
+          </a:p>
+          <a:p>
+            <a:pPr>
+              <a:spcAft>
+                <a:spcPts val="600"/>
+              </a:spcAft>
+              <a:defRPr sz="1600">
+                <a:solidFill>
+                  <a:srgbClr val="222222"/>
+                </a:solidFill>
+              </a:defRPr>
+            </a:pPr>
+            <a:r>
+              <a:t>• Social Network Analysis (SNA) — fondements(15 min)</a:t>
             </a:r>
           </a:p>
         </p:txBody>
@@ -4526,15 +4688,20 @@
   <p:clrMapOvr>
     <a:masterClrMapping/>
   </p:clrMapOvr>
-  <p:transition spd="med">
-    <p:fade/>
-  </p:transition>
 </p:sld>
 </file>
 
-<file path=ppt/slides/slide9.xml><?xml version="1.0" encoding="utf-8"?>
+<file path=ppt/slides/slide4.xml><?xml version="1.0" encoding="utf-8"?>
 <p:sld xmlns:a="http://schemas.openxmlformats.org/drawingml/2006/main" xmlns:p="http://schemas.openxmlformats.org/presentationml/2006/main" xmlns:r="http://schemas.openxmlformats.org/officeDocument/2006/relationships">
   <p:cSld>
+    <p:bg>
+      <p:bgPr>
+        <a:solidFill>
+          <a:srgbClr val="FFFFFF"/>
+        </a:solidFill>
+        <a:effectLst/>
+      </p:bgPr>
+    </p:bg>
     <p:spTree>
       <p:nvGrpSpPr>
         <p:cNvPr id="1" name=""/>
@@ -4544,83 +4711,57 @@
       <p:grpSpPr/>
       <p:sp>
         <p:nvSpPr>
-          <p:cNvPr id="2" name="Title 1"/>
-          <p:cNvSpPr>
-            <a:spLocks noGrp="1"/>
-          </p:cNvSpPr>
-          <p:nvPr>
-            <p:ph type="title"/>
-          </p:nvPr>
-        </p:nvSpPr>
-        <p:spPr/>
-        <p:txBody>
-          <a:bodyPr/>
-          <a:lstStyle/>
-          <a:p>
-            <a:r>
-              <a:t>Atelier et évaluation</a:t>
-            </a:r>
-          </a:p>
-        </p:txBody>
-      </p:sp>
-      <p:sp>
-        <p:nvSpPr>
-          <p:cNvPr id="3" name="Content Placeholder 2"/>
-          <p:cNvSpPr>
-            <a:spLocks noGrp="1"/>
-          </p:cNvSpPr>
-          <p:nvPr>
-            <p:ph idx="1"/>
-          </p:nvPr>
-        </p:nvSpPr>
-        <p:spPr/>
-        <p:txBody>
-          <a:bodyPr/>
-          <a:lstStyle/>
-          <a:p>
-            <a:pPr>
-              <a:defRPr sz="2000"/>
-            </a:pPr>
-            <a:r>
-              <a:t>🛠️ Travaux sur poste</a:t>
-            </a:r>
-          </a:p>
-          <a:p>
-            <a:pPr>
-              <a:defRPr sz="2000"/>
-            </a:pPr>
-            <a:r>
-              <a:t>🛠️ Fiche TD 1h30</a:t>
-            </a:r>
-          </a:p>
-          <a:p>
-            <a:pPr>
-              <a:defRPr sz="2000"/>
-            </a:pPr>
-            <a:r>
-              <a:t>🛠️ Auto-évaluation</a:t>
-            </a:r>
-          </a:p>
-          <a:p>
-            <a:pPr>
-              <a:defRPr sz="2000"/>
-            </a:pPr>
-            <a:r>
-              <a:t>🛠️ Support PDF officiel</a:t>
-            </a:r>
-          </a:p>
-        </p:txBody>
-      </p:sp>
-      <p:sp>
-        <p:nvSpPr>
-          <p:cNvPr id="4" name="TextBox 3"/>
+          <p:cNvPr id="2" name="Rectangle 1"/>
+          <p:cNvSpPr/>
+          <p:nvPr/>
+        </p:nvSpPr>
+        <p:spPr>
+          <a:xfrm>
+            <a:off x="0" y="0"/>
+            <a:ext cx="109728" cy="6858000"/>
+          </a:xfrm>
+          <a:prstGeom prst="rect">
+            <a:avLst/>
+          </a:prstGeom>
+          <a:solidFill>
+            <a:srgbClr val="2C6E49"/>
+          </a:solidFill>
+          <a:ln>
+            <a:noFill/>
+          </a:ln>
+        </p:spPr>
+        <p:style>
+          <a:lnRef idx="1">
+            <a:schemeClr val="accent1"/>
+          </a:lnRef>
+          <a:fillRef idx="3">
+            <a:schemeClr val="accent1"/>
+          </a:fillRef>
+          <a:effectRef idx="2">
+            <a:schemeClr val="accent1"/>
+          </a:effectRef>
+          <a:fontRef idx="minor">
+            <a:schemeClr val="lt1"/>
+          </a:fontRef>
+        </p:style>
+        <p:txBody>
+          <a:bodyPr rtlCol="0" anchor="ctr"/>
+          <a:lstStyle/>
+          <a:p>
+            <a:pPr algn="ctr"/>
+          </a:p>
+        </p:txBody>
+      </p:sp>
+      <p:sp>
+        <p:nvSpPr>
+          <p:cNvPr id="3" name="TextBox 2"/>
           <p:cNvSpPr txBox="1"/>
           <p:nvPr/>
         </p:nvSpPr>
         <p:spPr>
           <a:xfrm>
-            <a:off x="365760" y="6446520"/>
-            <a:ext cx="8412480" cy="320040"/>
+            <a:off x="457200" y="365760"/>
+            <a:ext cx="8229600" cy="640080"/>
           </a:xfrm>
           <a:prstGeom prst="rect">
             <a:avLst/>
@@ -4628,20 +4769,88 @@
           <a:noFill/>
         </p:spPr>
         <p:txBody>
-          <a:bodyPr wrap="none">
+          <a:bodyPr wrap="square">
             <a:spAutoFit/>
           </a:bodyPr>
           <a:lstStyle/>
           <a:p>
-            <a:pPr algn="ctr">
-              <a:defRPr sz="900">
-                <a:solidFill>
-                  <a:srgbClr val="404040"/>
-                </a:solidFill>
-              </a:defRPr>
-            </a:pPr>
-            <a:r>
-              <a:t>Cours TIC 09  •  Diapositive 9/10</a:t>
+            <a:pPr algn="l">
+              <a:defRPr sz="2200" b="1">
+                <a:solidFill>
+                  <a:srgbClr val="1A5C33"/>
+                </a:solidFill>
+              </a:defRPr>
+            </a:pPr>
+            <a:r>
+              <a:t>Fiche cours — Plateforme e-learning (Moodle)</a:t>
+            </a:r>
+          </a:p>
+        </p:txBody>
+      </p:sp>
+      <p:sp>
+        <p:nvSpPr>
+          <p:cNvPr id="4" name="TextBox 3"/>
+          <p:cNvSpPr txBox="1"/>
+          <p:nvPr/>
+        </p:nvSpPr>
+        <p:spPr>
+          <a:xfrm>
+            <a:off x="457200" y="1371600"/>
+            <a:ext cx="7772400" cy="4572000"/>
+          </a:xfrm>
+          <a:prstGeom prst="rect">
+            <a:avLst/>
+          </a:prstGeom>
+          <a:noFill/>
+        </p:spPr>
+        <p:txBody>
+          <a:bodyPr wrap="square">
+            <a:spAutoFit/>
+          </a:bodyPr>
+          <a:lstStyle/>
+          <a:p>
+            <a:pPr>
+              <a:spcAft>
+                <a:spcPts val="600"/>
+              </a:spcAft>
+              <a:defRPr sz="1400">
+                <a:solidFill>
+                  <a:srgbClr val="222222"/>
+                </a:solidFill>
+              </a:defRPr>
+            </a:pPr>
+            <a:r>
+              <a:t>• Référentiel :titres et structure alignés sur Canvas Univ-Mosta (elearning.univ-usto.dz) ; bonnes pratiques benchmark 10 universités algériennes (voirBENCHMARK_10_UNIVERSITES_ELEARNING.md).</a:t>
+            </a:r>
+          </a:p>
+          <a:p>
+            <a:pPr>
+              <a:spcAft>
+                <a:spcPts val="600"/>
+              </a:spcAft>
+              <a:defRPr sz="1400">
+                <a:solidFill>
+                  <a:srgbClr val="222222"/>
+                </a:solidFill>
+              </a:defRPr>
+            </a:pPr>
+            <a:r>
+              <a:t>• Public visé :Master 1 Langue et Culture</a:t>
+            </a:r>
+          </a:p>
+          <a:p>
+            <a:pPr>
+              <a:spcAft>
+                <a:spcPts val="600"/>
+              </a:spcAft>
+              <a:defRPr sz="1400">
+                <a:solidFill>
+                  <a:srgbClr val="222222"/>
+                </a:solidFill>
+              </a:defRPr>
+            </a:pPr>
+            <a:r>
+              <a:t>• Compétences pré-requises :TIC 07–08 ; notions d'adressage IP et de protocoles</a:t>
             </a:r>
           </a:p>
         </p:txBody>
@@ -4651,9 +4860,901 @@
   <p:clrMapOvr>
     <a:masterClrMapping/>
   </p:clrMapOvr>
-  <p:transition spd="med">
-    <p:fade/>
-  </p:transition>
+</p:sld>
+</file>
+
+<file path=ppt/slides/slide5.xml><?xml version="1.0" encoding="utf-8"?>
+<p:sld xmlns:a="http://schemas.openxmlformats.org/drawingml/2006/main" xmlns:p="http://schemas.openxmlformats.org/presentationml/2006/main" xmlns:r="http://schemas.openxmlformats.org/officeDocument/2006/relationships">
+  <p:cSld>
+    <p:bg>
+      <p:bgPr>
+        <a:solidFill>
+          <a:srgbClr val="FFFFFF"/>
+        </a:solidFill>
+        <a:effectLst/>
+      </p:bgPr>
+    </p:bg>
+    <p:spTree>
+      <p:nvGrpSpPr>
+        <p:cNvPr id="1" name=""/>
+        <p:cNvGrpSpPr/>
+        <p:nvPr/>
+      </p:nvGrpSpPr>
+      <p:grpSpPr/>
+      <p:sp>
+        <p:nvSpPr>
+          <p:cNvPr id="2" name="Rectangle 1"/>
+          <p:cNvSpPr/>
+          <p:nvPr/>
+        </p:nvSpPr>
+        <p:spPr>
+          <a:xfrm>
+            <a:off x="0" y="0"/>
+            <a:ext cx="109728" cy="6858000"/>
+          </a:xfrm>
+          <a:prstGeom prst="rect">
+            <a:avLst/>
+          </a:prstGeom>
+          <a:solidFill>
+            <a:srgbClr val="2C6E49"/>
+          </a:solidFill>
+          <a:ln>
+            <a:noFill/>
+          </a:ln>
+        </p:spPr>
+        <p:style>
+          <a:lnRef idx="1">
+            <a:schemeClr val="accent1"/>
+          </a:lnRef>
+          <a:fillRef idx="3">
+            <a:schemeClr val="accent1"/>
+          </a:fillRef>
+          <a:effectRef idx="2">
+            <a:schemeClr val="accent1"/>
+          </a:effectRef>
+          <a:fontRef idx="minor">
+            <a:schemeClr val="lt1"/>
+          </a:fontRef>
+        </p:style>
+        <p:txBody>
+          <a:bodyPr rtlCol="0" anchor="ctr"/>
+          <a:lstStyle/>
+          <a:p>
+            <a:pPr algn="ctr"/>
+          </a:p>
+        </p:txBody>
+      </p:sp>
+      <p:sp>
+        <p:nvSpPr>
+          <p:cNvPr id="3" name="TextBox 2"/>
+          <p:cNvSpPr txBox="1"/>
+          <p:nvPr/>
+        </p:nvSpPr>
+        <p:spPr>
+          <a:xfrm>
+            <a:off x="457200" y="365760"/>
+            <a:ext cx="8229600" cy="640080"/>
+          </a:xfrm>
+          <a:prstGeom prst="rect">
+            <a:avLst/>
+          </a:prstGeom>
+          <a:noFill/>
+        </p:spPr>
+        <p:txBody>
+          <a:bodyPr wrap="square">
+            <a:spAutoFit/>
+          </a:bodyPr>
+          <a:lstStyle/>
+          <a:p>
+            <a:pPr algn="l">
+              <a:defRPr sz="2200" b="1">
+                <a:solidFill>
+                  <a:srgbClr val="1A5C33"/>
+                </a:solidFill>
+              </a:defRPr>
+            </a:pPr>
+            <a:r>
+              <a:t>Objectifs de l'enseignement</a:t>
+            </a:r>
+          </a:p>
+        </p:txBody>
+      </p:sp>
+      <p:sp>
+        <p:nvSpPr>
+          <p:cNvPr id="4" name="TextBox 3"/>
+          <p:cNvSpPr txBox="1"/>
+          <p:nvPr/>
+        </p:nvSpPr>
+        <p:spPr>
+          <a:xfrm>
+            <a:off x="457200" y="1371600"/>
+            <a:ext cx="7772400" cy="4572000"/>
+          </a:xfrm>
+          <a:prstGeom prst="rect">
+            <a:avLst/>
+          </a:prstGeom>
+          <a:noFill/>
+        </p:spPr>
+        <p:txBody>
+          <a:bodyPr wrap="square">
+            <a:spAutoFit/>
+          </a:bodyPr>
+          <a:lstStyle/>
+          <a:p>
+            <a:pPr>
+              <a:spcAft>
+                <a:spcPts val="600"/>
+              </a:spcAft>
+              <a:defRPr sz="1400">
+                <a:solidFill>
+                  <a:srgbClr val="222222"/>
+                </a:solidFill>
+              </a:defRPr>
+            </a:pPr>
+            <a:r>
+              <a:t>• En termes de savoir :- Comprendre les concepts de réseau social et de capital social (Bourdieu, Granovetter)</a:t>
+            </a:r>
+            <a:br/>
+            <a:r>
+              <a:t>- Appliquer la théorie des réseaux à l'analyse des communautés linguistiques</a:t>
+            </a:r>
+            <a:br/>
+            <a:r>
+              <a:t>- Situer l'analyse des réseaux dans le champ de l'ethnographie numérique</a:t>
+            </a:r>
+          </a:p>
+          <a:p>
+            <a:pPr>
+              <a:spcAft>
+                <a:spcPts val="600"/>
+              </a:spcAft>
+              <a:defRPr sz="1400">
+                <a:solidFill>
+                  <a:srgbClr val="222222"/>
+                </a:solidFill>
+              </a:defRPr>
+            </a:pPr>
+            <a:r>
+              <a:t>• En termes de savoir-faire :- Utiliser un outil de visualisation de réseaux (Gephi, NodeXL) sur un petit corpus</a:t>
+            </a:r>
+            <a:br/>
+            <a:r>
+              <a:t>- Interpréter des mesures de centralité, densité, modularité</a:t>
+            </a:r>
+            <a:br/>
+            <a:r>
+              <a:t>- Cartographier un réseau de relations (Twitter, courriels, co-publications)</a:t>
+            </a:r>
+          </a:p>
+          <a:p>
+            <a:pPr>
+              <a:spcAft>
+                <a:spcPts val="600"/>
+              </a:spcAft>
+              <a:defRPr sz="1400">
+                <a:solidFill>
+                  <a:srgbClr val="222222"/>
+                </a:solidFill>
+              </a:defRPr>
+            </a:pPr>
+            <a:r>
+              <a:t>• En termes de savoir-être :- Réflexivité sur la position du chercheur dans le réseau observé</a:t>
+            </a:r>
+            <a:br/>
+            <a:r>
+              <a:t>- Éthique de la collecte de données relationnelles</a:t>
+            </a:r>
+          </a:p>
+          <a:p>
+            <a:pPr>
+              <a:spcAft>
+                <a:spcPts val="600"/>
+              </a:spcAft>
+              <a:defRPr sz="1400">
+                <a:solidFill>
+                  <a:srgbClr val="222222"/>
+                </a:solidFill>
+              </a:defRPr>
+            </a:pPr>
+            <a:r>
+              <a:t>• Mode d'évaluation :TD 25 % + Analyse de réseau (mini-mémoire graphique) 50 % + QCM 25 %</a:t>
+            </a:r>
+          </a:p>
+        </p:txBody>
+      </p:sp>
+    </p:spTree>
+  </p:cSld>
+  <p:clrMapOvr>
+    <a:masterClrMapping/>
+  </p:clrMapOvr>
+</p:sld>
+</file>
+
+<file path=ppt/slides/slide6.xml><?xml version="1.0" encoding="utf-8"?>
+<p:sld xmlns:a="http://schemas.openxmlformats.org/drawingml/2006/main" xmlns:p="http://schemas.openxmlformats.org/presentationml/2006/main" xmlns:r="http://schemas.openxmlformats.org/officeDocument/2006/relationships">
+  <p:cSld>
+    <p:bg>
+      <p:bgPr>
+        <a:solidFill>
+          <a:srgbClr val="FFFFFF"/>
+        </a:solidFill>
+        <a:effectLst/>
+      </p:bgPr>
+    </p:bg>
+    <p:spTree>
+      <p:nvGrpSpPr>
+        <p:cNvPr id="1" name=""/>
+        <p:cNvGrpSpPr/>
+        <p:nvPr/>
+      </p:nvGrpSpPr>
+      <p:grpSpPr/>
+      <p:sp>
+        <p:nvSpPr>
+          <p:cNvPr id="2" name="Rectangle 1"/>
+          <p:cNvSpPr/>
+          <p:nvPr/>
+        </p:nvSpPr>
+        <p:spPr>
+          <a:xfrm>
+            <a:off x="0" y="0"/>
+            <a:ext cx="109728" cy="6858000"/>
+          </a:xfrm>
+          <a:prstGeom prst="rect">
+            <a:avLst/>
+          </a:prstGeom>
+          <a:solidFill>
+            <a:srgbClr val="2C6E49"/>
+          </a:solidFill>
+          <a:ln>
+            <a:noFill/>
+          </a:ln>
+        </p:spPr>
+        <p:style>
+          <a:lnRef idx="1">
+            <a:schemeClr val="accent1"/>
+          </a:lnRef>
+          <a:fillRef idx="3">
+            <a:schemeClr val="accent1"/>
+          </a:fillRef>
+          <a:effectRef idx="2">
+            <a:schemeClr val="accent1"/>
+          </a:effectRef>
+          <a:fontRef idx="minor">
+            <a:schemeClr val="lt1"/>
+          </a:fontRef>
+        </p:style>
+        <p:txBody>
+          <a:bodyPr rtlCol="0" anchor="ctr"/>
+          <a:lstStyle/>
+          <a:p>
+            <a:pPr algn="ctr"/>
+          </a:p>
+        </p:txBody>
+      </p:sp>
+      <p:sp>
+        <p:nvSpPr>
+          <p:cNvPr id="3" name="TextBox 2"/>
+          <p:cNvSpPr txBox="1"/>
+          <p:nvPr/>
+        </p:nvSpPr>
+        <p:spPr>
+          <a:xfrm>
+            <a:off x="457200" y="365760"/>
+            <a:ext cx="8229600" cy="640080"/>
+          </a:xfrm>
+          <a:prstGeom prst="rect">
+            <a:avLst/>
+          </a:prstGeom>
+          <a:noFill/>
+        </p:spPr>
+        <p:txBody>
+          <a:bodyPr wrap="square">
+            <a:spAutoFit/>
+          </a:bodyPr>
+          <a:lstStyle/>
+          <a:p>
+            <a:pPr algn="l">
+              <a:defRPr sz="2200" b="1">
+                <a:solidFill>
+                  <a:srgbClr val="1A5C33"/>
+                </a:solidFill>
+              </a:defRPr>
+            </a:pPr>
+            <a:r>
+              <a:t>Activités d'apprentissage</a:t>
+            </a:r>
+          </a:p>
+        </p:txBody>
+      </p:sp>
+      <p:sp>
+        <p:nvSpPr>
+          <p:cNvPr id="4" name="TextBox 3"/>
+          <p:cNvSpPr txBox="1"/>
+          <p:nvPr/>
+        </p:nvSpPr>
+        <p:spPr>
+          <a:xfrm>
+            <a:off x="457200" y="1371600"/>
+            <a:ext cx="7772400" cy="4572000"/>
+          </a:xfrm>
+          <a:prstGeom prst="rect">
+            <a:avLst/>
+          </a:prstGeom>
+          <a:noFill/>
+        </p:spPr>
+        <p:txBody>
+          <a:bodyPr wrap="square">
+            <a:spAutoFit/>
+          </a:bodyPr>
+          <a:lstStyle/>
+          <a:p>
+            <a:pPr>
+              <a:spcAft>
+                <a:spcPts val="600"/>
+              </a:spcAft>
+              <a:defRPr sz="1400">
+                <a:solidFill>
+                  <a:srgbClr val="222222"/>
+                </a:solidFill>
+              </a:defRPr>
+            </a:pPr>
+            <a:r>
+              <a:t>• Cartographie d'un réseau : communauté WhatsApp d'étude ou réseau Twitter/X</a:t>
+            </a:r>
+          </a:p>
+          <a:p>
+            <a:pPr>
+              <a:spcAft>
+                <a:spcPts val="600"/>
+              </a:spcAft>
+              <a:defRPr sz="1400">
+                <a:solidFill>
+                  <a:srgbClr val="222222"/>
+                </a:solidFill>
+              </a:defRPr>
+            </a:pPr>
+            <a:r>
+              <a:t>• Lecture dirigée : Granovetter (1973) — « The Strength of Weak Ties »</a:t>
+            </a:r>
+          </a:p>
+        </p:txBody>
+      </p:sp>
+    </p:spTree>
+  </p:cSld>
+  <p:clrMapOvr>
+    <a:masterClrMapping/>
+  </p:clrMapOvr>
+</p:sld>
+</file>
+
+<file path=ppt/slides/slide7.xml><?xml version="1.0" encoding="utf-8"?>
+<p:sld xmlns:a="http://schemas.openxmlformats.org/drawingml/2006/main" xmlns:p="http://schemas.openxmlformats.org/presentationml/2006/main" xmlns:r="http://schemas.openxmlformats.org/officeDocument/2006/relationships">
+  <p:cSld>
+    <p:bg>
+      <p:bgPr>
+        <a:solidFill>
+          <a:srgbClr val="FFFFFF"/>
+        </a:solidFill>
+        <a:effectLst/>
+      </p:bgPr>
+    </p:bg>
+    <p:spTree>
+      <p:nvGrpSpPr>
+        <p:cNvPr id="1" name=""/>
+        <p:cNvGrpSpPr/>
+        <p:nvPr/>
+      </p:nvGrpSpPr>
+      <p:grpSpPr/>
+      <p:sp>
+        <p:nvSpPr>
+          <p:cNvPr id="2" name="Rectangle 1"/>
+          <p:cNvSpPr/>
+          <p:nvPr/>
+        </p:nvSpPr>
+        <p:spPr>
+          <a:xfrm>
+            <a:off x="0" y="0"/>
+            <a:ext cx="109728" cy="6858000"/>
+          </a:xfrm>
+          <a:prstGeom prst="rect">
+            <a:avLst/>
+          </a:prstGeom>
+          <a:solidFill>
+            <a:srgbClr val="2C6E49"/>
+          </a:solidFill>
+          <a:ln>
+            <a:noFill/>
+          </a:ln>
+        </p:spPr>
+        <p:style>
+          <a:lnRef idx="1">
+            <a:schemeClr val="accent1"/>
+          </a:lnRef>
+          <a:fillRef idx="3">
+            <a:schemeClr val="accent1"/>
+          </a:fillRef>
+          <a:effectRef idx="2">
+            <a:schemeClr val="accent1"/>
+          </a:effectRef>
+          <a:fontRef idx="minor">
+            <a:schemeClr val="lt1"/>
+          </a:fontRef>
+        </p:style>
+        <p:txBody>
+          <a:bodyPr rtlCol="0" anchor="ctr"/>
+          <a:lstStyle/>
+          <a:p>
+            <a:pPr algn="ctr"/>
+          </a:p>
+        </p:txBody>
+      </p:sp>
+      <p:sp>
+        <p:nvSpPr>
+          <p:cNvPr id="3" name="TextBox 2"/>
+          <p:cNvSpPr txBox="1"/>
+          <p:nvPr/>
+        </p:nvSpPr>
+        <p:spPr>
+          <a:xfrm>
+            <a:off x="457200" y="365760"/>
+            <a:ext cx="8229600" cy="640080"/>
+          </a:xfrm>
+          <a:prstGeom prst="rect">
+            <a:avLst/>
+          </a:prstGeom>
+          <a:noFill/>
+        </p:spPr>
+        <p:txBody>
+          <a:bodyPr wrap="square">
+            <a:spAutoFit/>
+          </a:bodyPr>
+          <a:lstStyle/>
+          <a:p>
+            <a:pPr algn="l">
+              <a:defRPr sz="2200" b="1">
+                <a:solidFill>
+                  <a:srgbClr val="1A5C33"/>
+                </a:solidFill>
+              </a:defRPr>
+            </a:pPr>
+            <a:r>
+              <a:t>Activités d'évaluation</a:t>
+            </a:r>
+          </a:p>
+        </p:txBody>
+      </p:sp>
+      <p:sp>
+        <p:nvSpPr>
+          <p:cNvPr id="4" name="TextBox 3"/>
+          <p:cNvSpPr txBox="1"/>
+          <p:nvPr/>
+        </p:nvSpPr>
+        <p:spPr>
+          <a:xfrm>
+            <a:off x="457200" y="1371600"/>
+            <a:ext cx="7772400" cy="4572000"/>
+          </a:xfrm>
+          <a:prstGeom prst="rect">
+            <a:avLst/>
+          </a:prstGeom>
+          <a:noFill/>
+        </p:spPr>
+        <p:txBody>
+          <a:bodyPr wrap="square">
+            <a:spAutoFit/>
+          </a:bodyPr>
+          <a:lstStyle/>
+          <a:p>
+            <a:pPr>
+              <a:spcAft>
+                <a:spcPts val="600"/>
+              </a:spcAft>
+              <a:defRPr sz="1400">
+                <a:solidFill>
+                  <a:srgbClr val="222222"/>
+                </a:solidFill>
+              </a:defRPr>
+            </a:pPr>
+            <a:r>
+              <a:t>• Rapport d'analyse de réseau (5 pages incluant visualisation)</a:t>
+            </a:r>
+          </a:p>
+          <a:p>
+            <a:pPr>
+              <a:spcAft>
+                <a:spcPts val="600"/>
+              </a:spcAft>
+              <a:defRPr sz="1400">
+                <a:solidFill>
+                  <a:srgbClr val="222222"/>
+                </a:solidFill>
+              </a:defRPr>
+            </a:pPr>
+            <a:r>
+              <a:t>• QCM réseaux, topologies, SNA</a:t>
+            </a:r>
+          </a:p>
+        </p:txBody>
+      </p:sp>
+    </p:spTree>
+  </p:cSld>
+  <p:clrMapOvr>
+    <a:masterClrMapping/>
+  </p:clrMapOvr>
+</p:sld>
+</file>
+
+<file path=ppt/slides/slide8.xml><?xml version="1.0" encoding="utf-8"?>
+<p:sld xmlns:a="http://schemas.openxmlformats.org/drawingml/2006/main" xmlns:p="http://schemas.openxmlformats.org/presentationml/2006/main" xmlns:r="http://schemas.openxmlformats.org/officeDocument/2006/relationships">
+  <p:cSld>
+    <p:bg>
+      <p:bgPr>
+        <a:solidFill>
+          <a:srgbClr val="FFFFFF"/>
+        </a:solidFill>
+        <a:effectLst/>
+      </p:bgPr>
+    </p:bg>
+    <p:spTree>
+      <p:nvGrpSpPr>
+        <p:cNvPr id="1" name=""/>
+        <p:cNvGrpSpPr/>
+        <p:nvPr/>
+      </p:nvGrpSpPr>
+      <p:grpSpPr/>
+      <p:sp>
+        <p:nvSpPr>
+          <p:cNvPr id="2" name="Rectangle 1"/>
+          <p:cNvSpPr/>
+          <p:nvPr/>
+        </p:nvSpPr>
+        <p:spPr>
+          <a:xfrm>
+            <a:off x="0" y="0"/>
+            <a:ext cx="109728" cy="6858000"/>
+          </a:xfrm>
+          <a:prstGeom prst="rect">
+            <a:avLst/>
+          </a:prstGeom>
+          <a:solidFill>
+            <a:srgbClr val="2C6E49"/>
+          </a:solidFill>
+          <a:ln>
+            <a:noFill/>
+          </a:ln>
+        </p:spPr>
+        <p:style>
+          <a:lnRef idx="1">
+            <a:schemeClr val="accent1"/>
+          </a:lnRef>
+          <a:fillRef idx="3">
+            <a:schemeClr val="accent1"/>
+          </a:fillRef>
+          <a:effectRef idx="2">
+            <a:schemeClr val="accent1"/>
+          </a:effectRef>
+          <a:fontRef idx="minor">
+            <a:schemeClr val="lt1"/>
+          </a:fontRef>
+        </p:style>
+        <p:txBody>
+          <a:bodyPr rtlCol="0" anchor="ctr"/>
+          <a:lstStyle/>
+          <a:p>
+            <a:pPr algn="ctr"/>
+          </a:p>
+        </p:txBody>
+      </p:sp>
+      <p:sp>
+        <p:nvSpPr>
+          <p:cNvPr id="3" name="TextBox 2"/>
+          <p:cNvSpPr txBox="1"/>
+          <p:nvPr/>
+        </p:nvSpPr>
+        <p:spPr>
+          <a:xfrm>
+            <a:off x="457200" y="365760"/>
+            <a:ext cx="8229600" cy="640080"/>
+          </a:xfrm>
+          <a:prstGeom prst="rect">
+            <a:avLst/>
+          </a:prstGeom>
+          <a:noFill/>
+        </p:spPr>
+        <p:txBody>
+          <a:bodyPr wrap="square">
+            <a:spAutoFit/>
+          </a:bodyPr>
+          <a:lstStyle/>
+          <a:p>
+            <a:pPr algn="l">
+              <a:defRPr sz="2200" b="1">
+                <a:solidFill>
+                  <a:srgbClr val="1A5C33"/>
+                </a:solidFill>
+              </a:defRPr>
+            </a:pPr>
+            <a:r>
+              <a:t>Bibliographie et ressources externes</a:t>
+            </a:r>
+          </a:p>
+        </p:txBody>
+      </p:sp>
+      <p:sp>
+        <p:nvSpPr>
+          <p:cNvPr id="4" name="TextBox 3"/>
+          <p:cNvSpPr txBox="1"/>
+          <p:nvPr/>
+        </p:nvSpPr>
+        <p:spPr>
+          <a:xfrm>
+            <a:off x="457200" y="1371600"/>
+            <a:ext cx="7772400" cy="4572000"/>
+          </a:xfrm>
+          <a:prstGeom prst="rect">
+            <a:avLst/>
+          </a:prstGeom>
+          <a:noFill/>
+        </p:spPr>
+        <p:txBody>
+          <a:bodyPr wrap="square">
+            <a:spAutoFit/>
+          </a:bodyPr>
+          <a:lstStyle/>
+          <a:p>
+            <a:pPr>
+              <a:spcAft>
+                <a:spcPts val="600"/>
+              </a:spcAft>
+              <a:defRPr sz="1400">
+                <a:solidFill>
+                  <a:srgbClr val="222222"/>
+                </a:solidFill>
+              </a:defRPr>
+            </a:pPr>
+            <a:r>
+              <a:t>• Granovetter, M. (1973). « The Strength of Weak Ties ».American Journal of Sociology, 78(6), 1360–1380.</a:t>
+            </a:r>
+          </a:p>
+          <a:p>
+            <a:pPr>
+              <a:spcAft>
+                <a:spcPts val="600"/>
+              </a:spcAft>
+              <a:defRPr sz="1400">
+                <a:solidFill>
+                  <a:srgbClr val="222222"/>
+                </a:solidFill>
+              </a:defRPr>
+            </a:pPr>
+            <a:r>
+              <a:t>• Milroy, L. (1980).Language and Social Networks. Blackwell.</a:t>
+            </a:r>
+          </a:p>
+          <a:p>
+            <a:pPr>
+              <a:spcAft>
+                <a:spcPts val="600"/>
+              </a:spcAft>
+              <a:defRPr sz="1400">
+                <a:solidFill>
+                  <a:srgbClr val="222222"/>
+                </a:solidFill>
+              </a:defRPr>
+            </a:pPr>
+            <a:r>
+              <a:t>• Barabási, A.-L. (2016).Network Science. Cambridge University Press.</a:t>
+            </a:r>
+          </a:p>
+          <a:p>
+            <a:pPr>
+              <a:spcAft>
+                <a:spcPts val="600"/>
+              </a:spcAft>
+              <a:defRPr sz="1400">
+                <a:solidFill>
+                  <a:srgbClr val="222222"/>
+                </a:solidFill>
+              </a:defRPr>
+            </a:pPr>
+            <a:r>
+              <a:t>• Latour, B. (2005).Reassembling the Social: An Introduction to Actor-Network-Theory. Oxford University Press.</a:t>
+            </a:r>
+          </a:p>
+          <a:p>
+            <a:pPr>
+              <a:spcAft>
+                <a:spcPts val="600"/>
+              </a:spcAft>
+              <a:defRPr sz="1400">
+                <a:solidFill>
+                  <a:srgbClr val="222222"/>
+                </a:solidFill>
+              </a:defRPr>
+            </a:pPr>
+            <a:r>
+              <a:t>• Kurose, J., &amp; Ross, K. (2020).Computer Networking: A Top-Down Approach(8th ed.). Pearson.</a:t>
+            </a:r>
+          </a:p>
+          <a:p>
+            <a:pPr>
+              <a:spcAft>
+                <a:spcPts val="600"/>
+              </a:spcAft>
+              <a:defRPr sz="1400">
+                <a:solidFill>
+                  <a:srgbClr val="222222"/>
+                </a:solidFill>
+              </a:defRPr>
+            </a:pPr>
+            <a:r>
+              <a:t>• Contact enseignant :BELACEL Madani —madani.belacel@univ-mosta.dz</a:t>
+            </a:r>
+          </a:p>
+        </p:txBody>
+      </p:sp>
+    </p:spTree>
+  </p:cSld>
+  <p:clrMapOvr>
+    <a:masterClrMapping/>
+  </p:clrMapOvr>
+</p:sld>
+</file>
+
+<file path=ppt/slides/slide9.xml><?xml version="1.0" encoding="utf-8"?>
+<p:sld xmlns:a="http://schemas.openxmlformats.org/drawingml/2006/main" xmlns:p="http://schemas.openxmlformats.org/presentationml/2006/main" xmlns:r="http://schemas.openxmlformats.org/officeDocument/2006/relationships">
+  <p:cSld>
+    <p:bg>
+      <p:bgPr>
+        <a:solidFill>
+          <a:srgbClr val="FFFFFF"/>
+        </a:solidFill>
+        <a:effectLst/>
+      </p:bgPr>
+    </p:bg>
+    <p:spTree>
+      <p:nvGrpSpPr>
+        <p:cNvPr id="1" name=""/>
+        <p:cNvGrpSpPr/>
+        <p:nvPr/>
+      </p:nvGrpSpPr>
+      <p:grpSpPr/>
+      <p:sp>
+        <p:nvSpPr>
+          <p:cNvPr id="2" name="Rectangle 1"/>
+          <p:cNvSpPr/>
+          <p:nvPr/>
+        </p:nvSpPr>
+        <p:spPr>
+          <a:xfrm>
+            <a:off x="0" y="0"/>
+            <a:ext cx="109728" cy="6858000"/>
+          </a:xfrm>
+          <a:prstGeom prst="rect">
+            <a:avLst/>
+          </a:prstGeom>
+          <a:solidFill>
+            <a:srgbClr val="2C6E49"/>
+          </a:solidFill>
+          <a:ln>
+            <a:noFill/>
+          </a:ln>
+        </p:spPr>
+        <p:style>
+          <a:lnRef idx="1">
+            <a:schemeClr val="accent1"/>
+          </a:lnRef>
+          <a:fillRef idx="3">
+            <a:schemeClr val="accent1"/>
+          </a:fillRef>
+          <a:effectRef idx="2">
+            <a:schemeClr val="accent1"/>
+          </a:effectRef>
+          <a:fontRef idx="minor">
+            <a:schemeClr val="lt1"/>
+          </a:fontRef>
+        </p:style>
+        <p:txBody>
+          <a:bodyPr rtlCol="0" anchor="ctr"/>
+          <a:lstStyle/>
+          <a:p>
+            <a:pPr algn="ctr"/>
+          </a:p>
+        </p:txBody>
+      </p:sp>
+      <p:sp>
+        <p:nvSpPr>
+          <p:cNvPr id="3" name="TextBox 2"/>
+          <p:cNvSpPr txBox="1"/>
+          <p:nvPr/>
+        </p:nvSpPr>
+        <p:spPr>
+          <a:xfrm>
+            <a:off x="457200" y="365760"/>
+            <a:ext cx="8229600" cy="640080"/>
+          </a:xfrm>
+          <a:prstGeom prst="rect">
+            <a:avLst/>
+          </a:prstGeom>
+          <a:noFill/>
+        </p:spPr>
+        <p:txBody>
+          <a:bodyPr wrap="square">
+            <a:spAutoFit/>
+          </a:bodyPr>
+          <a:lstStyle/>
+          <a:p>
+            <a:pPr algn="l">
+              <a:defRPr sz="2200" b="1">
+                <a:solidFill>
+                  <a:srgbClr val="1A5C33"/>
+                </a:solidFill>
+              </a:defRPr>
+            </a:pPr>
+            <a:r>
+              <a:t>Contexte réglementaire algérien</a:t>
+            </a:r>
+          </a:p>
+        </p:txBody>
+      </p:sp>
+      <p:sp>
+        <p:nvSpPr>
+          <p:cNvPr id="4" name="TextBox 3"/>
+          <p:cNvSpPr txBox="1"/>
+          <p:nvPr/>
+        </p:nvSpPr>
+        <p:spPr>
+          <a:xfrm>
+            <a:off x="457200" y="1371600"/>
+            <a:ext cx="7772400" cy="4572000"/>
+          </a:xfrm>
+          <a:prstGeom prst="rect">
+            <a:avLst/>
+          </a:prstGeom>
+          <a:noFill/>
+        </p:spPr>
+        <p:txBody>
+          <a:bodyPr wrap="square">
+            <a:spAutoFit/>
+          </a:bodyPr>
+          <a:lstStyle/>
+          <a:p>
+            <a:pPr>
+              <a:spcAft>
+                <a:spcPts val="600"/>
+              </a:spcAft>
+              <a:defRPr sz="1400">
+                <a:solidFill>
+                  <a:srgbClr val="222222"/>
+                </a:solidFill>
+              </a:defRPr>
+            </a:pPr>
+            <a:r>
+              <a:t>• Arrêté 933 (2016): Le Master Langue et Culture inclut l'étude des réseaux comme objet social et communicationnel.Arrêté 129 (2019): Recommandation d'intégrer les méthodes numériques (dont l'analyse de réseaux) dans les travaux de Master.</a:t>
+            </a:r>
+          </a:p>
+          <a:p>
+            <a:pPr>
+              <a:spcAft>
+                <a:spcPts val="600"/>
+              </a:spcAft>
+              <a:defRPr sz="1400">
+                <a:solidFill>
+                  <a:srgbClr val="222222"/>
+                </a:solidFill>
+              </a:defRPr>
+            </a:pPr>
+            <a:r>
+              <a:t>• Contexte algérien: Les communautés linguistiques en Algérie (arabophones, francophones, berbérophones) sont structurées en réseaux complexes. L'étude de ces réseaux (en ligne et hors ligne) éclaire les dynamiques de diglossie et de changement linguistique. Laloi 08-15 (2008)encadre la collecte de données personnelles, y compris dans les réseaux sociaux.</a:t>
+            </a:r>
+          </a:p>
+        </p:txBody>
+      </p:sp>
+    </p:spTree>
+  </p:cSld>
+  <p:clrMapOvr>
+    <a:masterClrMapping/>
+  </p:clrMapOvr>
 </p:sld>
 </file>
 
@@ -4975,319 +6076,4 @@
   </a:objectDefaults>
   <a:extraClrSchemeLst/>
 </a:theme>
-</file>
-
-<file path=ppt/theme/theme2.xml><?xml version="1.0" encoding="utf-8"?>
-<a:theme xmlns:a="http://schemas.openxmlformats.org/drawingml/2006/main" name="Thème Office">
-  <a:themeElements>
-    <a:clrScheme name="Office">
-      <a:dk1>
-        <a:sysClr val="windowText" lastClr="000000"/>
-      </a:dk1>
-      <a:lt1>
-        <a:sysClr val="window" lastClr="FFFFFF"/>
-      </a:lt1>
-      <a:dk2>
-        <a:srgbClr val="0E2841"/>
-      </a:dk2>
-      <a:lt2>
-        <a:srgbClr val="E8E8E8"/>
-      </a:lt2>
-      <a:accent1>
-        <a:srgbClr val="156082"/>
-      </a:accent1>
-      <a:accent2>
-        <a:srgbClr val="E97132"/>
-      </a:accent2>
-      <a:accent3>
-        <a:srgbClr val="196B24"/>
-      </a:accent3>
-      <a:accent4>
-        <a:srgbClr val="0F9ED5"/>
-      </a:accent4>
-      <a:accent5>
-        <a:srgbClr val="A02B93"/>
-      </a:accent5>
-      <a:accent6>
-        <a:srgbClr val="4EA72E"/>
-      </a:accent6>
-      <a:hlink>
-        <a:srgbClr val="467886"/>
-      </a:hlink>
-      <a:folHlink>
-        <a:srgbClr val="96607D"/>
-      </a:folHlink>
-    </a:clrScheme>
-    <a:fontScheme name="Office">
-      <a:majorFont>
-        <a:latin typeface="Aptos Display" panose="02110004020202020204"/>
-        <a:ea typeface=""/>
-        <a:cs typeface=""/>
-        <a:font script="Jpan" typeface="游ゴシック Light"/>
-        <a:font script="Hang" typeface="맑은 고딕"/>
-        <a:font script="Hans" typeface="等线 Light"/>
-        <a:font script="Hant" typeface="新細明體"/>
-        <a:font script="Arab" typeface="Times New Roman"/>
-        <a:font script="Hebr" typeface="Times New Roman"/>
-        <a:font script="Thai" typeface="Angsana New"/>
-        <a:font script="Ethi" typeface="Nyala"/>
-        <a:font script="Beng" typeface="Vrinda"/>
-        <a:font script="Gujr" typeface="Shruti"/>
-        <a:font script="Khmr" typeface="MoolBoran"/>
-        <a:font script="Knda" typeface="Tunga"/>
-        <a:font script="Guru" typeface="Raavi"/>
-        <a:font script="Cans" typeface="Euphemia"/>
-        <a:font script="Cher" typeface="Plantagenet Cherokee"/>
-        <a:font script="Yiii" typeface="Microsoft Yi Baiti"/>
-        <a:font script="Tibt" typeface="Microsoft Himalaya"/>
-        <a:font script="Thaa" typeface="MV Boli"/>
-        <a:font script="Deva" typeface="Mangal"/>
-        <a:font script="Telu" typeface="Gautami"/>
-        <a:font script="Taml" typeface="Latha"/>
-        <a:font script="Syrc" typeface="Estrangelo Edessa"/>
-        <a:font script="Orya" typeface="Kalinga"/>
-        <a:font script="Mlym" typeface="Kartika"/>
-        <a:font script="Laoo" typeface="DokChampa"/>
-        <a:font script="Sinh" typeface="Iskoola Pota"/>
-        <a:font script="Mong" typeface="Mongolian Baiti"/>
-        <a:font script="Viet" typeface="Times New Roman"/>
-        <a:font script="Uigh" typeface="Microsoft Uighur"/>
-        <a:font script="Geor" typeface="Sylfaen"/>
-        <a:font script="Armn" typeface="Arial"/>
-        <a:font script="Bugi" typeface="Leelawadee UI"/>
-        <a:font script="Bopo" typeface="Microsoft JhengHei"/>
-        <a:font script="Java" typeface="Javanese Text"/>
-        <a:font script="Lisu" typeface="Segoe UI"/>
-        <a:font script="Mymr" typeface="Myanmar Text"/>
-        <a:font script="Nkoo" typeface="Ebrima"/>
-        <a:font script="Olck" typeface="Nirmala UI"/>
-        <a:font script="Osma" typeface="Ebrima"/>
-        <a:font script="Phag" typeface="Phagspa"/>
-        <a:font script="Syrn" typeface="Estrangelo Edessa"/>
-        <a:font script="Syrj" typeface="Estrangelo Edessa"/>
-        <a:font script="Syre" typeface="Estrangelo Edessa"/>
-        <a:font script="Sora" typeface="Nirmala UI"/>
-        <a:font script="Tale" typeface="Microsoft Tai Le"/>
-        <a:font script="Talu" typeface="Microsoft New Tai Lue"/>
-        <a:font script="Tfng" typeface="Ebrima"/>
-      </a:majorFont>
-      <a:minorFont>
-        <a:latin typeface="Aptos" panose="02110004020202020204"/>
-        <a:ea typeface=""/>
-        <a:cs typeface=""/>
-        <a:font script="Jpan" typeface="游ゴシック"/>
-        <a:font script="Hang" typeface="맑은 고딕"/>
-        <a:font script="Hans" typeface="等线"/>
-        <a:font script="Hant" typeface="新細明體"/>
-        <a:font script="Arab" typeface="Arial"/>
-        <a:font script="Hebr" typeface="Arial"/>
-        <a:font script="Thai" typeface="Cordia New"/>
-        <a:font script="Ethi" typeface="Nyala"/>
-        <a:font script="Beng" typeface="Vrinda"/>
-        <a:font script="Gujr" typeface="Shruti"/>
-        <a:font script="Khmr" typeface="DaunPenh"/>
-        <a:font script="Knda" typeface="Tunga"/>
-        <a:font script="Guru" typeface="Raavi"/>
-        <a:font script="Cans" typeface="Euphemia"/>
-        <a:font script="Cher" typeface="Plantagenet Cherokee"/>
-        <a:font script="Yiii" typeface="Microsoft Yi Baiti"/>
-        <a:font script="Tibt" typeface="Microsoft Himalaya"/>
-        <a:font script="Thaa" typeface="MV Boli"/>
-        <a:font script="Deva" typeface="Mangal"/>
-        <a:font script="Telu" typeface="Gautami"/>
-        <a:font script="Taml" typeface="Latha"/>
-        <a:font script="Syrc" typeface="Estrangelo Edessa"/>
-        <a:font script="Orya" typeface="Kalinga"/>
-        <a:font script="Mlym" typeface="Kartika"/>
-        <a:font script="Laoo" typeface="DokChampa"/>
-        <a:font script="Sinh" typeface="Iskoola Pota"/>
-        <a:font script="Mong" typeface="Mongolian Baiti"/>
-        <a:font script="Viet" typeface="Arial"/>
-        <a:font script="Uigh" typeface="Microsoft Uighur"/>
-        <a:font script="Geor" typeface="Sylfaen"/>
-        <a:font script="Armn" typeface="Arial"/>
-        <a:font script="Bugi" typeface="Leelawadee UI"/>
-        <a:font script="Bopo" typeface="Microsoft JhengHei"/>
-        <a:font script="Java" typeface="Javanese Text"/>
-        <a:font script="Lisu" typeface="Segoe UI"/>
-        <a:font script="Mymr" typeface="Myanmar Text"/>
-        <a:font script="Nkoo" typeface="Ebrima"/>
-        <a:font script="Olck" typeface="Nirmala UI"/>
-        <a:font script="Osma" typeface="Ebrima"/>
-        <a:font script="Phag" typeface="Phagspa"/>
-        <a:font script="Syrn" typeface="Estrangelo Edessa"/>
-        <a:font script="Syrj" typeface="Estrangelo Edessa"/>
-        <a:font script="Syre" typeface="Estrangelo Edessa"/>
-        <a:font script="Sora" typeface="Nirmala UI"/>
-        <a:font script="Tale" typeface="Microsoft Tai Le"/>
-        <a:font script="Talu" typeface="Microsoft New Tai Lue"/>
-        <a:font script="Tfng" typeface="Ebrima"/>
-      </a:minorFont>
-    </a:fontScheme>
-    <a:fmtScheme name="Office">
-      <a:fillStyleLst>
-        <a:solidFill>
-          <a:schemeClr val="phClr"/>
-        </a:solidFill>
-        <a:gradFill rotWithShape="1">
-          <a:gsLst>
-            <a:gs pos="0">
-              <a:schemeClr val="phClr">
-                <a:lumMod val="110000"/>
-                <a:satMod val="105000"/>
-                <a:tint val="67000"/>
-              </a:schemeClr>
-            </a:gs>
-            <a:gs pos="50000">
-              <a:schemeClr val="phClr">
-                <a:lumMod val="105000"/>
-                <a:satMod val="103000"/>
-                <a:tint val="73000"/>
-              </a:schemeClr>
-            </a:gs>
-            <a:gs pos="100000">
-              <a:schemeClr val="phClr">
-                <a:lumMod val="105000"/>
-                <a:satMod val="109000"/>
-                <a:tint val="81000"/>
-              </a:schemeClr>
-            </a:gs>
-          </a:gsLst>
-          <a:lin ang="5400000" scaled="0"/>
-        </a:gradFill>
-        <a:gradFill rotWithShape="1">
-          <a:gsLst>
-            <a:gs pos="0">
-              <a:schemeClr val="phClr">
-                <a:satMod val="103000"/>
-                <a:lumMod val="102000"/>
-                <a:tint val="94000"/>
-              </a:schemeClr>
-            </a:gs>
-            <a:gs pos="50000">
-              <a:schemeClr val="phClr">
-                <a:satMod val="110000"/>
-                <a:lumMod val="100000"/>
-                <a:shade val="100000"/>
-              </a:schemeClr>
-            </a:gs>
-            <a:gs pos="100000">
-              <a:schemeClr val="phClr">
-                <a:lumMod val="99000"/>
-                <a:satMod val="120000"/>
-                <a:shade val="78000"/>
-              </a:schemeClr>
-            </a:gs>
-          </a:gsLst>
-          <a:lin ang="5400000" scaled="0"/>
-        </a:gradFill>
-      </a:fillStyleLst>
-      <a:lnStyleLst>
-        <a:ln w="12700" cap="flat" cmpd="sng" algn="ctr">
-          <a:solidFill>
-            <a:schemeClr val="phClr"/>
-          </a:solidFill>
-          <a:prstDash val="solid"/>
-          <a:miter lim="800000"/>
-        </a:ln>
-        <a:ln w="19050" cap="flat" cmpd="sng" algn="ctr">
-          <a:solidFill>
-            <a:schemeClr val="phClr"/>
-          </a:solidFill>
-          <a:prstDash val="solid"/>
-          <a:miter lim="800000"/>
-        </a:ln>
-        <a:ln w="25400" cap="flat" cmpd="sng" algn="ctr">
-          <a:solidFill>
-            <a:schemeClr val="phClr"/>
-          </a:solidFill>
-          <a:prstDash val="solid"/>
-          <a:miter lim="800000"/>
-        </a:ln>
-      </a:lnStyleLst>
-      <a:effectStyleLst>
-        <a:effectStyle>
-          <a:effectLst/>
-        </a:effectStyle>
-        <a:effectStyle>
-          <a:effectLst/>
-        </a:effectStyle>
-        <a:effectStyle>
-          <a:effectLst>
-            <a:outerShdw blurRad="57150" dist="19050" dir="5400000" algn="ctr" rotWithShape="0">
-              <a:srgbClr val="000000">
-                <a:alpha val="63000"/>
-              </a:srgbClr>
-            </a:outerShdw>
-          </a:effectLst>
-        </a:effectStyle>
-      </a:effectStyleLst>
-      <a:bgFillStyleLst>
-        <a:solidFill>
-          <a:schemeClr val="phClr"/>
-        </a:solidFill>
-        <a:solidFill>
-          <a:schemeClr val="phClr">
-            <a:tint val="95000"/>
-            <a:satMod val="170000"/>
-          </a:schemeClr>
-        </a:solidFill>
-        <a:gradFill rotWithShape="1">
-          <a:gsLst>
-            <a:gs pos="0">
-              <a:schemeClr val="phClr">
-                <a:tint val="93000"/>
-                <a:satMod val="150000"/>
-                <a:shade val="98000"/>
-                <a:lumMod val="102000"/>
-              </a:schemeClr>
-            </a:gs>
-            <a:gs pos="50000">
-              <a:schemeClr val="phClr">
-                <a:tint val="98000"/>
-                <a:satMod val="130000"/>
-                <a:shade val="90000"/>
-                <a:lumMod val="103000"/>
-              </a:schemeClr>
-            </a:gs>
-            <a:gs pos="100000">
-              <a:schemeClr val="phClr">
-                <a:shade val="63000"/>
-                <a:satMod val="120000"/>
-              </a:schemeClr>
-            </a:gs>
-          </a:gsLst>
-          <a:lin ang="5400000" scaled="0"/>
-        </a:gradFill>
-      </a:bgFillStyleLst>
-    </a:fmtScheme>
-  </a:themeElements>
-  <a:objectDefaults>
-    <a:lnDef>
-      <a:spPr/>
-      <a:bodyPr/>
-      <a:lstStyle/>
-      <a:style>
-        <a:lnRef idx="2">
-          <a:schemeClr val="accent1"/>
-        </a:lnRef>
-        <a:fillRef idx="0">
-          <a:schemeClr val="accent1"/>
-        </a:fillRef>
-        <a:effectRef idx="1">
-          <a:schemeClr val="accent1"/>
-        </a:effectRef>
-        <a:fontRef idx="minor">
-          <a:schemeClr val="tx1"/>
-        </a:fontRef>
-      </a:style>
-    </a:lnDef>
-  </a:objectDefaults>
-  <a:extraClrSchemeLst/>
-  <a:extLst>
-    <a:ext uri="{05A4C25C-085E-4340-85A3-A5531E510DB2}">
-      <thm15:themeFamily xmlns:thm15="http://schemas.microsoft.com/office/thememl/2012/main" name="Office Theme" id="{2E142A2C-CD16-42D6-873A-C26D2A0506FA}" vid="{1BDDFF52-6CD6-40A5-AB3C-68EB2F1E4D0A}"/>
-    </a:ext>
-  </a:extLst>
-</a:theme>
 </file>
--- a/cours/Module TIC/Département Français/Master 1 - Langue et Culture/Cours_TIC_09_Reseaux_Informatiques_FR.pptx
+++ b/cours/Module TIC/Département Français/Master 1 - Langue et Culture/Cours_TIC_09_Reseaux_Informatiques_FR.pptx
@@ -2850,7 +2850,7 @@
           <a:solidFill>
             <a:schemeClr val="tx1"/>
           </a:solidFill>
-          <a:latin typeface="+mj-lt"/>
+          <a:latin typeface="Poppins"/>
           <a:ea typeface="+mj-ea"/>
           <a:cs typeface="+mj-cs"/>
         </a:defRPr>
@@ -2867,7 +2867,7 @@
           <a:solidFill>
             <a:schemeClr val="tx1"/>
           </a:solidFill>
-          <a:latin typeface="+mn-lt"/>
+          <a:latin typeface="Poppins"/>
           <a:ea typeface="+mn-ea"/>
           <a:cs typeface="+mn-cs"/>
         </a:defRPr>
@@ -2882,7 +2882,7 @@
           <a:solidFill>
             <a:schemeClr val="tx1"/>
           </a:solidFill>
-          <a:latin typeface="+mn-lt"/>
+          <a:latin typeface="Poppins"/>
           <a:ea typeface="+mn-ea"/>
           <a:cs typeface="+mn-cs"/>
         </a:defRPr>
@@ -2897,7 +2897,7 @@
           <a:solidFill>
             <a:schemeClr val="tx1"/>
           </a:solidFill>
-          <a:latin typeface="+mn-lt"/>
+          <a:latin typeface="Poppins"/>
           <a:ea typeface="+mn-ea"/>
           <a:cs typeface="+mn-cs"/>
         </a:defRPr>
@@ -2912,7 +2912,7 @@
           <a:solidFill>
             <a:schemeClr val="tx1"/>
           </a:solidFill>
-          <a:latin typeface="+mn-lt"/>
+          <a:latin typeface="Poppins"/>
           <a:ea typeface="+mn-ea"/>
           <a:cs typeface="+mn-cs"/>
         </a:defRPr>
@@ -2927,7 +2927,7 @@
           <a:solidFill>
             <a:schemeClr val="tx1"/>
           </a:solidFill>
-          <a:latin typeface="+mn-lt"/>
+          <a:latin typeface="Poppins"/>
           <a:ea typeface="+mn-ea"/>
           <a:cs typeface="+mn-cs"/>
         </a:defRPr>
@@ -2942,7 +2942,7 @@
           <a:solidFill>
             <a:schemeClr val="tx1"/>
           </a:solidFill>
-          <a:latin typeface="+mn-lt"/>
+          <a:latin typeface="Poppins"/>
           <a:ea typeface="+mn-ea"/>
           <a:cs typeface="+mn-cs"/>
         </a:defRPr>
@@ -2957,7 +2957,7 @@
           <a:solidFill>
             <a:schemeClr val="tx1"/>
           </a:solidFill>
-          <a:latin typeface="+mn-lt"/>
+          <a:latin typeface="Poppins"/>
           <a:ea typeface="+mn-ea"/>
           <a:cs typeface="+mn-cs"/>
         </a:defRPr>
@@ -2972,7 +2972,7 @@
           <a:solidFill>
             <a:schemeClr val="tx1"/>
           </a:solidFill>
-          <a:latin typeface="+mn-lt"/>
+          <a:latin typeface="Poppins"/>
           <a:ea typeface="+mn-ea"/>
           <a:cs typeface="+mn-cs"/>
         </a:defRPr>
@@ -2987,7 +2987,7 @@
           <a:solidFill>
             <a:schemeClr val="tx1"/>
           </a:solidFill>
-          <a:latin typeface="+mn-lt"/>
+          <a:latin typeface="Poppins"/>
           <a:ea typeface="+mn-ea"/>
           <a:cs typeface="+mn-cs"/>
         </a:defRPr>
@@ -3002,7 +3002,7 @@
           <a:solidFill>
             <a:schemeClr val="tx1"/>
           </a:solidFill>
-          <a:latin typeface="+mn-lt"/>
+          <a:latin typeface="Poppins"/>
           <a:ea typeface="+mn-ea"/>
           <a:cs typeface="+mn-cs"/>
         </a:defRPr>
@@ -3012,7 +3012,7 @@
           <a:solidFill>
             <a:schemeClr val="tx1"/>
           </a:solidFill>
-          <a:latin typeface="+mn-lt"/>
+          <a:latin typeface="Poppins"/>
           <a:ea typeface="+mn-ea"/>
           <a:cs typeface="+mn-cs"/>
         </a:defRPr>
@@ -3022,7 +3022,7 @@
           <a:solidFill>
             <a:schemeClr val="tx1"/>
           </a:solidFill>
-          <a:latin typeface="+mn-lt"/>
+          <a:latin typeface="Poppins"/>
           <a:ea typeface="+mn-ea"/>
           <a:cs typeface="+mn-cs"/>
         </a:defRPr>
@@ -3032,7 +3032,7 @@
           <a:solidFill>
             <a:schemeClr val="tx1"/>
           </a:solidFill>
-          <a:latin typeface="+mn-lt"/>
+          <a:latin typeface="Poppins"/>
           <a:ea typeface="+mn-ea"/>
           <a:cs typeface="+mn-cs"/>
         </a:defRPr>
@@ -3042,7 +3042,7 @@
           <a:solidFill>
             <a:schemeClr val="tx1"/>
           </a:solidFill>
-          <a:latin typeface="+mn-lt"/>
+          <a:latin typeface="Poppins"/>
           <a:ea typeface="+mn-ea"/>
           <a:cs typeface="+mn-cs"/>
         </a:defRPr>
@@ -3052,7 +3052,7 @@
           <a:solidFill>
             <a:schemeClr val="tx1"/>
           </a:solidFill>
-          <a:latin typeface="+mn-lt"/>
+          <a:latin typeface="Poppins"/>
           <a:ea typeface="+mn-ea"/>
           <a:cs typeface="+mn-cs"/>
         </a:defRPr>
@@ -3062,7 +3062,7 @@
           <a:solidFill>
             <a:schemeClr val="tx1"/>
           </a:solidFill>
-          <a:latin typeface="+mn-lt"/>
+          <a:latin typeface="Poppins"/>
           <a:ea typeface="+mn-ea"/>
           <a:cs typeface="+mn-cs"/>
         </a:defRPr>
@@ -3072,7 +3072,7 @@
           <a:solidFill>
             <a:schemeClr val="tx1"/>
           </a:solidFill>
-          <a:latin typeface="+mn-lt"/>
+          <a:latin typeface="Poppins"/>
           <a:ea typeface="+mn-ea"/>
           <a:cs typeface="+mn-cs"/>
         </a:defRPr>
@@ -3082,7 +3082,7 @@
           <a:solidFill>
             <a:schemeClr val="tx1"/>
           </a:solidFill>
-          <a:latin typeface="+mn-lt"/>
+          <a:latin typeface="Poppins"/>
           <a:ea typeface="+mn-ea"/>
           <a:cs typeface="+mn-cs"/>
         </a:defRPr>
@@ -3097,9 +3097,7 @@
   <p:cSld>
     <p:bg>
       <p:bgPr>
-        <a:solidFill>
-          <a:srgbClr val="1A5C33"/>
-        </a:solidFill>
+        <a:solidFill>val="006847"/&gt;</a:solidFill>
         <a:effectLst/>
       </p:bgPr>
     </p:bg>
@@ -3134,9 +3132,7 @@
           <a:p>
             <a:pPr algn="ctr">
               <a:defRPr sz="3200" b="1">
-                <a:solidFill>
-                  <a:srgbClr val="FFFFFF"/>
-                </a:solidFill>
+                <a:solidFill>val="FFFFFF"/&gt;</a:solidFill>
               </a:defRPr>
             </a:pPr>
             <a:r>
@@ -3169,9 +3165,7 @@
           <a:p>
             <a:pPr algn="ctr">
               <a:defRPr sz="2000" b="0">
-                <a:solidFill>
-                  <a:srgbClr val="C5D9C7"/>
-                </a:solidFill>
+                <a:solidFill>val="DFE5EA"/&gt;</a:solidFill>
               </a:defRPr>
             </a:pPr>
             <a:r>
@@ -3204,13 +3198,52 @@
           <a:p>
             <a:pPr algn="ctr">
               <a:defRPr sz="1600" b="0">
+                <a:solidFill>val="B7C9BE"/&gt;</a:solidFill>
+              </a:defRPr>
+            </a:pPr>
+            <a:r>
+              <a:t>Université de Mostaganem — MCB</a:t>
+            </a:r>
+          </a:p>
+        </p:txBody>
+      </p:sp>
+      <p:sp>
+        <p:nvSpPr>
+          <p:cNvPr id="990001" name="Pied de page FLE"/>
+          <p:cNvSpPr>
+            <a:spLocks noGrp="1"/>
+          </p:cNvSpPr>
+          <p:nvPr/>
+        </p:nvSpPr>
+        <p:spPr>
+          <a:xfrm>
+            <a:off x="2880360" y="914400"/>
+            <a:ext cx="4572000" cy="274320"/>
+          </a:xfrm>
+          <a:prstGeom prst="rect">
+            <a:avLst/>
+          </a:prstGeom>
+        </p:spPr>
+        <p:txBody>
+          <a:bodyPr anchor="b"/>
+          <a:lstStyle/>
+          <a:p>
+            <a:pPr algn="r">
+              <a:defRPr sz="900">
                 <a:solidFill>
-                  <a:srgbClr val="A0CFA0"/>
+                  <a:srgbClr val="9AA7B6"/>
                 </a:solidFill>
-              </a:defRPr>
-            </a:pPr>
-            <a:r>
-              <a:t>Université de Mostaganem — MCB</a:t>
+                <a:latin typeface="Poppins"/>
+              </a:defRPr>
+            </a:pPr>
+            <a:r>
+              <a:rPr lang="fr-FR" sz="900">
+                <a:solidFill>
+                  <a:srgbClr val="9AA7B6"/>
+                </a:solidFill>
+                <a:latin typeface="Poppins"/>
+              </a:rPr>
+              <a:t>Université de Mostaganem — Dr. Madani BELACEL</a:t>
             </a:r>
           </a:p>
         </p:txBody>
@@ -3228,9 +3261,7 @@
   <p:cSld>
     <p:bg>
       <p:bgPr>
-        <a:solidFill>
-          <a:srgbClr val="FFFFFF"/>
-        </a:solidFill>
+        <a:solidFill>val="FFFFFF"/&gt;</a:solidFill>
         <a:effectLst/>
       </p:bgPr>
     </p:bg>
@@ -3255,9 +3286,7 @@
           <a:prstGeom prst="rect">
             <a:avLst/>
           </a:prstGeom>
-          <a:solidFill>
-            <a:srgbClr val="2C6E49"/>
-          </a:solidFill>
+          <a:solidFill>val="00875B"/&gt;</a:solidFill>
           <a:ln>
             <a:noFill/>
           </a:ln>
@@ -3308,9 +3337,7 @@
           <a:p>
             <a:pPr algn="l">
               <a:defRPr sz="2200" b="1">
-                <a:solidFill>
-                  <a:srgbClr val="1A5C33"/>
-                </a:solidFill>
+                <a:solidFill>val="006847"/&gt;</a:solidFill>
               </a:defRPr>
             </a:pPr>
             <a:r>
@@ -3346,9 +3373,7 @@
                 <a:spcPts val="600"/>
               </a:spcAft>
               <a:defRPr sz="1400">
-                <a:solidFill>
-                  <a:srgbClr val="222222"/>
-                </a:solidFill>
+                <a:solidFill>val="22344A"/&gt;</a:solidFill>
               </a:defRPr>
             </a:pPr>
             <a:r>
@@ -3361,9 +3386,7 @@
                 <a:spcPts val="600"/>
               </a:spcAft>
               <a:defRPr sz="1400">
-                <a:solidFill>
-                  <a:srgbClr val="222222"/>
-                </a:solidFill>
+                <a:solidFill>val="22344A"/&gt;</a:solidFill>
               </a:defRPr>
             </a:pPr>
             <a:r>
@@ -3376,9 +3399,7 @@
                 <a:spcPts val="600"/>
               </a:spcAft>
               <a:defRPr sz="1400">
-                <a:solidFill>
-                  <a:srgbClr val="222222"/>
-                </a:solidFill>
+                <a:solidFill>val="22344A"/&gt;</a:solidFill>
               </a:defRPr>
             </a:pPr>
             <a:r>
@@ -3391,9 +3412,7 @@
                 <a:spcPts val="600"/>
               </a:spcAft>
               <a:defRPr sz="1400">
-                <a:solidFill>
-                  <a:srgbClr val="222222"/>
-                </a:solidFill>
+                <a:solidFill>val="22344A"/&gt;</a:solidFill>
               </a:defRPr>
             </a:pPr>
             <a:r>
@@ -3406,9 +3425,7 @@
                 <a:spcPts val="600"/>
               </a:spcAft>
               <a:defRPr sz="1400">
-                <a:solidFill>
-                  <a:srgbClr val="222222"/>
-                </a:solidFill>
+                <a:solidFill>val="22344A"/&gt;</a:solidFill>
               </a:defRPr>
             </a:pPr>
             <a:r>
@@ -3421,9 +3438,7 @@
                 <a:spcPts val="600"/>
               </a:spcAft>
               <a:defRPr sz="1400">
-                <a:solidFill>
-                  <a:srgbClr val="222222"/>
-                </a:solidFill>
+                <a:solidFill>val="22344A"/&gt;</a:solidFill>
               </a:defRPr>
             </a:pPr>
             <a:r>
@@ -3436,9 +3451,7 @@
                 <a:spcPts val="600"/>
               </a:spcAft>
               <a:defRPr sz="1400">
-                <a:solidFill>
-                  <a:srgbClr val="222222"/>
-                </a:solidFill>
+                <a:solidFill>val="22344A"/&gt;</a:solidFill>
               </a:defRPr>
             </a:pPr>
             <a:r>
@@ -3451,9 +3464,7 @@
                 <a:spcPts val="600"/>
               </a:spcAft>
               <a:defRPr sz="1400">
-                <a:solidFill>
-                  <a:srgbClr val="222222"/>
-                </a:solidFill>
+                <a:solidFill>val="22344A"/&gt;</a:solidFill>
               </a:defRPr>
             </a:pPr>
             <a:r>
@@ -3466,9 +3477,7 @@
                 <a:spcPts val="600"/>
               </a:spcAft>
               <a:defRPr sz="1400">
-                <a:solidFill>
-                  <a:srgbClr val="222222"/>
-                </a:solidFill>
+                <a:solidFill>val="22344A"/&gt;</a:solidFill>
               </a:defRPr>
             </a:pPr>
             <a:r>
@@ -3481,13 +3490,52 @@
                 <a:spcPts val="600"/>
               </a:spcAft>
               <a:defRPr sz="1400">
+                <a:solidFill>val="22344A"/&gt;</a:solidFill>
+              </a:defRPr>
+            </a:pPr>
+            <a:r>
+              <a:t>• Éthique et perspectives</a:t>
+            </a:r>
+          </a:p>
+        </p:txBody>
+      </p:sp>
+      <p:sp>
+        <p:nvSpPr>
+          <p:cNvPr id="990001" name="Pied de page FLE"/>
+          <p:cNvSpPr>
+            <a:spLocks noGrp="1"/>
+          </p:cNvSpPr>
+          <p:nvPr/>
+        </p:nvSpPr>
+        <p:spPr>
+          <a:xfrm>
+            <a:off x="-228600" y="6400800"/>
+            <a:ext cx="109728" cy="274320"/>
+          </a:xfrm>
+          <a:prstGeom prst="rect">
+            <a:avLst/>
+          </a:prstGeom>
+        </p:spPr>
+        <p:txBody>
+          <a:bodyPr anchor="b"/>
+          <a:lstStyle/>
+          <a:p>
+            <a:pPr algn="r">
+              <a:defRPr sz="900">
                 <a:solidFill>
-                  <a:srgbClr val="222222"/>
+                  <a:srgbClr val="9AA7B6"/>
                 </a:solidFill>
-              </a:defRPr>
-            </a:pPr>
-            <a:r>
-              <a:t>• Éthique et perspectives</a:t>
+                <a:latin typeface="Poppins"/>
+              </a:defRPr>
+            </a:pPr>
+            <a:r>
+              <a:rPr lang="fr-FR" sz="900">
+                <a:solidFill>
+                  <a:srgbClr val="9AA7B6"/>
+                </a:solidFill>
+                <a:latin typeface="Poppins"/>
+              </a:rPr>
+              <a:t>Université de Mostaganem — Dr. Madani BELACEL</a:t>
             </a:r>
           </a:p>
         </p:txBody>
@@ -3505,9 +3553,7 @@
   <p:cSld>
     <p:bg>
       <p:bgPr>
-        <a:solidFill>
-          <a:srgbClr val="FFFFFF"/>
-        </a:solidFill>
+        <a:solidFill>val="FFFFFF"/&gt;</a:solidFill>
         <a:effectLst/>
       </p:bgPr>
     </p:bg>
@@ -3532,9 +3578,7 @@
           <a:prstGeom prst="rect">
             <a:avLst/>
           </a:prstGeom>
-          <a:solidFill>
-            <a:srgbClr val="2C6E49"/>
-          </a:solidFill>
+          <a:solidFill>val="00875B"/&gt;</a:solidFill>
           <a:ln>
             <a:noFill/>
           </a:ln>
@@ -3585,9 +3629,7 @@
           <a:p>
             <a:pPr algn="l">
               <a:defRPr sz="2200" b="1">
-                <a:solidFill>
-                  <a:srgbClr val="1A5C33"/>
-                </a:solidFill>
+                <a:solidFill>val="006847"/&gt;</a:solidFill>
               </a:defRPr>
             </a:pPr>
             <a:r>
@@ -3623,9 +3665,7 @@
                 <a:spcPts val="600"/>
               </a:spcAft>
               <a:defRPr sz="1400">
-                <a:solidFill>
-                  <a:srgbClr val="222222"/>
-                </a:solidFill>
+                <a:solidFill>val="22344A"/&gt;</a:solidFill>
               </a:defRPr>
             </a:pPr>
             <a:r>
@@ -3638,9 +3678,7 @@
                 <a:spcPts val="600"/>
               </a:spcAft>
               <a:defRPr sz="1400">
-                <a:solidFill>
-                  <a:srgbClr val="222222"/>
-                </a:solidFill>
+                <a:solidFill>val="22344A"/&gt;</a:solidFill>
               </a:defRPr>
             </a:pPr>
             <a:r>
@@ -3653,9 +3691,7 @@
                 <a:spcPts val="600"/>
               </a:spcAft>
               <a:defRPr sz="1400">
-                <a:solidFill>
-                  <a:srgbClr val="222222"/>
-                </a:solidFill>
+                <a:solidFill>val="22344A"/&gt;</a:solidFill>
               </a:defRPr>
             </a:pPr>
             <a:r>
@@ -3668,13 +3704,52 @@
                 <a:spcPts val="600"/>
               </a:spcAft>
               <a:defRPr sz="1400">
+                <a:solidFill>val="22344A"/&gt;</a:solidFill>
+              </a:defRPr>
+            </a:pPr>
+            <a:r>
+              <a:t>• Prolongement Master: l'analyse des réseaux (Social Network Analysis, SNA) est une méthode puissante pour étudier les communautés linguistiques, les interactions en ligne, et la diffusion des innovations linguistiques. Elle s'inscrit dans lesDigital Humanitiescomputationnelles.</a:t>
+            </a:r>
+          </a:p>
+        </p:txBody>
+      </p:sp>
+      <p:sp>
+        <p:nvSpPr>
+          <p:cNvPr id="990001" name="Pied de page FLE"/>
+          <p:cNvSpPr>
+            <a:spLocks noGrp="1"/>
+          </p:cNvSpPr>
+          <p:nvPr/>
+        </p:nvSpPr>
+        <p:spPr>
+          <a:xfrm>
+            <a:off x="-228600" y="6400800"/>
+            <a:ext cx="109728" cy="274320"/>
+          </a:xfrm>
+          <a:prstGeom prst="rect">
+            <a:avLst/>
+          </a:prstGeom>
+        </p:spPr>
+        <p:txBody>
+          <a:bodyPr anchor="b"/>
+          <a:lstStyle/>
+          <a:p>
+            <a:pPr algn="r">
+              <a:defRPr sz="900">
                 <a:solidFill>
-                  <a:srgbClr val="222222"/>
+                  <a:srgbClr val="9AA7B6"/>
                 </a:solidFill>
-              </a:defRPr>
-            </a:pPr>
-            <a:r>
-              <a:t>• Prolongement Master: l'analyse des réseaux (Social Network Analysis, SNA) est une méthode puissante pour étudier les communautés linguistiques, les interactions en ligne, et la diffusion des innovations linguistiques. Elle s'inscrit dans lesDigital Humanitiescomputationnelles.</a:t>
+                <a:latin typeface="Poppins"/>
+              </a:defRPr>
+            </a:pPr>
+            <a:r>
+              <a:rPr lang="fr-FR" sz="900">
+                <a:solidFill>
+                  <a:srgbClr val="9AA7B6"/>
+                </a:solidFill>
+                <a:latin typeface="Poppins"/>
+              </a:rPr>
+              <a:t>Université de Mostaganem — Dr. Madani BELACEL</a:t>
             </a:r>
           </a:p>
         </p:txBody>
@@ -3692,9 +3767,7 @@
   <p:cSld>
     <p:bg>
       <p:bgPr>
-        <a:solidFill>
-          <a:srgbClr val="FFFFFF"/>
-        </a:solidFill>
+        <a:solidFill>val="FFFFFF"/&gt;</a:solidFill>
         <a:effectLst/>
       </p:bgPr>
     </p:bg>
@@ -3719,9 +3792,7 @@
           <a:prstGeom prst="rect">
             <a:avLst/>
           </a:prstGeom>
-          <a:solidFill>
-            <a:srgbClr val="2C6E49"/>
-          </a:solidFill>
+          <a:solidFill>val="00875B"/&gt;</a:solidFill>
           <a:ln>
             <a:noFill/>
           </a:ln>
@@ -3772,9 +3843,7 @@
           <a:p>
             <a:pPr algn="l">
               <a:defRPr sz="2200" b="1">
-                <a:solidFill>
-                  <a:srgbClr val="1A5C33"/>
-                </a:solidFill>
+                <a:solidFill>val="006847"/&gt;</a:solidFill>
               </a:defRPr>
             </a:pPr>
             <a:r>
@@ -3810,9 +3879,7 @@
                 <a:spcPts val="600"/>
               </a:spcAft>
               <a:defRPr sz="1400">
-                <a:solidFill>
-                  <a:srgbClr val="222222"/>
-                </a:solidFill>
+                <a:solidFill>val="22344A"/&gt;</a:solidFill>
               </a:defRPr>
             </a:pPr>
             <a:r>
@@ -3825,9 +3892,7 @@
                 <a:spcPts val="600"/>
               </a:spcAft>
               <a:defRPr sz="1400">
-                <a:solidFill>
-                  <a:srgbClr val="222222"/>
-                </a:solidFill>
+                <a:solidFill>val="22344A"/&gt;</a:solidFill>
               </a:defRPr>
             </a:pPr>
             <a:r>
@@ -3840,13 +3905,52 @@
                 <a:spcPts val="600"/>
               </a:spcAft>
               <a:defRPr sz="1400">
+                <a:solidFill>val="22344A"/&gt;</a:solidFill>
+              </a:defRPr>
+            </a:pPr>
+            <a:r>
+              <a:t>• Topologie logique: comment les données circulent (indépendamment de la disposition physique). Exemple : bus logique sur une topologie physique en étoile (Ethernet = CSMA/CD).</a:t>
+            </a:r>
+          </a:p>
+        </p:txBody>
+      </p:sp>
+      <p:sp>
+        <p:nvSpPr>
+          <p:cNvPr id="990001" name="Pied de page FLE"/>
+          <p:cNvSpPr>
+            <a:spLocks noGrp="1"/>
+          </p:cNvSpPr>
+          <p:nvPr/>
+        </p:nvSpPr>
+        <p:spPr>
+          <a:xfrm>
+            <a:off x="-228600" y="6400800"/>
+            <a:ext cx="109728" cy="274320"/>
+          </a:xfrm>
+          <a:prstGeom prst="rect">
+            <a:avLst/>
+          </a:prstGeom>
+        </p:spPr>
+        <p:txBody>
+          <a:bodyPr anchor="b"/>
+          <a:lstStyle/>
+          <a:p>
+            <a:pPr algn="r">
+              <a:defRPr sz="900">
                 <a:solidFill>
-                  <a:srgbClr val="222222"/>
+                  <a:srgbClr val="9AA7B6"/>
                 </a:solidFill>
-              </a:defRPr>
-            </a:pPr>
-            <a:r>
-              <a:t>• Topologie logique: comment les données circulent (indépendamment de la disposition physique). Exemple : bus logique sur une topologie physique en étoile (Ethernet = CSMA/CD).</a:t>
+                <a:latin typeface="Poppins"/>
+              </a:defRPr>
+            </a:pPr>
+            <a:r>
+              <a:rPr lang="fr-FR" sz="900">
+                <a:solidFill>
+                  <a:srgbClr val="9AA7B6"/>
+                </a:solidFill>
+                <a:latin typeface="Poppins"/>
+              </a:rPr>
+              <a:t>Université de Mostaganem — Dr. Madani BELACEL</a:t>
             </a:r>
           </a:p>
         </p:txBody>
@@ -3864,9 +3968,7 @@
   <p:cSld>
     <p:bg>
       <p:bgPr>
-        <a:solidFill>
-          <a:srgbClr val="E8F0E9"/>
-        </a:solidFill>
+        <a:solidFill>val="F4F6F8"/&gt;</a:solidFill>
         <a:effectLst/>
       </p:bgPr>
     </p:bg>
@@ -3901,9 +4003,7 @@
           <a:p>
             <a:pPr algn="ctr">
               <a:defRPr sz="2600" b="1">
-                <a:solidFill>
-                  <a:srgbClr val="1A5C33"/>
-                </a:solidFill>
+                <a:solidFill>val="006847"/&gt;</a:solidFill>
               </a:defRPr>
             </a:pPr>
             <a:r>
@@ -3939,9 +4039,7 @@
                 <a:spcPts val="600"/>
               </a:spcAft>
               <a:defRPr sz="1600">
-                <a:solidFill>
-                  <a:srgbClr val="222222"/>
-                </a:solidFill>
+                <a:solidFill>val="22344A"/&gt;</a:solidFill>
               </a:defRPr>
             </a:pPr>
             <a:r>
@@ -3954,9 +4052,7 @@
                 <a:spcPts val="600"/>
               </a:spcAft>
               <a:defRPr sz="1600">
-                <a:solidFill>
-                  <a:srgbClr val="222222"/>
-                </a:solidFill>
+                <a:solidFill>val="22344A"/&gt;</a:solidFill>
               </a:defRPr>
             </a:pPr>
             <a:r>
@@ -3977,9 +4073,7 @@
                 <a:spcPts val="600"/>
               </a:spcAft>
               <a:defRPr sz="1600">
-                <a:solidFill>
-                  <a:srgbClr val="222222"/>
-                </a:solidFill>
+                <a:solidFill>val="22344A"/&gt;</a:solidFill>
               </a:defRPr>
             </a:pPr>
             <a:r>
@@ -3992,9 +4086,7 @@
                 <a:spcPts val="600"/>
               </a:spcAft>
               <a:defRPr sz="1600">
-                <a:solidFill>
-                  <a:srgbClr val="222222"/>
-                </a:solidFill>
+                <a:solidFill>val="22344A"/&gt;</a:solidFill>
               </a:defRPr>
             </a:pPr>
             <a:r>
@@ -4007,13 +4099,52 @@
                 <a:spcPts val="600"/>
               </a:spcAft>
               <a:defRPr sz="1600">
+                <a:solidFill>val="22344A"/&gt;</a:solidFill>
+              </a:defRPr>
+            </a:pPr>
+            <a:r>
+              <a:t>• Granovetter, M. (1973). « The Strength of Weak Ties ».American Journal of Sociology, 78(6), 1360–1380.</a:t>
+            </a:r>
+          </a:p>
+        </p:txBody>
+      </p:sp>
+      <p:sp>
+        <p:nvSpPr>
+          <p:cNvPr id="990001" name="Pied de page FLE"/>
+          <p:cNvSpPr>
+            <a:spLocks noGrp="1"/>
+          </p:cNvSpPr>
+          <p:nvPr/>
+        </p:nvSpPr>
+        <p:spPr>
+          <a:xfrm>
+            <a:off x="2971800" y="182880"/>
+            <a:ext cx="4572000" cy="274320"/>
+          </a:xfrm>
+          <a:prstGeom prst="rect">
+            <a:avLst/>
+          </a:prstGeom>
+        </p:spPr>
+        <p:txBody>
+          <a:bodyPr anchor="b"/>
+          <a:lstStyle/>
+          <a:p>
+            <a:pPr algn="r">
+              <a:defRPr sz="900">
                 <a:solidFill>
-                  <a:srgbClr val="222222"/>
+                  <a:srgbClr val="9AA7B6"/>
                 </a:solidFill>
-              </a:defRPr>
-            </a:pPr>
-            <a:r>
-              <a:t>• Granovetter, M. (1973). « The Strength of Weak Ties ».American Journal of Sociology, 78(6), 1360–1380.</a:t>
+                <a:latin typeface="Poppins"/>
+              </a:defRPr>
+            </a:pPr>
+            <a:r>
+              <a:rPr lang="fr-FR" sz="900">
+                <a:solidFill>
+                  <a:srgbClr val="9AA7B6"/>
+                </a:solidFill>
+                <a:latin typeface="Poppins"/>
+              </a:rPr>
+              <a:t>Université de Mostaganem — Dr. Madani BELACEL</a:t>
             </a:r>
           </a:p>
         </p:txBody>
@@ -4031,9 +4162,7 @@
   <p:cSld>
     <p:bg>
       <p:bgPr>
-        <a:solidFill>
-          <a:srgbClr val="FFFFFF"/>
-        </a:solidFill>
+        <a:solidFill>val="FFFFFF"/&gt;</a:solidFill>
         <a:effectLst/>
       </p:bgPr>
     </p:bg>
@@ -4068,9 +4197,7 @@
           <a:p>
             <a:pPr algn="ctr">
               <a:defRPr sz="2600" b="1">
-                <a:solidFill>
-                  <a:srgbClr val="1A5C33"/>
-                </a:solidFill>
+                <a:solidFill>val="006847"/&gt;</a:solidFill>
               </a:defRPr>
             </a:pPr>
             <a:r>
@@ -4106,9 +4233,7 @@
                 <a:spcPts val="600"/>
               </a:spcAft>
               <a:defRPr sz="1500">
-                <a:solidFill>
-                  <a:srgbClr val="222222"/>
-                </a:solidFill>
+                <a:solidFill>val="22344A"/&gt;</a:solidFill>
               </a:defRPr>
             </a:pPr>
             <a:r>
@@ -4121,9 +4246,7 @@
                 <a:spcPts val="600"/>
               </a:spcAft>
               <a:defRPr sz="1500">
-                <a:solidFill>
-                  <a:srgbClr val="222222"/>
-                </a:solidFill>
+                <a:solidFill>val="22344A"/&gt;</a:solidFill>
               </a:defRPr>
             </a:pPr>
             <a:r>
@@ -4136,9 +4259,7 @@
                 <a:spcPts val="600"/>
               </a:spcAft>
               <a:defRPr sz="1500">
-                <a:solidFill>
-                  <a:srgbClr val="222222"/>
-                </a:solidFill>
+                <a:solidFill>val="22344A"/&gt;</a:solidFill>
               </a:defRPr>
             </a:pPr>
             <a:r>
@@ -4151,9 +4272,7 @@
                 <a:spcPts val="600"/>
               </a:spcAft>
               <a:defRPr sz="1500">
-                <a:solidFill>
-                  <a:srgbClr val="222222"/>
-                </a:solidFill>
+                <a:solidFill>val="22344A"/&gt;</a:solidFill>
               </a:defRPr>
             </a:pPr>
             <a:r>
@@ -4166,13 +4285,52 @@
                 <a:spcPts val="600"/>
               </a:spcAft>
               <a:defRPr sz="1500">
+                <a:solidFill>val="22344A"/&gt;</a:solidFill>
+              </a:defRPr>
+            </a:pPr>
+            <a:r>
+              <a:t>• Préparer une courte présentation orale</a:t>
+            </a:r>
+          </a:p>
+        </p:txBody>
+      </p:sp>
+      <p:sp>
+        <p:nvSpPr>
+          <p:cNvPr id="990001" name="Pied de page FLE"/>
+          <p:cNvSpPr>
+            <a:spLocks noGrp="1"/>
+          </p:cNvSpPr>
+          <p:nvPr/>
+        </p:nvSpPr>
+        <p:spPr>
+          <a:xfrm>
+            <a:off x="2971800" y="182880"/>
+            <a:ext cx="4572000" cy="274320"/>
+          </a:xfrm>
+          <a:prstGeom prst="rect">
+            <a:avLst/>
+          </a:prstGeom>
+        </p:spPr>
+        <p:txBody>
+          <a:bodyPr anchor="b"/>
+          <a:lstStyle/>
+          <a:p>
+            <a:pPr algn="r">
+              <a:defRPr sz="900">
                 <a:solidFill>
-                  <a:srgbClr val="222222"/>
+                  <a:srgbClr val="9AA7B6"/>
                 </a:solidFill>
-              </a:defRPr>
-            </a:pPr>
-            <a:r>
-              <a:t>• Préparer une courte présentation orale</a:t>
+                <a:latin typeface="Poppins"/>
+              </a:defRPr>
+            </a:pPr>
+            <a:r>
+              <a:rPr lang="fr-FR" sz="900">
+                <a:solidFill>
+                  <a:srgbClr val="9AA7B6"/>
+                </a:solidFill>
+                <a:latin typeface="Poppins"/>
+              </a:rPr>
+              <a:t>Université de Mostaganem — Dr. Madani BELACEL</a:t>
             </a:r>
           </a:p>
         </p:txBody>
@@ -4190,9 +4348,7 @@
   <p:cSld>
     <p:bg>
       <p:bgPr>
-        <a:solidFill>
-          <a:srgbClr val="1A5C33"/>
-        </a:solidFill>
+        <a:solidFill>val="006847"/&gt;</a:solidFill>
         <a:effectLst/>
       </p:bgPr>
     </p:bg>
@@ -4227,9 +4383,7 @@
           <a:p>
             <a:pPr algn="ctr">
               <a:defRPr sz="2800" b="1">
-                <a:solidFill>
-                  <a:srgbClr val="FFFFFF"/>
-                </a:solidFill>
+                <a:solidFill>val="FFFFFF"/&gt;</a:solidFill>
               </a:defRPr>
             </a:pPr>
             <a:r>
@@ -4262,25 +4416,64 @@
           <a:p>
             <a:pPr algn="ctr">
               <a:defRPr sz="1800" b="0">
+                <a:solidFill>val="DFE5EA"/&gt;</a:solidFill>
+              </a:defRPr>
+            </a:pPr>
+            <a:r>
+              <a:t>Dr. BELACEL Madani</a:t>
+            </a:r>
+            <a:br/>
+            <a:r>
+              <a:t>Maître de Conférences B</a:t>
+            </a:r>
+            <a:br/>
+            <a:r>
+              <a:t>Université de Mostaganem</a:t>
+            </a:r>
+            <a:br/>
+            <a:r>
+              <a:t>madani.belacel@univ-mosta.dz</a:t>
+            </a:r>
+          </a:p>
+        </p:txBody>
+      </p:sp>
+      <p:sp>
+        <p:nvSpPr>
+          <p:cNvPr id="990001" name="Pied de page FLE"/>
+          <p:cNvSpPr>
+            <a:spLocks noGrp="1"/>
+          </p:cNvSpPr>
+          <p:nvPr/>
+        </p:nvSpPr>
+        <p:spPr>
+          <a:xfrm>
+            <a:off x="2880360" y="457200"/>
+            <a:ext cx="4572000" cy="274320"/>
+          </a:xfrm>
+          <a:prstGeom prst="rect">
+            <a:avLst/>
+          </a:prstGeom>
+        </p:spPr>
+        <p:txBody>
+          <a:bodyPr anchor="b"/>
+          <a:lstStyle/>
+          <a:p>
+            <a:pPr algn="r">
+              <a:defRPr sz="900">
                 <a:solidFill>
-                  <a:srgbClr val="C5D9C7"/>
+                  <a:srgbClr val="9AA7B6"/>
                 </a:solidFill>
-              </a:defRPr>
-            </a:pPr>
-            <a:r>
-              <a:t>Dr. BELACEL Madani</a:t>
-            </a:r>
-            <a:br/>
-            <a:r>
-              <a:t>Maître de Conférences B</a:t>
-            </a:r>
-            <a:br/>
-            <a:r>
-              <a:t>Université de Mostaganem</a:t>
-            </a:r>
-            <a:br/>
-            <a:r>
-              <a:t>madani.belacel@univ-mosta.dz</a:t>
+                <a:latin typeface="Poppins"/>
+              </a:defRPr>
+            </a:pPr>
+            <a:r>
+              <a:rPr lang="fr-FR" sz="900">
+                <a:solidFill>
+                  <a:srgbClr val="9AA7B6"/>
+                </a:solidFill>
+                <a:latin typeface="Poppins"/>
+              </a:rPr>
+              <a:t>Université de Mostaganem — Dr. Madani BELACEL</a:t>
             </a:r>
           </a:p>
         </p:txBody>
@@ -4298,9 +4491,7 @@
   <p:cSld>
     <p:bg>
       <p:bgPr>
-        <a:solidFill>
-          <a:srgbClr val="FFFFFF"/>
-        </a:solidFill>
+        <a:solidFill>val="FFFFFF"/&gt;</a:solidFill>
         <a:effectLst/>
       </p:bgPr>
     </p:bg>
@@ -4335,9 +4526,7 @@
           <a:p>
             <a:pPr algn="l">
               <a:defRPr sz="2600" b="1">
-                <a:solidFill>
-                  <a:srgbClr val="1A5C33"/>
-                </a:solidFill>
+                <a:solidFill>val="006847"/&gt;</a:solidFill>
               </a:defRPr>
             </a:pPr>
             <a:r>
@@ -4373,9 +4562,7 @@
                 <a:spcPts val="600"/>
               </a:spcAft>
               <a:defRPr sz="1500">
-                <a:solidFill>
-                  <a:srgbClr val="222222"/>
-                </a:solidFill>
+                <a:solidFill>val="22344A"/&gt;</a:solidFill>
               </a:defRPr>
             </a:pPr>
             <a:r>
@@ -4396,9 +4583,7 @@
                 <a:spcPts val="600"/>
               </a:spcAft>
               <a:defRPr sz="1500">
-                <a:solidFill>
-                  <a:srgbClr val="222222"/>
-                </a:solidFill>
+                <a:solidFill>val="22344A"/&gt;</a:solidFill>
               </a:defRPr>
             </a:pPr>
             <a:r>
@@ -4419,9 +4604,7 @@
                 <a:spcPts val="600"/>
               </a:spcAft>
               <a:defRPr sz="1500">
-                <a:solidFill>
-                  <a:srgbClr val="222222"/>
-                </a:solidFill>
+                <a:solidFill>val="22344A"/&gt;</a:solidFill>
               </a:defRPr>
             </a:pPr>
             <a:r>
@@ -4438,13 +4621,52 @@
                 <a:spcPts val="600"/>
               </a:spcAft>
               <a:defRPr sz="1500">
+                <a:solidFill>val="22344A"/&gt;</a:solidFill>
+              </a:defRPr>
+            </a:pPr>
+            <a:r>
+              <a:t>• Mode d'évaluation :TD 25 % + Analyse de réseau (mini-mémoire graphique) 50 % + QCM 25 %</a:t>
+            </a:r>
+          </a:p>
+        </p:txBody>
+      </p:sp>
+      <p:sp>
+        <p:nvSpPr>
+          <p:cNvPr id="990001" name="Pied de page FLE"/>
+          <p:cNvSpPr>
+            <a:spLocks noGrp="1"/>
+          </p:cNvSpPr>
+          <p:nvPr/>
+        </p:nvSpPr>
+        <p:spPr>
+          <a:xfrm>
+            <a:off x="2971800" y="182880"/>
+            <a:ext cx="4572000" cy="274320"/>
+          </a:xfrm>
+          <a:prstGeom prst="rect">
+            <a:avLst/>
+          </a:prstGeom>
+        </p:spPr>
+        <p:txBody>
+          <a:bodyPr anchor="b"/>
+          <a:lstStyle/>
+          <a:p>
+            <a:pPr algn="r">
+              <a:defRPr sz="900">
                 <a:solidFill>
-                  <a:srgbClr val="222222"/>
+                  <a:srgbClr val="9AA7B6"/>
                 </a:solidFill>
-              </a:defRPr>
-            </a:pPr>
-            <a:r>
-              <a:t>• Mode d'évaluation :TD 25 % + Analyse de réseau (mini-mémoire graphique) 50 % + QCM 25 %</a:t>
+                <a:latin typeface="Poppins"/>
+              </a:defRPr>
+            </a:pPr>
+            <a:r>
+              <a:rPr lang="fr-FR" sz="900">
+                <a:solidFill>
+                  <a:srgbClr val="9AA7B6"/>
+                </a:solidFill>
+                <a:latin typeface="Poppins"/>
+              </a:rPr>
+              <a:t>Université de Mostaganem — Dr. Madani BELACEL</a:t>
             </a:r>
           </a:p>
         </p:txBody>
@@ -4462,9 +4684,7 @@
   <p:cSld>
     <p:bg>
       <p:bgPr>
-        <a:solidFill>
-          <a:srgbClr val="FFFFFF"/>
-        </a:solidFill>
+        <a:solidFill>val="FFFFFF"/&gt;</a:solidFill>
         <a:effectLst/>
       </p:bgPr>
     </p:bg>
@@ -4499,9 +4719,7 @@
           <a:p>
             <a:pPr algn="l">
               <a:defRPr sz="2600" b="1">
-                <a:solidFill>
-                  <a:srgbClr val="1A5C33"/>
-                </a:solidFill>
+                <a:solidFill>val="006847"/&gt;</a:solidFill>
               </a:defRPr>
             </a:pPr>
             <a:r>
@@ -4537,9 +4755,7 @@
                 <a:spcPts val="600"/>
               </a:spcAft>
               <a:defRPr sz="1600">
-                <a:solidFill>
-                  <a:srgbClr val="222222"/>
-                </a:solidFill>
+                <a:solidFill>val="22344A"/&gt;</a:solidFill>
               </a:defRPr>
             </a:pPr>
             <a:r>
@@ -4552,9 +4768,7 @@
                 <a:spcPts val="600"/>
               </a:spcAft>
               <a:defRPr sz="1600">
-                <a:solidFill>
-                  <a:srgbClr val="222222"/>
-                </a:solidFill>
+                <a:solidFill>val="22344A"/&gt;</a:solidFill>
               </a:defRPr>
             </a:pPr>
             <a:r>
@@ -4567,9 +4781,7 @@
                 <a:spcPts val="600"/>
               </a:spcAft>
               <a:defRPr sz="1600">
-                <a:solidFill>
-                  <a:srgbClr val="222222"/>
-                </a:solidFill>
+                <a:solidFill>val="22344A"/&gt;</a:solidFill>
               </a:defRPr>
             </a:pPr>
             <a:r>
@@ -4582,9 +4794,7 @@
                 <a:spcPts val="600"/>
               </a:spcAft>
               <a:defRPr sz="1600">
-                <a:solidFill>
-                  <a:srgbClr val="222222"/>
-                </a:solidFill>
+                <a:solidFill>val="22344A"/&gt;</a:solidFill>
               </a:defRPr>
             </a:pPr>
             <a:r>
@@ -4597,9 +4807,7 @@
                 <a:spcPts val="600"/>
               </a:spcAft>
               <a:defRPr sz="1600">
-                <a:solidFill>
-                  <a:srgbClr val="222222"/>
-                </a:solidFill>
+                <a:solidFill>val="22344A"/&gt;</a:solidFill>
               </a:defRPr>
             </a:pPr>
             <a:r>
@@ -4612,9 +4820,7 @@
                 <a:spcPts val="600"/>
               </a:spcAft>
               <a:defRPr sz="1600">
-                <a:solidFill>
-                  <a:srgbClr val="222222"/>
-                </a:solidFill>
+                <a:solidFill>val="22344A"/&gt;</a:solidFill>
               </a:defRPr>
             </a:pPr>
             <a:r>
@@ -4627,9 +4833,7 @@
                 <a:spcPts val="600"/>
               </a:spcAft>
               <a:defRPr sz="1600">
-                <a:solidFill>
-                  <a:srgbClr val="222222"/>
-                </a:solidFill>
+                <a:solidFill>val="22344A"/&gt;</a:solidFill>
               </a:defRPr>
             </a:pPr>
             <a:r>
@@ -4642,9 +4846,7 @@
                 <a:spcPts val="600"/>
               </a:spcAft>
               <a:defRPr sz="1600">
-                <a:solidFill>
-                  <a:srgbClr val="222222"/>
-                </a:solidFill>
+                <a:solidFill>val="22344A"/&gt;</a:solidFill>
               </a:defRPr>
             </a:pPr>
             <a:r>
@@ -4657,9 +4859,7 @@
                 <a:spcPts val="600"/>
               </a:spcAft>
               <a:defRPr sz="1600">
-                <a:solidFill>
-                  <a:srgbClr val="222222"/>
-                </a:solidFill>
+                <a:solidFill>val="22344A"/&gt;</a:solidFill>
               </a:defRPr>
             </a:pPr>
             <a:r>
@@ -4672,13 +4872,52 @@
                 <a:spcPts val="600"/>
               </a:spcAft>
               <a:defRPr sz="1600">
+                <a:solidFill>val="22344A"/&gt;</a:solidFill>
+              </a:defRPr>
+            </a:pPr>
+            <a:r>
+              <a:t>• Social Network Analysis (SNA) — fondements(15 min)</a:t>
+            </a:r>
+          </a:p>
+        </p:txBody>
+      </p:sp>
+      <p:sp>
+        <p:nvSpPr>
+          <p:cNvPr id="990001" name="Pied de page FLE"/>
+          <p:cNvSpPr>
+            <a:spLocks noGrp="1"/>
+          </p:cNvSpPr>
+          <p:nvPr/>
+        </p:nvSpPr>
+        <p:spPr>
+          <a:xfrm>
+            <a:off x="2971800" y="182880"/>
+            <a:ext cx="4572000" cy="274320"/>
+          </a:xfrm>
+          <a:prstGeom prst="rect">
+            <a:avLst/>
+          </a:prstGeom>
+        </p:spPr>
+        <p:txBody>
+          <a:bodyPr anchor="b"/>
+          <a:lstStyle/>
+          <a:p>
+            <a:pPr algn="r">
+              <a:defRPr sz="900">
                 <a:solidFill>
-                  <a:srgbClr val="222222"/>
+                  <a:srgbClr val="9AA7B6"/>
                 </a:solidFill>
-              </a:defRPr>
-            </a:pPr>
-            <a:r>
-              <a:t>• Social Network Analysis (SNA) — fondements(15 min)</a:t>
+                <a:latin typeface="Poppins"/>
+              </a:defRPr>
+            </a:pPr>
+            <a:r>
+              <a:rPr lang="fr-FR" sz="900">
+                <a:solidFill>
+                  <a:srgbClr val="9AA7B6"/>
+                </a:solidFill>
+                <a:latin typeface="Poppins"/>
+              </a:rPr>
+              <a:t>Université de Mostaganem — Dr. Madani BELACEL</a:t>
             </a:r>
           </a:p>
         </p:txBody>
@@ -4696,9 +4935,7 @@
   <p:cSld>
     <p:bg>
       <p:bgPr>
-        <a:solidFill>
-          <a:srgbClr val="FFFFFF"/>
-        </a:solidFill>
+        <a:solidFill>val="FFFFFF"/&gt;</a:solidFill>
         <a:effectLst/>
       </p:bgPr>
     </p:bg>
@@ -4723,9 +4960,7 @@
           <a:prstGeom prst="rect">
             <a:avLst/>
           </a:prstGeom>
-          <a:solidFill>
-            <a:srgbClr val="2C6E49"/>
-          </a:solidFill>
+          <a:solidFill>val="00875B"/&gt;</a:solidFill>
           <a:ln>
             <a:noFill/>
           </a:ln>
@@ -4776,9 +5011,7 @@
           <a:p>
             <a:pPr algn="l">
               <a:defRPr sz="2200" b="1">
-                <a:solidFill>
-                  <a:srgbClr val="1A5C33"/>
-                </a:solidFill>
+                <a:solidFill>val="006847"/&gt;</a:solidFill>
               </a:defRPr>
             </a:pPr>
             <a:r>
@@ -4814,9 +5047,7 @@
                 <a:spcPts val="600"/>
               </a:spcAft>
               <a:defRPr sz="1400">
-                <a:solidFill>
-                  <a:srgbClr val="222222"/>
-                </a:solidFill>
+                <a:solidFill>val="22344A"/&gt;</a:solidFill>
               </a:defRPr>
             </a:pPr>
             <a:r>
@@ -4829,9 +5060,7 @@
                 <a:spcPts val="600"/>
               </a:spcAft>
               <a:defRPr sz="1400">
-                <a:solidFill>
-                  <a:srgbClr val="222222"/>
-                </a:solidFill>
+                <a:solidFill>val="22344A"/&gt;</a:solidFill>
               </a:defRPr>
             </a:pPr>
             <a:r>
@@ -4844,13 +5073,52 @@
                 <a:spcPts val="600"/>
               </a:spcAft>
               <a:defRPr sz="1400">
+                <a:solidFill>val="22344A"/&gt;</a:solidFill>
+              </a:defRPr>
+            </a:pPr>
+            <a:r>
+              <a:t>• Compétences pré-requises :TIC 07–08 ; notions d'adressage IP et de protocoles</a:t>
+            </a:r>
+          </a:p>
+        </p:txBody>
+      </p:sp>
+      <p:sp>
+        <p:nvSpPr>
+          <p:cNvPr id="990001" name="Pied de page FLE"/>
+          <p:cNvSpPr>
+            <a:spLocks noGrp="1"/>
+          </p:cNvSpPr>
+          <p:nvPr/>
+        </p:nvSpPr>
+        <p:spPr>
+          <a:xfrm>
+            <a:off x="-228600" y="6400800"/>
+            <a:ext cx="109728" cy="274320"/>
+          </a:xfrm>
+          <a:prstGeom prst="rect">
+            <a:avLst/>
+          </a:prstGeom>
+        </p:spPr>
+        <p:txBody>
+          <a:bodyPr anchor="b"/>
+          <a:lstStyle/>
+          <a:p>
+            <a:pPr algn="r">
+              <a:defRPr sz="900">
                 <a:solidFill>
-                  <a:srgbClr val="222222"/>
+                  <a:srgbClr val="9AA7B6"/>
                 </a:solidFill>
-              </a:defRPr>
-            </a:pPr>
-            <a:r>
-              <a:t>• Compétences pré-requises :TIC 07–08 ; notions d'adressage IP et de protocoles</a:t>
+                <a:latin typeface="Poppins"/>
+              </a:defRPr>
+            </a:pPr>
+            <a:r>
+              <a:rPr lang="fr-FR" sz="900">
+                <a:solidFill>
+                  <a:srgbClr val="9AA7B6"/>
+                </a:solidFill>
+                <a:latin typeface="Poppins"/>
+              </a:rPr>
+              <a:t>Université de Mostaganem — Dr. Madani BELACEL</a:t>
             </a:r>
           </a:p>
         </p:txBody>
@@ -4868,9 +5136,7 @@
   <p:cSld>
     <p:bg>
       <p:bgPr>
-        <a:solidFill>
-          <a:srgbClr val="FFFFFF"/>
-        </a:solidFill>
+        <a:solidFill>val="FFFFFF"/&gt;</a:solidFill>
         <a:effectLst/>
       </p:bgPr>
     </p:bg>
@@ -4895,9 +5161,7 @@
           <a:prstGeom prst="rect">
             <a:avLst/>
           </a:prstGeom>
-          <a:solidFill>
-            <a:srgbClr val="2C6E49"/>
-          </a:solidFill>
+          <a:solidFill>val="00875B"/&gt;</a:solidFill>
           <a:ln>
             <a:noFill/>
           </a:ln>
@@ -4948,9 +5212,7 @@
           <a:p>
             <a:pPr algn="l">
               <a:defRPr sz="2200" b="1">
-                <a:solidFill>
-                  <a:srgbClr val="1A5C33"/>
-                </a:solidFill>
+                <a:solidFill>val="006847"/&gt;</a:solidFill>
               </a:defRPr>
             </a:pPr>
             <a:r>
@@ -4986,9 +5248,7 @@
                 <a:spcPts val="600"/>
               </a:spcAft>
               <a:defRPr sz="1400">
-                <a:solidFill>
-                  <a:srgbClr val="222222"/>
-                </a:solidFill>
+                <a:solidFill>val="22344A"/&gt;</a:solidFill>
               </a:defRPr>
             </a:pPr>
             <a:r>
@@ -5009,9 +5269,7 @@
                 <a:spcPts val="600"/>
               </a:spcAft>
               <a:defRPr sz="1400">
-                <a:solidFill>
-                  <a:srgbClr val="222222"/>
-                </a:solidFill>
+                <a:solidFill>val="22344A"/&gt;</a:solidFill>
               </a:defRPr>
             </a:pPr>
             <a:r>
@@ -5032,9 +5290,7 @@
                 <a:spcPts val="600"/>
               </a:spcAft>
               <a:defRPr sz="1400">
-                <a:solidFill>
-                  <a:srgbClr val="222222"/>
-                </a:solidFill>
+                <a:solidFill>val="22344A"/&gt;</a:solidFill>
               </a:defRPr>
             </a:pPr>
             <a:r>
@@ -5051,13 +5307,52 @@
                 <a:spcPts val="600"/>
               </a:spcAft>
               <a:defRPr sz="1400">
+                <a:solidFill>val="22344A"/&gt;</a:solidFill>
+              </a:defRPr>
+            </a:pPr>
+            <a:r>
+              <a:t>• Mode d'évaluation :TD 25 % + Analyse de réseau (mini-mémoire graphique) 50 % + QCM 25 %</a:t>
+            </a:r>
+          </a:p>
+        </p:txBody>
+      </p:sp>
+      <p:sp>
+        <p:nvSpPr>
+          <p:cNvPr id="990001" name="Pied de page FLE"/>
+          <p:cNvSpPr>
+            <a:spLocks noGrp="1"/>
+          </p:cNvSpPr>
+          <p:nvPr/>
+        </p:nvSpPr>
+        <p:spPr>
+          <a:xfrm>
+            <a:off x="-228600" y="6400800"/>
+            <a:ext cx="109728" cy="274320"/>
+          </a:xfrm>
+          <a:prstGeom prst="rect">
+            <a:avLst/>
+          </a:prstGeom>
+        </p:spPr>
+        <p:txBody>
+          <a:bodyPr anchor="b"/>
+          <a:lstStyle/>
+          <a:p>
+            <a:pPr algn="r">
+              <a:defRPr sz="900">
                 <a:solidFill>
-                  <a:srgbClr val="222222"/>
+                  <a:srgbClr val="9AA7B6"/>
                 </a:solidFill>
-              </a:defRPr>
-            </a:pPr>
-            <a:r>
-              <a:t>• Mode d'évaluation :TD 25 % + Analyse de réseau (mini-mémoire graphique) 50 % + QCM 25 %</a:t>
+                <a:latin typeface="Poppins"/>
+              </a:defRPr>
+            </a:pPr>
+            <a:r>
+              <a:rPr lang="fr-FR" sz="900">
+                <a:solidFill>
+                  <a:srgbClr val="9AA7B6"/>
+                </a:solidFill>
+                <a:latin typeface="Poppins"/>
+              </a:rPr>
+              <a:t>Université de Mostaganem — Dr. Madani BELACEL</a:t>
             </a:r>
           </a:p>
         </p:txBody>
@@ -5075,9 +5370,7 @@
   <p:cSld>
     <p:bg>
       <p:bgPr>
-        <a:solidFill>
-          <a:srgbClr val="FFFFFF"/>
-        </a:solidFill>
+        <a:solidFill>val="FFFFFF"/&gt;</a:solidFill>
         <a:effectLst/>
       </p:bgPr>
     </p:bg>
@@ -5102,9 +5395,7 @@
           <a:prstGeom prst="rect">
             <a:avLst/>
           </a:prstGeom>
-          <a:solidFill>
-            <a:srgbClr val="2C6E49"/>
-          </a:solidFill>
+          <a:solidFill>val="00875B"/&gt;</a:solidFill>
           <a:ln>
             <a:noFill/>
           </a:ln>
@@ -5155,9 +5446,7 @@
           <a:p>
             <a:pPr algn="l">
               <a:defRPr sz="2200" b="1">
-                <a:solidFill>
-                  <a:srgbClr val="1A5C33"/>
-                </a:solidFill>
+                <a:solidFill>val="006847"/&gt;</a:solidFill>
               </a:defRPr>
             </a:pPr>
             <a:r>
@@ -5193,9 +5482,7 @@
                 <a:spcPts val="600"/>
               </a:spcAft>
               <a:defRPr sz="1400">
-                <a:solidFill>
-                  <a:srgbClr val="222222"/>
-                </a:solidFill>
+                <a:solidFill>val="22344A"/&gt;</a:solidFill>
               </a:defRPr>
             </a:pPr>
             <a:r>
@@ -5208,13 +5495,52 @@
                 <a:spcPts val="600"/>
               </a:spcAft>
               <a:defRPr sz="1400">
+                <a:solidFill>val="22344A"/&gt;</a:solidFill>
+              </a:defRPr>
+            </a:pPr>
+            <a:r>
+              <a:t>• Lecture dirigée : Granovetter (1973) — « The Strength of Weak Ties »</a:t>
+            </a:r>
+          </a:p>
+        </p:txBody>
+      </p:sp>
+      <p:sp>
+        <p:nvSpPr>
+          <p:cNvPr id="990001" name="Pied de page FLE"/>
+          <p:cNvSpPr>
+            <a:spLocks noGrp="1"/>
+          </p:cNvSpPr>
+          <p:nvPr/>
+        </p:nvSpPr>
+        <p:spPr>
+          <a:xfrm>
+            <a:off x="-228600" y="6400800"/>
+            <a:ext cx="109728" cy="274320"/>
+          </a:xfrm>
+          <a:prstGeom prst="rect">
+            <a:avLst/>
+          </a:prstGeom>
+        </p:spPr>
+        <p:txBody>
+          <a:bodyPr anchor="b"/>
+          <a:lstStyle/>
+          <a:p>
+            <a:pPr algn="r">
+              <a:defRPr sz="900">
                 <a:solidFill>
-                  <a:srgbClr val="222222"/>
+                  <a:srgbClr val="9AA7B6"/>
                 </a:solidFill>
-              </a:defRPr>
-            </a:pPr>
-            <a:r>
-              <a:t>• Lecture dirigée : Granovetter (1973) — « The Strength of Weak Ties »</a:t>
+                <a:latin typeface="Poppins"/>
+              </a:defRPr>
+            </a:pPr>
+            <a:r>
+              <a:rPr lang="fr-FR" sz="900">
+                <a:solidFill>
+                  <a:srgbClr val="9AA7B6"/>
+                </a:solidFill>
+                <a:latin typeface="Poppins"/>
+              </a:rPr>
+              <a:t>Université de Mostaganem — Dr. Madani BELACEL</a:t>
             </a:r>
           </a:p>
         </p:txBody>
@@ -5232,9 +5558,7 @@
   <p:cSld>
     <p:bg>
       <p:bgPr>
-        <a:solidFill>
-          <a:srgbClr val="FFFFFF"/>
-        </a:solidFill>
+        <a:solidFill>val="FFFFFF"/&gt;</a:solidFill>
         <a:effectLst/>
       </p:bgPr>
     </p:bg>
@@ -5259,9 +5583,7 @@
           <a:prstGeom prst="rect">
             <a:avLst/>
           </a:prstGeom>
-          <a:solidFill>
-            <a:srgbClr val="2C6E49"/>
-          </a:solidFill>
+          <a:solidFill>val="00875B"/&gt;</a:solidFill>
           <a:ln>
             <a:noFill/>
           </a:ln>
@@ -5312,9 +5634,7 @@
           <a:p>
             <a:pPr algn="l">
               <a:defRPr sz="2200" b="1">
-                <a:solidFill>
-                  <a:srgbClr val="1A5C33"/>
-                </a:solidFill>
+                <a:solidFill>val="006847"/&gt;</a:solidFill>
               </a:defRPr>
             </a:pPr>
             <a:r>
@@ -5350,9 +5670,7 @@
                 <a:spcPts val="600"/>
               </a:spcAft>
               <a:defRPr sz="1400">
-                <a:solidFill>
-                  <a:srgbClr val="222222"/>
-                </a:solidFill>
+                <a:solidFill>val="22344A"/&gt;</a:solidFill>
               </a:defRPr>
             </a:pPr>
             <a:r>
@@ -5365,13 +5683,52 @@
                 <a:spcPts val="600"/>
               </a:spcAft>
               <a:defRPr sz="1400">
+                <a:solidFill>val="22344A"/&gt;</a:solidFill>
+              </a:defRPr>
+            </a:pPr>
+            <a:r>
+              <a:t>• QCM réseaux, topologies, SNA</a:t>
+            </a:r>
+          </a:p>
+        </p:txBody>
+      </p:sp>
+      <p:sp>
+        <p:nvSpPr>
+          <p:cNvPr id="990001" name="Pied de page FLE"/>
+          <p:cNvSpPr>
+            <a:spLocks noGrp="1"/>
+          </p:cNvSpPr>
+          <p:nvPr/>
+        </p:nvSpPr>
+        <p:spPr>
+          <a:xfrm>
+            <a:off x="-228600" y="6400800"/>
+            <a:ext cx="109728" cy="274320"/>
+          </a:xfrm>
+          <a:prstGeom prst="rect">
+            <a:avLst/>
+          </a:prstGeom>
+        </p:spPr>
+        <p:txBody>
+          <a:bodyPr anchor="b"/>
+          <a:lstStyle/>
+          <a:p>
+            <a:pPr algn="r">
+              <a:defRPr sz="900">
                 <a:solidFill>
-                  <a:srgbClr val="222222"/>
+                  <a:srgbClr val="9AA7B6"/>
                 </a:solidFill>
-              </a:defRPr>
-            </a:pPr>
-            <a:r>
-              <a:t>• QCM réseaux, topologies, SNA</a:t>
+                <a:latin typeface="Poppins"/>
+              </a:defRPr>
+            </a:pPr>
+            <a:r>
+              <a:rPr lang="fr-FR" sz="900">
+                <a:solidFill>
+                  <a:srgbClr val="9AA7B6"/>
+                </a:solidFill>
+                <a:latin typeface="Poppins"/>
+              </a:rPr>
+              <a:t>Université de Mostaganem — Dr. Madani BELACEL</a:t>
             </a:r>
           </a:p>
         </p:txBody>
@@ -5389,9 +5746,7 @@
   <p:cSld>
     <p:bg>
       <p:bgPr>
-        <a:solidFill>
-          <a:srgbClr val="FFFFFF"/>
-        </a:solidFill>
+        <a:solidFill>val="FFFFFF"/&gt;</a:solidFill>
         <a:effectLst/>
       </p:bgPr>
     </p:bg>
@@ -5416,9 +5771,7 @@
           <a:prstGeom prst="rect">
             <a:avLst/>
           </a:prstGeom>
-          <a:solidFill>
-            <a:srgbClr val="2C6E49"/>
-          </a:solidFill>
+          <a:solidFill>val="00875B"/&gt;</a:solidFill>
           <a:ln>
             <a:noFill/>
           </a:ln>
@@ -5469,9 +5822,7 @@
           <a:p>
             <a:pPr algn="l">
               <a:defRPr sz="2200" b="1">
-                <a:solidFill>
-                  <a:srgbClr val="1A5C33"/>
-                </a:solidFill>
+                <a:solidFill>val="006847"/&gt;</a:solidFill>
               </a:defRPr>
             </a:pPr>
             <a:r>
@@ -5507,9 +5858,7 @@
                 <a:spcPts val="600"/>
               </a:spcAft>
               <a:defRPr sz="1400">
-                <a:solidFill>
-                  <a:srgbClr val="222222"/>
-                </a:solidFill>
+                <a:solidFill>val="22344A"/&gt;</a:solidFill>
               </a:defRPr>
             </a:pPr>
             <a:r>
@@ -5522,9 +5871,7 @@
                 <a:spcPts val="600"/>
               </a:spcAft>
               <a:defRPr sz="1400">
-                <a:solidFill>
-                  <a:srgbClr val="222222"/>
-                </a:solidFill>
+                <a:solidFill>val="22344A"/&gt;</a:solidFill>
               </a:defRPr>
             </a:pPr>
             <a:r>
@@ -5537,9 +5884,7 @@
                 <a:spcPts val="600"/>
               </a:spcAft>
               <a:defRPr sz="1400">
-                <a:solidFill>
-                  <a:srgbClr val="222222"/>
-                </a:solidFill>
+                <a:solidFill>val="22344A"/&gt;</a:solidFill>
               </a:defRPr>
             </a:pPr>
             <a:r>
@@ -5552,9 +5897,7 @@
                 <a:spcPts val="600"/>
               </a:spcAft>
               <a:defRPr sz="1400">
-                <a:solidFill>
-                  <a:srgbClr val="222222"/>
-                </a:solidFill>
+                <a:solidFill>val="22344A"/&gt;</a:solidFill>
               </a:defRPr>
             </a:pPr>
             <a:r>
@@ -5567,9 +5910,7 @@
                 <a:spcPts val="600"/>
               </a:spcAft>
               <a:defRPr sz="1400">
-                <a:solidFill>
-                  <a:srgbClr val="222222"/>
-                </a:solidFill>
+                <a:solidFill>val="22344A"/&gt;</a:solidFill>
               </a:defRPr>
             </a:pPr>
             <a:r>
@@ -5582,13 +5923,52 @@
                 <a:spcPts val="600"/>
               </a:spcAft>
               <a:defRPr sz="1400">
+                <a:solidFill>val="22344A"/&gt;</a:solidFill>
+              </a:defRPr>
+            </a:pPr>
+            <a:r>
+              <a:t>• Contact enseignant :BELACEL Madani —madani.belacel@univ-mosta.dz</a:t>
+            </a:r>
+          </a:p>
+        </p:txBody>
+      </p:sp>
+      <p:sp>
+        <p:nvSpPr>
+          <p:cNvPr id="990001" name="Pied de page FLE"/>
+          <p:cNvSpPr>
+            <a:spLocks noGrp="1"/>
+          </p:cNvSpPr>
+          <p:nvPr/>
+        </p:nvSpPr>
+        <p:spPr>
+          <a:xfrm>
+            <a:off x="-228600" y="6400800"/>
+            <a:ext cx="109728" cy="274320"/>
+          </a:xfrm>
+          <a:prstGeom prst="rect">
+            <a:avLst/>
+          </a:prstGeom>
+        </p:spPr>
+        <p:txBody>
+          <a:bodyPr anchor="b"/>
+          <a:lstStyle/>
+          <a:p>
+            <a:pPr algn="r">
+              <a:defRPr sz="900">
                 <a:solidFill>
-                  <a:srgbClr val="222222"/>
+                  <a:srgbClr val="9AA7B6"/>
                 </a:solidFill>
-              </a:defRPr>
-            </a:pPr>
-            <a:r>
-              <a:t>• Contact enseignant :BELACEL Madani —madani.belacel@univ-mosta.dz</a:t>
+                <a:latin typeface="Poppins"/>
+              </a:defRPr>
+            </a:pPr>
+            <a:r>
+              <a:rPr lang="fr-FR" sz="900">
+                <a:solidFill>
+                  <a:srgbClr val="9AA7B6"/>
+                </a:solidFill>
+                <a:latin typeface="Poppins"/>
+              </a:rPr>
+              <a:t>Université de Mostaganem — Dr. Madani BELACEL</a:t>
             </a:r>
           </a:p>
         </p:txBody>
@@ -5606,9 +5986,7 @@
   <p:cSld>
     <p:bg>
       <p:bgPr>
-        <a:solidFill>
-          <a:srgbClr val="FFFFFF"/>
-        </a:solidFill>
+        <a:solidFill>val="FFFFFF"/&gt;</a:solidFill>
         <a:effectLst/>
       </p:bgPr>
     </p:bg>
@@ -5633,9 +6011,7 @@
           <a:prstGeom prst="rect">
             <a:avLst/>
           </a:prstGeom>
-          <a:solidFill>
-            <a:srgbClr val="2C6E49"/>
-          </a:solidFill>
+          <a:solidFill>val="00875B"/&gt;</a:solidFill>
           <a:ln>
             <a:noFill/>
           </a:ln>
@@ -5686,9 +6062,7 @@
           <a:p>
             <a:pPr algn="l">
               <a:defRPr sz="2200" b="1">
-                <a:solidFill>
-                  <a:srgbClr val="1A5C33"/>
-                </a:solidFill>
+                <a:solidFill>val="006847"/&gt;</a:solidFill>
               </a:defRPr>
             </a:pPr>
             <a:r>
@@ -5724,9 +6098,7 @@
                 <a:spcPts val="600"/>
               </a:spcAft>
               <a:defRPr sz="1400">
-                <a:solidFill>
-                  <a:srgbClr val="222222"/>
-                </a:solidFill>
+                <a:solidFill>val="22344A"/&gt;</a:solidFill>
               </a:defRPr>
             </a:pPr>
             <a:r>
@@ -5739,13 +6111,52 @@
                 <a:spcPts val="600"/>
               </a:spcAft>
               <a:defRPr sz="1400">
+                <a:solidFill>val="22344A"/&gt;</a:solidFill>
+              </a:defRPr>
+            </a:pPr>
+            <a:r>
+              <a:t>• Contexte algérien: Les communautés linguistiques en Algérie (arabophones, francophones, berbérophones) sont structurées en réseaux complexes. L'étude de ces réseaux (en ligne et hors ligne) éclaire les dynamiques de diglossie et de changement linguistique. Laloi 08-15 (2008)encadre la collecte de données personnelles, y compris dans les réseaux sociaux.</a:t>
+            </a:r>
+          </a:p>
+        </p:txBody>
+      </p:sp>
+      <p:sp>
+        <p:nvSpPr>
+          <p:cNvPr id="990001" name="Pied de page FLE"/>
+          <p:cNvSpPr>
+            <a:spLocks noGrp="1"/>
+          </p:cNvSpPr>
+          <p:nvPr/>
+        </p:nvSpPr>
+        <p:spPr>
+          <a:xfrm>
+            <a:off x="-228600" y="6400800"/>
+            <a:ext cx="109728" cy="274320"/>
+          </a:xfrm>
+          <a:prstGeom prst="rect">
+            <a:avLst/>
+          </a:prstGeom>
+        </p:spPr>
+        <p:txBody>
+          <a:bodyPr anchor="b"/>
+          <a:lstStyle/>
+          <a:p>
+            <a:pPr algn="r">
+              <a:defRPr sz="900">
                 <a:solidFill>
-                  <a:srgbClr val="222222"/>
+                  <a:srgbClr val="9AA7B6"/>
                 </a:solidFill>
-              </a:defRPr>
-            </a:pPr>
-            <a:r>
-              <a:t>• Contexte algérien: Les communautés linguistiques en Algérie (arabophones, francophones, berbérophones) sont structurées en réseaux complexes. L'étude de ces réseaux (en ligne et hors ligne) éclaire les dynamiques de diglossie et de changement linguistique. Laloi 08-15 (2008)encadre la collecte de données personnelles, y compris dans les réseaux sociaux.</a:t>
+                <a:latin typeface="Poppins"/>
+              </a:defRPr>
+            </a:pPr>
+            <a:r>
+              <a:rPr lang="fr-FR" sz="900">
+                <a:solidFill>
+                  <a:srgbClr val="9AA7B6"/>
+                </a:solidFill>
+                <a:latin typeface="Poppins"/>
+              </a:rPr>
+              <a:t>Université de Mostaganem — Dr. Madani BELACEL</a:t>
             </a:r>
           </a:p>
         </p:txBody>
@@ -5801,7 +6212,7 @@
     </a:clrScheme>
     <a:fontScheme name="Office">
       <a:majorFont>
-        <a:latin typeface="Calibri"/>
+        <a:latin typeface="Poppins"/>
         <a:ea typeface=""/>
         <a:cs typeface=""/>
         <a:font script="Jpan" typeface="ＭＳ Ｐゴシック"/>
@@ -5836,7 +6247,7 @@
         <a:font script="Geor" typeface="Sylfaen"/>
       </a:majorFont>
       <a:minorFont>
-        <a:latin typeface="Calibri"/>
+        <a:latin typeface="Poppins"/>
         <a:ea typeface=""/>
         <a:cs typeface=""/>
         <a:font script="Jpan" typeface="ＭＳ Ｐゴシック"/>
